--- a/docs/presentation/GHCAA-Mid.pptx
+++ b/docs/presentation/GHCAA-Mid.pptx
@@ -4,21 +4,25 @@
   <p:sldMasterIdLst>
     <p:sldMasterId id="2147483648" r:id="rId1"/>
   </p:sldMasterIdLst>
+  <p:notesMasterIdLst>
+    <p:notesMasterId r:id="rId15"/>
+  </p:notesMasterIdLst>
   <p:sldIdLst>
-    <p:sldId id="256" r:id="rId7"/>
-    <p:sldId id="257" r:id="rId9"/>
-    <p:sldId id="258" r:id="rId10"/>
-    <p:sldId id="259" r:id="rId11"/>
-    <p:sldId id="260" r:id="rId12"/>
-    <p:sldId id="261" r:id="rId13"/>
-    <p:sldId id="262" r:id="rId14"/>
-    <p:sldId id="263" r:id="rId15"/>
-    <p:sldId id="264" r:id="rId16"/>
-    <p:sldId id="265" r:id="rId17"/>
-    <p:sldId id="266" r:id="rId18"/>
-    <p:sldId id="267" r:id="rId19"/>
+    <p:sldId id="256" r:id="rId2"/>
+    <p:sldId id="257" r:id="rId3"/>
+    <p:sldId id="258" r:id="rId4"/>
+    <p:sldId id="259" r:id="rId5"/>
+    <p:sldId id="260" r:id="rId6"/>
+    <p:sldId id="261" r:id="rId7"/>
+    <p:sldId id="262" r:id="rId8"/>
+    <p:sldId id="263" r:id="rId9"/>
+    <p:sldId id="264" r:id="rId10"/>
+    <p:sldId id="265" r:id="rId11"/>
+    <p:sldId id="266" r:id="rId12"/>
+    <p:sldId id="267" r:id="rId13"/>
+    <p:sldId id="268" r:id="rId14"/>
   </p:sldIdLst>
-  <p:sldSz cx="12191695" cy="6858000" type="screen4x3"/>
+  <p:sldSz cx="12192000" cy="6858000"/>
   <p:notesSz cx="6858000" cy="9144000"/>
   <p:defaultTextStyle>
     <a:defPPr>
@@ -115,18 +119,39 @@
       </a:defRPr>
     </a:lvl9pPr>
   </p:defaultTextStyle>
+  <p:extLst>
+    <p:ext uri="{EFAFB233-063F-42B5-8137-9DF3F51BA10A}">
+      <p15:sldGuideLst xmlns:p15="http://schemas.microsoft.com/office/powerpoint/2012/main">
+        <p15:guide id="1" orient="horz" pos="2160">
+          <p15:clr>
+            <a:srgbClr val="A4A3A4"/>
+          </p15:clr>
+        </p15:guide>
+        <p15:guide id="2" pos="2880">
+          <p15:clr>
+            <a:srgbClr val="A4A3A4"/>
+          </p15:clr>
+        </p15:guide>
+      </p15:sldGuideLst>
+    </p:ext>
+  </p:extLst>
 </p:presentation>
 </file>
 
 <file path=ppt/charts/chart1.xml><?xml version="1.0" encoding="utf-8"?>
-<c:chartSpace xmlns:c="http://schemas.openxmlformats.org/drawingml/2006/chart" xmlns:a="http://schemas.openxmlformats.org/drawingml/2006/main" xmlns:r="http://schemas.openxmlformats.org/officeDocument/2006/relationships">
+<c:chartSpace xmlns:c="http://schemas.openxmlformats.org/drawingml/2006/chart" xmlns:a="http://schemas.openxmlformats.org/drawingml/2006/main" xmlns:r="http://schemas.openxmlformats.org/officeDocument/2006/relationships" xmlns:c16r2="http://schemas.microsoft.com/office/drawing/2015/06/chart">
   <c:date1904 val="0"/>
+  <c:lang val="en-US"/>
+  <c:roundedCorners val="1"/>
+  <c:style val="2"/>
   <c:chart>
     <c:autoTitleDeleted val="0"/>
     <c:plotArea>
+      <c:layout/>
       <c:barChart>
         <c:barDir val="bar"/>
         <c:grouping val="stacked"/>
+        <c:varyColors val="1"/>
         <c:ser>
           <c:idx val="0"/>
           <c:order val="0"/>
@@ -149,8 +174,16 @@
               <a:noFill/>
             </a:ln>
           </c:spPr>
+          <c:invertIfNegative val="1"/>
           <c:dLbls>
             <c:numFmt formatCode="0;;;" sourceLinked="0"/>
+            <c:spPr>
+              <a:noFill/>
+              <a:ln>
+                <a:noFill/>
+              </a:ln>
+              <a:effectLst/>
+            </c:spPr>
             <c:txPr>
               <a:bodyPr/>
               <a:lstStyle/>
@@ -162,6 +195,7 @@
                     </a:solidFill>
                   </a:defRPr>
                 </a:pPr>
+                <a:endParaRPr lang="en-US"/>
               </a:p>
             </c:txPr>
             <c:dLblPos val="ctr"/>
@@ -171,7 +205,12 @@
             <c:showSerName val="0"/>
             <c:showPercent val="0"/>
             <c:showBubbleSize val="0"/>
-            <c:showLeaderLines val="1"/>
+            <c:showLeaderLines val="0"/>
+            <c:extLst>
+              <c:ext xmlns:c15="http://schemas.microsoft.com/office/drawing/2012/chart" uri="{CE6537A1-D6FC-4f65-9D91-7224C49458BB}">
+                <c15:showLeaderLines val="0"/>
+              </c:ext>
+            </c:extLst>
           </c:dLbls>
           <c:cat>
             <c:strRef>
@@ -244,6 +283,23 @@
               </c:numCache>
             </c:numRef>
           </c:val>
+          <c:extLst>
+            <c:ext xmlns:c14="http://schemas.microsoft.com/office/drawing/2007/8/2/chart" uri="{6F2FDCE9-48DA-4B69-8628-5D25D57E5C99}">
+              <c14:invertSolidFillFmt>
+                <c14:spPr xmlns:c14="http://schemas.microsoft.com/office/drawing/2007/8/2/chart">
+                  <a:solidFill>
+                    <a:srgbClr val="FFFFFF"/>
+                  </a:solidFill>
+                  <a:ln>
+                    <a:noFill/>
+                  </a:ln>
+                </c14:spPr>
+              </c14:invertSolidFillFmt>
+            </c:ext>
+            <c:ext xmlns:c16="http://schemas.microsoft.com/office/drawing/2014/chart" uri="{C3380CC4-5D6E-409C-BE32-E72D297353CC}">
+              <c16:uniqueId val="{00000000-1E00-416F-9192-C9730DD9EF28}"/>
+            </c:ext>
+          </c:extLst>
         </c:ser>
         <c:ser>
           <c:idx val="1"/>
@@ -267,8 +323,16 @@
               <a:noFill/>
             </a:ln>
           </c:spPr>
+          <c:invertIfNegative val="1"/>
           <c:dLbls>
             <c:numFmt formatCode="0;;;" sourceLinked="0"/>
+            <c:spPr>
+              <a:noFill/>
+              <a:ln>
+                <a:noFill/>
+              </a:ln>
+              <a:effectLst/>
+            </c:spPr>
             <c:txPr>
               <a:bodyPr/>
               <a:lstStyle/>
@@ -280,6 +344,7 @@
                     </a:solidFill>
                   </a:defRPr>
                 </a:pPr>
+                <a:endParaRPr lang="en-US"/>
               </a:p>
             </c:txPr>
             <c:dLblPos val="ctr"/>
@@ -289,7 +354,12 @@
             <c:showSerName val="0"/>
             <c:showPercent val="0"/>
             <c:showBubbleSize val="0"/>
-            <c:showLeaderLines val="1"/>
+            <c:showLeaderLines val="0"/>
+            <c:extLst>
+              <c:ext xmlns:c15="http://schemas.microsoft.com/office/drawing/2012/chart" uri="{CE6537A1-D6FC-4f65-9D91-7224C49458BB}">
+                <c15:showLeaderLines val="0"/>
+              </c:ext>
+            </c:extLst>
           </c:dLbls>
           <c:cat>
             <c:strRef>
@@ -362,6 +432,23 @@
               </c:numCache>
             </c:numRef>
           </c:val>
+          <c:extLst>
+            <c:ext xmlns:c14="http://schemas.microsoft.com/office/drawing/2007/8/2/chart" uri="{6F2FDCE9-48DA-4B69-8628-5D25D57E5C99}">
+              <c14:invertSolidFillFmt>
+                <c14:spPr xmlns:c14="http://schemas.microsoft.com/office/drawing/2007/8/2/chart">
+                  <a:solidFill>
+                    <a:srgbClr val="FFFFFF"/>
+                  </a:solidFill>
+                  <a:ln>
+                    <a:noFill/>
+                  </a:ln>
+                </c14:spPr>
+              </c14:invertSolidFillFmt>
+            </c:ext>
+            <c:ext xmlns:c16="http://schemas.microsoft.com/office/drawing/2014/chart" uri="{C3380CC4-5D6E-409C-BE32-E72D297353CC}">
+              <c16:uniqueId val="{00000001-1E00-416F-9192-C9730DD9EF28}"/>
+            </c:ext>
+          </c:extLst>
         </c:ser>
         <c:ser>
           <c:idx val="2"/>
@@ -385,8 +472,16 @@
               <a:noFill/>
             </a:ln>
           </c:spPr>
+          <c:invertIfNegative val="1"/>
           <c:dLbls>
             <c:numFmt formatCode="0;;;" sourceLinked="0"/>
+            <c:spPr>
+              <a:noFill/>
+              <a:ln>
+                <a:noFill/>
+              </a:ln>
+              <a:effectLst/>
+            </c:spPr>
             <c:txPr>
               <a:bodyPr/>
               <a:lstStyle/>
@@ -398,6 +493,7 @@
                     </a:solidFill>
                   </a:defRPr>
                 </a:pPr>
+                <a:endParaRPr lang="en-US"/>
               </a:p>
             </c:txPr>
             <c:dLblPos val="ctr"/>
@@ -407,7 +503,12 @@
             <c:showSerName val="0"/>
             <c:showPercent val="0"/>
             <c:showBubbleSize val="0"/>
-            <c:showLeaderLines val="1"/>
+            <c:showLeaderLines val="0"/>
+            <c:extLst>
+              <c:ext xmlns:c15="http://schemas.microsoft.com/office/drawing/2012/chart" uri="{CE6537A1-D6FC-4f65-9D91-7224C49458BB}">
+                <c15:showLeaderLines val="0"/>
+              </c:ext>
+            </c:extLst>
           </c:dLbls>
           <c:cat>
             <c:strRef>
@@ -480,7 +581,32 @@
               </c:numCache>
             </c:numRef>
           </c:val>
+          <c:extLst>
+            <c:ext xmlns:c14="http://schemas.microsoft.com/office/drawing/2007/8/2/chart" uri="{6F2FDCE9-48DA-4B69-8628-5D25D57E5C99}">
+              <c14:invertSolidFillFmt>
+                <c14:spPr xmlns:c14="http://schemas.microsoft.com/office/drawing/2007/8/2/chart">
+                  <a:solidFill>
+                    <a:srgbClr val="FFFFFF"/>
+                  </a:solidFill>
+                  <a:ln>
+                    <a:noFill/>
+                  </a:ln>
+                </c14:spPr>
+              </c14:invertSolidFillFmt>
+            </c:ext>
+            <c:ext xmlns:c16="http://schemas.microsoft.com/office/drawing/2014/chart" uri="{C3380CC4-5D6E-409C-BE32-E72D297353CC}">
+              <c16:uniqueId val="{00000002-1E00-416F-9192-C9730DD9EF28}"/>
+            </c:ext>
+          </c:extLst>
         </c:ser>
+        <c:dLbls>
+          <c:showLegendKey val="0"/>
+          <c:showVal val="0"/>
+          <c:showCatName val="0"/>
+          <c:showSerName val="0"/>
+          <c:showPercent val="0"/>
+          <c:showBubbleSize val="0"/>
+        </c:dLbls>
         <c:gapWidth val="55"/>
         <c:overlap val="100"/>
         <c:axId val="-2068027336"/>
@@ -493,6 +619,7 @@
         </c:scaling>
         <c:delete val="0"/>
         <c:axPos val="l"/>
+        <c:numFmt formatCode="General" sourceLinked="0"/>
         <c:majorTickMark val="out"/>
         <c:minorTickMark val="none"/>
         <c:tickLblPos val="nextTo"/>
@@ -514,6 +641,7 @@
                 </a:solidFill>
               </a:defRPr>
             </a:pPr>
+            <a:endParaRPr lang="en-US"/>
           </a:p>
         </c:txPr>
         <c:crossAx val="-2113994440"/>
@@ -525,14 +653,18 @@
       </c:catAx>
       <c:valAx>
         <c:axId val="-2113994440"/>
-        <c:scaling/>
-        <c:delete/>
-        <c:axPos val="b"/>
+        <c:scaling>
+          <c:orientation val="minMax"/>
+        </c:scaling>
+        <c:delete val="1"/>
+        <c:axPos val="t"/>
+        <c:numFmt formatCode="General" sourceLinked="1"/>
         <c:majorTickMark val="out"/>
         <c:minorTickMark val="none"/>
         <c:tickLblPos val="nextTo"/>
         <c:crossAx val="-2068027336"/>
         <c:crosses val="autoZero"/>
+        <c:crossBetween val="between"/>
       </c:valAx>
     </c:plotArea>
     <c:legend>
@@ -545,10 +677,13 @@
           <a:pPr>
             <a:defRPr sz="1100"/>
           </a:pPr>
+          <a:endParaRPr lang="en-US"/>
         </a:p>
       </c:txPr>
     </c:legend>
+    <c:plotVisOnly val="1"/>
     <c:dispBlanksAs val="gap"/>
+    <c:showDLblsOverMax val="1"/>
   </c:chart>
   <c:txPr>
     <a:bodyPr/>
@@ -572,14 +707,19 @@
 </file>
 
 <file path=ppt/charts/chart2.xml><?xml version="1.0" encoding="utf-8"?>
-<c:chartSpace xmlns:c="http://schemas.openxmlformats.org/drawingml/2006/chart" xmlns:a="http://schemas.openxmlformats.org/drawingml/2006/main" xmlns:r="http://schemas.openxmlformats.org/officeDocument/2006/relationships">
+<c:chartSpace xmlns:c="http://schemas.openxmlformats.org/drawingml/2006/chart" xmlns:a="http://schemas.openxmlformats.org/drawingml/2006/main" xmlns:r="http://schemas.openxmlformats.org/officeDocument/2006/relationships" xmlns:c16r2="http://schemas.microsoft.com/office/drawing/2015/06/chart">
   <c:date1904 val="0"/>
+  <c:lang val="en-US"/>
+  <c:roundedCorners val="1"/>
+  <c:style val="2"/>
   <c:chart>
     <c:autoTitleDeleted val="1"/>
     <c:plotArea>
+      <c:layout/>
       <c:barChart>
         <c:barDir val="bar"/>
         <c:grouping val="clustered"/>
+        <c:varyColors val="1"/>
         <c:ser>
           <c:idx val="0"/>
           <c:order val="0"/>
@@ -599,8 +739,16 @@
               <a:srgbClr val="0F6C73"/>
             </a:solidFill>
           </c:spPr>
+          <c:invertIfNegative val="1"/>
           <c:dLbls>
             <c:numFmt formatCode="#,##0" sourceLinked="0"/>
+            <c:spPr>
+              <a:noFill/>
+              <a:ln>
+                <a:noFill/>
+              </a:ln>
+              <a:effectLst/>
+            </c:spPr>
             <c:txPr>
               <a:bodyPr/>
               <a:lstStyle/>
@@ -612,6 +760,7 @@
                     </a:solidFill>
                   </a:defRPr>
                 </a:pPr>
+                <a:endParaRPr lang="en-US"/>
               </a:p>
             </c:txPr>
             <c:dLblPos val="outEnd"/>
@@ -621,7 +770,12 @@
             <c:showSerName val="0"/>
             <c:showPercent val="0"/>
             <c:showBubbleSize val="0"/>
-            <c:showLeaderLines val="1"/>
+            <c:showLeaderLines val="0"/>
+            <c:extLst>
+              <c:ext xmlns:c15="http://schemas.microsoft.com/office/drawing/2012/chart" uri="{CE6537A1-D6FC-4f65-9D91-7224C49458BB}">
+                <c15:showLeaderLines val="0"/>
+              </c:ext>
+            </c:extLst>
           </c:dLbls>
           <c:cat>
             <c:strRef>
@@ -664,7 +818,29 @@
               </c:numCache>
             </c:numRef>
           </c:val>
+          <c:extLst>
+            <c:ext xmlns:c14="http://schemas.microsoft.com/office/drawing/2007/8/2/chart" uri="{6F2FDCE9-48DA-4B69-8628-5D25D57E5C99}">
+              <c14:invertSolidFillFmt>
+                <c14:spPr xmlns:c14="http://schemas.microsoft.com/office/drawing/2007/8/2/chart">
+                  <a:solidFill>
+                    <a:srgbClr val="FFFFFF"/>
+                  </a:solidFill>
+                </c14:spPr>
+              </c14:invertSolidFillFmt>
+            </c:ext>
+            <c:ext xmlns:c16="http://schemas.microsoft.com/office/drawing/2014/chart" uri="{C3380CC4-5D6E-409C-BE32-E72D297353CC}">
+              <c16:uniqueId val="{00000000-F87E-4EFB-80EB-7F94D91B2BFE}"/>
+            </c:ext>
+          </c:extLst>
         </c:ser>
+        <c:dLbls>
+          <c:showLegendKey val="0"/>
+          <c:showVal val="0"/>
+          <c:showCatName val="0"/>
+          <c:showSerName val="0"/>
+          <c:showPercent val="0"/>
+          <c:showBubbleSize val="0"/>
+        </c:dLbls>
         <c:gapWidth val="60"/>
         <c:axId val="-2068027336"/>
         <c:axId val="-2113994440"/>
@@ -676,6 +852,7 @@
         </c:scaling>
         <c:delete val="0"/>
         <c:axPos val="l"/>
+        <c:numFmt formatCode="General" sourceLinked="0"/>
         <c:majorTickMark val="out"/>
         <c:minorTickMark val="none"/>
         <c:tickLblPos val="nextTo"/>
@@ -697,6 +874,7 @@
                 </a:solidFill>
               </a:defRPr>
             </a:pPr>
+            <a:endParaRPr lang="en-US"/>
           </a:p>
         </c:txPr>
         <c:crossAx val="-2113994440"/>
@@ -708,17 +886,23 @@
       </c:catAx>
       <c:valAx>
         <c:axId val="-2113994440"/>
-        <c:scaling/>
-        <c:delete/>
-        <c:axPos val="b"/>
+        <c:scaling>
+          <c:orientation val="minMax"/>
+        </c:scaling>
+        <c:delete val="1"/>
+        <c:axPos val="t"/>
+        <c:numFmt formatCode="General" sourceLinked="1"/>
         <c:majorTickMark val="out"/>
         <c:minorTickMark val="none"/>
         <c:tickLblPos val="nextTo"/>
         <c:crossAx val="-2068027336"/>
         <c:crosses val="autoZero"/>
+        <c:crossBetween val="between"/>
       </c:valAx>
     </c:plotArea>
+    <c:plotVisOnly val="1"/>
     <c:dispBlanksAs val="gap"/>
+    <c:showDLblsOverMax val="1"/>
   </c:chart>
   <c:txPr>
     <a:bodyPr/>
@@ -742,7 +926,7 @@
 </file>
 
 <file path=ppt/notesMasters/notesMaster1.xml><?xml version="1.0" encoding="utf-8"?>
-<p:notesMaster xmlns:a="http://schemas.openxmlformats.org/drawingml/2006/main" xmlns:p="http://schemas.openxmlformats.org/presentationml/2006/main" xmlns:r="http://schemas.openxmlformats.org/officeDocument/2006/relationships">
+<p:notesMaster xmlns:a="http://schemas.openxmlformats.org/drawingml/2006/main" xmlns:r="http://schemas.openxmlformats.org/officeDocument/2006/relationships" xmlns:p="http://schemas.openxmlformats.org/presentationml/2006/main">
   <p:cSld>
     <p:bg>
       <p:bgRef idx="1001">
@@ -763,241 +947,16 @@
           <a:chExt cx="0" cy="0"/>
         </a:xfrm>
       </p:grpSpPr>
-      <p:sp>
-        <p:nvSpPr>
-          <p:cNvPr id="2" name="Header Placeholder 1"/>
-          <p:cNvSpPr>
-            <a:spLocks noGrp="1"/>
-          </p:cNvSpPr>
-          <p:nvPr>
-            <p:ph type="hdr" sz="quarter"/>
-          </p:nvPr>
-        </p:nvSpPr>
-        <p:spPr>
-          <a:xfrm>
-            <a:off x="0" y="0"/>
-            <a:ext cx="2971800" cy="457200"/>
-          </a:xfrm>
-          <a:prstGeom prst="rect">
-            <a:avLst/>
-          </a:prstGeom>
-        </p:spPr>
-        <p:txBody>
-          <a:bodyPr vert="horz" lIns="91440" tIns="45720" rIns="91440" bIns="45720" rtlCol="0"/>
-          <a:lstStyle>
-            <a:lvl1pPr algn="l">
-              <a:defRPr sz="1200"/>
-            </a:lvl1pPr>
-          </a:lstStyle>
-          <a:p>
-            <a:endParaRPr lang="en-US"/>
-          </a:p>
-        </p:txBody>
-      </p:sp>
-      <p:sp>
-        <p:nvSpPr>
-          <p:cNvPr id="3" name="Date Placeholder 2"/>
-          <p:cNvSpPr>
-            <a:spLocks noGrp="1"/>
-          </p:cNvSpPr>
-          <p:nvPr>
-            <p:ph type="dt" idx="1"/>
-          </p:nvPr>
-        </p:nvSpPr>
-        <p:spPr>
-          <a:xfrm>
-            <a:off x="3884613" y="0"/>
-            <a:ext cx="2971800" cy="457200"/>
-          </a:xfrm>
-          <a:prstGeom prst="rect">
-            <a:avLst/>
-          </a:prstGeom>
-        </p:spPr>
-        <p:txBody>
-          <a:bodyPr vert="horz" lIns="91440" tIns="45720" rIns="91440" bIns="45720" rtlCol="0"/>
-          <a:lstStyle>
-            <a:lvl1pPr algn="r">
-              <a:defRPr sz="1200"/>
-            </a:lvl1pPr>
-          </a:lstStyle>
-          <a:p>
-            <a:fld id="{0F89C1C7-3DCD-1040-A9CF-14679D8B5DDD}" type="datetimeFigureOut">
-              <a:rPr lang="en-US" smtClean="0"/>
-              <a:t>10/17/16</a:t>
-            </a:fld>
-            <a:endParaRPr lang="en-US"/>
-          </a:p>
-        </p:txBody>
-      </p:sp>
-      <p:sp>
-        <p:nvSpPr>
-          <p:cNvPr id="4" name="Slide Image Placeholder 3"/>
-          <p:cNvSpPr>
-            <a:spLocks noGrp="1" noRot="1" noChangeAspect="1"/>
-          </p:cNvSpPr>
-          <p:nvPr>
-            <p:ph type="sldImg" idx="2"/>
-          </p:nvPr>
-        </p:nvSpPr>
-        <p:spPr>
-          <a:xfrm>
-            <a:off x="1143000" y="685800"/>
-            <a:ext cx="4572000" cy="3429000"/>
-          </a:xfrm>
-          <a:prstGeom prst="rect">
-            <a:avLst/>
-          </a:prstGeom>
-          <a:noFill/>
-          <a:ln w="12700">
-            <a:solidFill>
-              <a:prstClr val="black"/>
-            </a:solidFill>
-          </a:ln>
-        </p:spPr>
-        <p:txBody>
-          <a:bodyPr vert="horz" lIns="91440" tIns="45720" rIns="91440" bIns="45720" rtlCol="0" anchor="ctr"/>
-          <a:lstStyle/>
-          <a:p>
-            <a:endParaRPr lang="en-US"/>
-          </a:p>
-        </p:txBody>
-      </p:sp>
-      <p:sp>
-        <p:nvSpPr>
-          <p:cNvPr id="5" name="Notes Placeholder 4"/>
-          <p:cNvSpPr>
-            <a:spLocks noGrp="1"/>
-          </p:cNvSpPr>
-          <p:nvPr>
-            <p:ph type="body" sz="quarter" idx="3"/>
-          </p:nvPr>
-        </p:nvSpPr>
-        <p:spPr>
-          <a:xfrm>
-            <a:off x="685800" y="4343400"/>
-            <a:ext cx="5486400" cy="4114800"/>
-          </a:xfrm>
-          <a:prstGeom prst="rect">
-            <a:avLst/>
-          </a:prstGeom>
-        </p:spPr>
-        <p:txBody>
-          <a:bodyPr vert="horz" lIns="91440" tIns="45720" rIns="91440" bIns="45720" rtlCol="0"/>
-          <a:lstStyle/>
-          <a:p>
-            <a:pPr lvl="0"/>
-            <a:r>
-              <a:rPr lang="en-US" smtClean="0"/>
-              <a:t>Click to edit Master text styles</a:t>
-            </a:r>
-          </a:p>
-          <a:p>
-            <a:pPr lvl="1"/>
-            <a:r>
-              <a:rPr lang="en-US" smtClean="0"/>
-              <a:t>Second level</a:t>
-            </a:r>
-          </a:p>
-          <a:p>
-            <a:pPr lvl="2"/>
-            <a:r>
-              <a:rPr lang="en-US" smtClean="0"/>
-              <a:t>Third level</a:t>
-            </a:r>
-          </a:p>
-          <a:p>
-            <a:pPr lvl="3"/>
-            <a:r>
-              <a:rPr lang="en-US" smtClean="0"/>
-              <a:t>Fourth level</a:t>
-            </a:r>
-          </a:p>
-          <a:p>
-            <a:pPr lvl="4"/>
-            <a:r>
-              <a:rPr lang="en-US" smtClean="0"/>
-              <a:t>Fifth level</a:t>
-            </a:r>
-            <a:endParaRPr lang="en-US"/>
-          </a:p>
-        </p:txBody>
-      </p:sp>
-      <p:sp>
-        <p:nvSpPr>
-          <p:cNvPr id="6" name="Footer Placeholder 5"/>
-          <p:cNvSpPr>
-            <a:spLocks noGrp="1"/>
-          </p:cNvSpPr>
-          <p:nvPr>
-            <p:ph type="ftr" sz="quarter" idx="4"/>
-          </p:nvPr>
-        </p:nvSpPr>
-        <p:spPr>
-          <a:xfrm>
-            <a:off x="0" y="8685213"/>
-            <a:ext cx="2971800" cy="457200"/>
-          </a:xfrm>
-          <a:prstGeom prst="rect">
-            <a:avLst/>
-          </a:prstGeom>
-        </p:spPr>
-        <p:txBody>
-          <a:bodyPr vert="horz" lIns="91440" tIns="45720" rIns="91440" bIns="45720" rtlCol="0" anchor="b"/>
-          <a:lstStyle>
-            <a:lvl1pPr algn="l">
-              <a:defRPr sz="1200"/>
-            </a:lvl1pPr>
-          </a:lstStyle>
-          <a:p>
-            <a:endParaRPr lang="en-US"/>
-          </a:p>
-        </p:txBody>
-      </p:sp>
-      <p:sp>
-        <p:nvSpPr>
-          <p:cNvPr id="7" name="Slide Number Placeholder 6"/>
-          <p:cNvSpPr>
-            <a:spLocks noGrp="1"/>
-          </p:cNvSpPr>
-          <p:nvPr>
-            <p:ph type="sldNum" sz="quarter" idx="5"/>
-          </p:nvPr>
-        </p:nvSpPr>
-        <p:spPr>
-          <a:xfrm>
-            <a:off x="3884613" y="8685213"/>
-            <a:ext cx="2971800" cy="457200"/>
-          </a:xfrm>
-          <a:prstGeom prst="rect">
-            <a:avLst/>
-          </a:prstGeom>
-        </p:spPr>
-        <p:txBody>
-          <a:bodyPr vert="horz" lIns="91440" tIns="45720" rIns="91440" bIns="45720" rtlCol="0" anchor="b"/>
-          <a:lstStyle>
-            <a:lvl1pPr algn="r">
-              <a:defRPr sz="1200"/>
-            </a:lvl1pPr>
-          </a:lstStyle>
-          <a:p>
-            <a:fld id="{BB5E49A5-4136-284D-997B-48E1D791AD67}" type="slidenum">
-              <a:rPr lang="en-US" smtClean="0"/>
-              <a:t>‹#›</a:t>
-            </a:fld>
-            <a:endParaRPr lang="en-US"/>
-          </a:p>
-        </p:txBody>
-      </p:sp>
     </p:spTree>
     <p:extLst>
       <p:ext uri="{BB962C8B-B14F-4D97-AF65-F5344CB8AC3E}">
-        <p14:creationId xmlns:p14="http://schemas.microsoft.com/office/powerpoint/2010/main" val="2623252185"/>
+        <p14:creationId xmlns:p14="http://schemas.microsoft.com/office/powerpoint/2010/main" val="3684989955"/>
       </p:ext>
     </p:extLst>
   </p:cSld>
   <p:clrMap bg1="lt1" tx1="dk1" bg2="lt2" tx2="dk2" accent1="accent1" accent2="accent2" accent3="accent3" accent4="accent4" accent5="accent5" accent6="accent6" hlink="hlink" folHlink="folHlink"/>
   <p:notesStyle>
-    <a:lvl1pPr marL="0" algn="l" defTabSz="457200" rtl="0" eaLnBrk="1" latinLnBrk="0" hangingPunct="1">
+    <a:lvl1pPr marL="0" algn="l" defTabSz="914400" rtl="0" eaLnBrk="1" latinLnBrk="0" hangingPunct="1">
       <a:defRPr sz="1200" kern="1200">
         <a:solidFill>
           <a:schemeClr val="tx1"/>
@@ -1007,7 +966,7 @@
         <a:cs typeface="+mn-cs"/>
       </a:defRPr>
     </a:lvl1pPr>
-    <a:lvl2pPr marL="457200" algn="l" defTabSz="457200" rtl="0" eaLnBrk="1" latinLnBrk="0" hangingPunct="1">
+    <a:lvl2pPr marL="457200" algn="l" defTabSz="914400" rtl="0" eaLnBrk="1" latinLnBrk="0" hangingPunct="1">
       <a:defRPr sz="1200" kern="1200">
         <a:solidFill>
           <a:schemeClr val="tx1"/>
@@ -1017,7 +976,7 @@
         <a:cs typeface="+mn-cs"/>
       </a:defRPr>
     </a:lvl2pPr>
-    <a:lvl3pPr marL="914400" algn="l" defTabSz="457200" rtl="0" eaLnBrk="1" latinLnBrk="0" hangingPunct="1">
+    <a:lvl3pPr marL="914400" algn="l" defTabSz="914400" rtl="0" eaLnBrk="1" latinLnBrk="0" hangingPunct="1">
       <a:defRPr sz="1200" kern="1200">
         <a:solidFill>
           <a:schemeClr val="tx1"/>
@@ -1027,7 +986,7 @@
         <a:cs typeface="+mn-cs"/>
       </a:defRPr>
     </a:lvl3pPr>
-    <a:lvl4pPr marL="1371600" algn="l" defTabSz="457200" rtl="0" eaLnBrk="1" latinLnBrk="0" hangingPunct="1">
+    <a:lvl4pPr marL="1371600" algn="l" defTabSz="914400" rtl="0" eaLnBrk="1" latinLnBrk="0" hangingPunct="1">
       <a:defRPr sz="1200" kern="1200">
         <a:solidFill>
           <a:schemeClr val="tx1"/>
@@ -1037,7 +996,7 @@
         <a:cs typeface="+mn-cs"/>
       </a:defRPr>
     </a:lvl4pPr>
-    <a:lvl5pPr marL="1828800" algn="l" defTabSz="457200" rtl="0" eaLnBrk="1" latinLnBrk="0" hangingPunct="1">
+    <a:lvl5pPr marL="1828800" algn="l" defTabSz="914400" rtl="0" eaLnBrk="1" latinLnBrk="0" hangingPunct="1">
       <a:defRPr sz="1200" kern="1200">
         <a:solidFill>
           <a:schemeClr val="tx1"/>
@@ -1047,7 +1006,7 @@
         <a:cs typeface="+mn-cs"/>
       </a:defRPr>
     </a:lvl5pPr>
-    <a:lvl6pPr marL="2286000" algn="l" defTabSz="457200" rtl="0" eaLnBrk="1" latinLnBrk="0" hangingPunct="1">
+    <a:lvl6pPr marL="2286000" algn="l" defTabSz="914400" rtl="0" eaLnBrk="1" latinLnBrk="0" hangingPunct="1">
       <a:defRPr sz="1200" kern="1200">
         <a:solidFill>
           <a:schemeClr val="tx1"/>
@@ -1057,7 +1016,7 @@
         <a:cs typeface="+mn-cs"/>
       </a:defRPr>
     </a:lvl6pPr>
-    <a:lvl7pPr marL="2743200" algn="l" defTabSz="457200" rtl="0" eaLnBrk="1" latinLnBrk="0" hangingPunct="1">
+    <a:lvl7pPr marL="2743200" algn="l" defTabSz="914400" rtl="0" eaLnBrk="1" latinLnBrk="0" hangingPunct="1">
       <a:defRPr sz="1200" kern="1200">
         <a:solidFill>
           <a:schemeClr val="tx1"/>
@@ -1067,7 +1026,7 @@
         <a:cs typeface="+mn-cs"/>
       </a:defRPr>
     </a:lvl7pPr>
-    <a:lvl8pPr marL="3200400" algn="l" defTabSz="457200" rtl="0" eaLnBrk="1" latinLnBrk="0" hangingPunct="1">
+    <a:lvl8pPr marL="3200400" algn="l" defTabSz="914400" rtl="0" eaLnBrk="1" latinLnBrk="0" hangingPunct="1">
       <a:defRPr sz="1200" kern="1200">
         <a:solidFill>
           <a:schemeClr val="tx1"/>
@@ -1077,7 +1036,7 @@
         <a:cs typeface="+mn-cs"/>
       </a:defRPr>
     </a:lvl8pPr>
-    <a:lvl9pPr marL="3657600" algn="l" defTabSz="457200" rtl="0" eaLnBrk="1" latinLnBrk="0" hangingPunct="1">
+    <a:lvl9pPr marL="3657600" algn="l" defTabSz="914400" rtl="0" eaLnBrk="1" latinLnBrk="0" hangingPunct="1">
       <a:defRPr sz="1200" kern="1200">
         <a:solidFill>
           <a:schemeClr val="tx1"/>
@@ -1092,7 +1051,7 @@
 </file>
 
 <file path=ppt/notesSlides/notesSlide1.xml><?xml version="1.0" encoding="utf-8"?>
-<p:notes xmlns:a="http://schemas.openxmlformats.org/drawingml/2006/main" xmlns:p="http://schemas.openxmlformats.org/presentationml/2006/main" xmlns:r="http://schemas.openxmlformats.org/officeDocument/2006/relationships">
+<p:notes xmlns:a="http://schemas.openxmlformats.org/drawingml/2006/main" xmlns:r="http://schemas.openxmlformats.org/officeDocument/2006/relationships" xmlns:p="http://schemas.openxmlformats.org/presentationml/2006/main">
   <p:cSld>
     <p:spTree>
       <p:nvGrpSpPr>
@@ -1112,7 +1071,7 @@
         <p:nvSpPr>
           <p:cNvPr id="2" name="Slide Image Placeholder 1"/>
           <p:cNvSpPr>
-            <a:spLocks noGrp="1"/>
+            <a:spLocks noGrp="1" noRot="1" noChangeAspect="1"/>
           </p:cNvSpPr>
           <p:nvPr>
             <p:ph type="sldImg" idx="2"/>
@@ -1127,7 +1086,7 @@
             <a:spLocks noGrp="1"/>
           </p:cNvSpPr>
           <p:nvPr>
-            <p:ph type="body" idx="3" sz="quarter"/>
+            <p:ph type="body" sz="quarter" idx="3"/>
           </p:nvPr>
         </p:nvSpPr>
         <p:spPr/>
@@ -1148,7 +1107,7 @@
             <a:spLocks noGrp="1"/>
           </p:cNvSpPr>
           <p:nvPr>
-            <p:ph type="sldNum" idx="5" sz="quarter"/>
+            <p:ph type="sldNum" sz="quarter" idx="5"/>
           </p:nvPr>
         </p:nvSpPr>
         <p:spPr/>
@@ -1162,7 +1121,7 @@
 </file>
 
 <file path=ppt/notesSlides/notesSlide10.xml><?xml version="1.0" encoding="utf-8"?>
-<p:notes xmlns:a="http://schemas.openxmlformats.org/drawingml/2006/main" xmlns:p="http://schemas.openxmlformats.org/presentationml/2006/main" xmlns:r="http://schemas.openxmlformats.org/officeDocument/2006/relationships">
+<p:notes xmlns:a="http://schemas.openxmlformats.org/drawingml/2006/main" xmlns:r="http://schemas.openxmlformats.org/officeDocument/2006/relationships" xmlns:p="http://schemas.openxmlformats.org/presentationml/2006/main">
   <p:cSld>
     <p:spTree>
       <p:nvGrpSpPr>
@@ -1182,7 +1141,7 @@
         <p:nvSpPr>
           <p:cNvPr id="2" name="Slide Image Placeholder 1"/>
           <p:cNvSpPr>
-            <a:spLocks noGrp="1"/>
+            <a:spLocks noGrp="1" noRot="1" noChangeAspect="1"/>
           </p:cNvSpPr>
           <p:nvPr>
             <p:ph type="sldImg" idx="2"/>
@@ -1197,7 +1156,7 @@
             <a:spLocks noGrp="1"/>
           </p:cNvSpPr>
           <p:nvPr>
-            <p:ph type="body" idx="3" sz="quarter"/>
+            <p:ph type="body" sz="quarter" idx="3"/>
           </p:nvPr>
         </p:nvSpPr>
         <p:spPr/>
@@ -1218,7 +1177,7 @@
             <a:spLocks noGrp="1"/>
           </p:cNvSpPr>
           <p:nvPr>
-            <p:ph type="sldNum" idx="5" sz="quarter"/>
+            <p:ph type="sldNum" sz="quarter" idx="5"/>
           </p:nvPr>
         </p:nvSpPr>
         <p:spPr/>
@@ -1232,7 +1191,7 @@
 </file>
 
 <file path=ppt/notesSlides/notesSlide11.xml><?xml version="1.0" encoding="utf-8"?>
-<p:notes xmlns:a="http://schemas.openxmlformats.org/drawingml/2006/main" xmlns:p="http://schemas.openxmlformats.org/presentationml/2006/main" xmlns:r="http://schemas.openxmlformats.org/officeDocument/2006/relationships">
+<p:notes xmlns:a="http://schemas.openxmlformats.org/drawingml/2006/main" xmlns:r="http://schemas.openxmlformats.org/officeDocument/2006/relationships" xmlns:p="http://schemas.openxmlformats.org/presentationml/2006/main">
   <p:cSld>
     <p:spTree>
       <p:nvGrpSpPr>
@@ -1252,7 +1211,7 @@
         <p:nvSpPr>
           <p:cNvPr id="2" name="Slide Image Placeholder 1"/>
           <p:cNvSpPr>
-            <a:spLocks noGrp="1"/>
+            <a:spLocks noGrp="1" noRot="1" noChangeAspect="1"/>
           </p:cNvSpPr>
           <p:nvPr>
             <p:ph type="sldImg" idx="2"/>
@@ -1267,7 +1226,7 @@
             <a:spLocks noGrp="1"/>
           </p:cNvSpPr>
           <p:nvPr>
-            <p:ph type="body" idx="3" sz="quarter"/>
+            <p:ph type="body" sz="quarter" idx="3"/>
           </p:nvPr>
         </p:nvSpPr>
         <p:spPr/>
@@ -1288,7 +1247,7 @@
             <a:spLocks noGrp="1"/>
           </p:cNvSpPr>
           <p:nvPr>
-            <p:ph type="sldNum" idx="5" sz="quarter"/>
+            <p:ph type="sldNum" sz="quarter" idx="5"/>
           </p:nvPr>
         </p:nvSpPr>
         <p:spPr/>
@@ -1302,7 +1261,7 @@
 </file>
 
 <file path=ppt/notesSlides/notesSlide12.xml><?xml version="1.0" encoding="utf-8"?>
-<p:notes xmlns:a="http://schemas.openxmlformats.org/drawingml/2006/main" xmlns:p="http://schemas.openxmlformats.org/presentationml/2006/main" xmlns:r="http://schemas.openxmlformats.org/officeDocument/2006/relationships">
+<p:notes xmlns:a="http://schemas.openxmlformats.org/drawingml/2006/main" xmlns:r="http://schemas.openxmlformats.org/officeDocument/2006/relationships" xmlns:p="http://schemas.openxmlformats.org/presentationml/2006/main">
   <p:cSld>
     <p:spTree>
       <p:nvGrpSpPr>
@@ -1322,7 +1281,7 @@
         <p:nvSpPr>
           <p:cNvPr id="2" name="Slide Image Placeholder 1"/>
           <p:cNvSpPr>
-            <a:spLocks noGrp="1"/>
+            <a:spLocks noGrp="1" noRot="1" noChangeAspect="1"/>
           </p:cNvSpPr>
           <p:nvPr>
             <p:ph type="sldImg" idx="2"/>
@@ -1337,7 +1296,7 @@
             <a:spLocks noGrp="1"/>
           </p:cNvSpPr>
           <p:nvPr>
-            <p:ph type="body" idx="3" sz="quarter"/>
+            <p:ph type="body" sz="quarter" idx="3"/>
           </p:nvPr>
         </p:nvSpPr>
         <p:spPr/>
@@ -1358,7 +1317,7 @@
             <a:spLocks noGrp="1"/>
           </p:cNvSpPr>
           <p:nvPr>
-            <p:ph type="sldNum" idx="5" sz="quarter"/>
+            <p:ph type="sldNum" sz="quarter" idx="5"/>
           </p:nvPr>
         </p:nvSpPr>
         <p:spPr/>
@@ -1371,8 +1330,107 @@
 </p:notes>
 </file>
 
+<file path=ppt/notesSlides/notesSlide13.xml><?xml version="1.0" encoding="utf-8"?>
+<p:notes xmlns:a="http://schemas.openxmlformats.org/drawingml/2006/main" xmlns:r="http://schemas.openxmlformats.org/officeDocument/2006/relationships" xmlns:p="http://schemas.openxmlformats.org/presentationml/2006/main">
+  <p:cSld>
+    <p:spTree>
+      <p:nvGrpSpPr>
+        <p:cNvPr id="1" name="">
+          <a:extLst>
+            <a:ext uri="{FF2B5EF4-FFF2-40B4-BE49-F238E27FC236}">
+              <a16:creationId xmlns:a16="http://schemas.microsoft.com/office/drawing/2014/main" id="{982245EB-4271-6E88-6C24-F0766A8E39DA}"/>
+            </a:ext>
+          </a:extLst>
+        </p:cNvPr>
+        <p:cNvGrpSpPr/>
+        <p:nvPr/>
+      </p:nvGrpSpPr>
+      <p:grpSpPr>
+        <a:xfrm>
+          <a:off x="0" y="0"/>
+          <a:ext cx="0" cy="0"/>
+          <a:chOff x="0" y="0"/>
+          <a:chExt cx="0" cy="0"/>
+        </a:xfrm>
+      </p:grpSpPr>
+      <p:sp>
+        <p:nvSpPr>
+          <p:cNvPr id="2" name="Slide Image Placeholder 1">
+            <a:extLst>
+              <a:ext uri="{FF2B5EF4-FFF2-40B4-BE49-F238E27FC236}">
+                <a16:creationId xmlns:a16="http://schemas.microsoft.com/office/drawing/2014/main" id="{00A00A3A-6F97-0437-9D92-B6F72191DC41}"/>
+              </a:ext>
+            </a:extLst>
+          </p:cNvPr>
+          <p:cNvSpPr>
+            <a:spLocks noGrp="1" noRot="1" noChangeAspect="1"/>
+          </p:cNvSpPr>
+          <p:nvPr>
+            <p:ph type="sldImg" idx="2"/>
+          </p:nvPr>
+        </p:nvSpPr>
+        <p:spPr/>
+      </p:sp>
+      <p:sp>
+        <p:nvSpPr>
+          <p:cNvPr id="3" name="Notes Placeholder 2">
+            <a:extLst>
+              <a:ext uri="{FF2B5EF4-FFF2-40B4-BE49-F238E27FC236}">
+                <a16:creationId xmlns:a16="http://schemas.microsoft.com/office/drawing/2014/main" id="{1E150312-023D-885F-7105-96527AC2F540}"/>
+              </a:ext>
+            </a:extLst>
+          </p:cNvPr>
+          <p:cNvSpPr>
+            <a:spLocks noGrp="1"/>
+          </p:cNvSpPr>
+          <p:nvPr>
+            <p:ph type="body" sz="quarter" idx="3"/>
+          </p:nvPr>
+        </p:nvSpPr>
+        <p:spPr/>
+        <p:txBody>
+          <a:bodyPr/>
+          <a:lstStyle/>
+          <a:p>
+            <a:r>
+              <a:t>The tracker counts understate progress, because finished items move to an archive. Phone checks on a real device and two follow-up fixes wait for the election calendar.</a:t>
+            </a:r>
+          </a:p>
+        </p:txBody>
+      </p:sp>
+      <p:sp>
+        <p:nvSpPr>
+          <p:cNvPr id="4" name="Slide Number Placeholder 3">
+            <a:extLst>
+              <a:ext uri="{FF2B5EF4-FFF2-40B4-BE49-F238E27FC236}">
+                <a16:creationId xmlns:a16="http://schemas.microsoft.com/office/drawing/2014/main" id="{DA2E5565-8912-3605-CFC3-46F78DEFC726}"/>
+              </a:ext>
+            </a:extLst>
+          </p:cNvPr>
+          <p:cNvSpPr>
+            <a:spLocks noGrp="1"/>
+          </p:cNvSpPr>
+          <p:nvPr>
+            <p:ph type="sldNum" sz="quarter" idx="5"/>
+          </p:nvPr>
+        </p:nvSpPr>
+        <p:spPr/>
+      </p:sp>
+    </p:spTree>
+    <p:extLst>
+      <p:ext uri="{BB962C8B-B14F-4D97-AF65-F5344CB8AC3E}">
+        <p14:creationId xmlns:p14="http://schemas.microsoft.com/office/powerpoint/2010/main" val="2269091840"/>
+      </p:ext>
+    </p:extLst>
+  </p:cSld>
+  <p:clrMapOvr>
+    <a:masterClrMapping/>
+  </p:clrMapOvr>
+</p:notes>
+</file>
+
 <file path=ppt/notesSlides/notesSlide2.xml><?xml version="1.0" encoding="utf-8"?>
-<p:notes xmlns:a="http://schemas.openxmlformats.org/drawingml/2006/main" xmlns:p="http://schemas.openxmlformats.org/presentationml/2006/main" xmlns:r="http://schemas.openxmlformats.org/officeDocument/2006/relationships">
+<p:notes xmlns:a="http://schemas.openxmlformats.org/drawingml/2006/main" xmlns:r="http://schemas.openxmlformats.org/officeDocument/2006/relationships" xmlns:p="http://schemas.openxmlformats.org/presentationml/2006/main">
   <p:cSld>
     <p:spTree>
       <p:nvGrpSpPr>
@@ -1392,7 +1450,7 @@
         <p:nvSpPr>
           <p:cNvPr id="2" name="Slide Image Placeholder 1"/>
           <p:cNvSpPr>
-            <a:spLocks noGrp="1"/>
+            <a:spLocks noGrp="1" noRot="1" noChangeAspect="1"/>
           </p:cNvSpPr>
           <p:nvPr>
             <p:ph type="sldImg" idx="2"/>
@@ -1407,7 +1465,7 @@
             <a:spLocks noGrp="1"/>
           </p:cNvSpPr>
           <p:nvPr>
-            <p:ph type="body" idx="3" sz="quarter"/>
+            <p:ph type="body" sz="quarter" idx="3"/>
           </p:nvPr>
         </p:nvSpPr>
         <p:spPr/>
@@ -1428,7 +1486,7 @@
             <a:spLocks noGrp="1"/>
           </p:cNvSpPr>
           <p:nvPr>
-            <p:ph type="sldNum" idx="5" sz="quarter"/>
+            <p:ph type="sldNum" sz="quarter" idx="5"/>
           </p:nvPr>
         </p:nvSpPr>
         <p:spPr/>
@@ -1442,7 +1500,7 @@
 </file>
 
 <file path=ppt/notesSlides/notesSlide3.xml><?xml version="1.0" encoding="utf-8"?>
-<p:notes xmlns:a="http://schemas.openxmlformats.org/drawingml/2006/main" xmlns:p="http://schemas.openxmlformats.org/presentationml/2006/main" xmlns:r="http://schemas.openxmlformats.org/officeDocument/2006/relationships">
+<p:notes xmlns:a="http://schemas.openxmlformats.org/drawingml/2006/main" xmlns:r="http://schemas.openxmlformats.org/officeDocument/2006/relationships" xmlns:p="http://schemas.openxmlformats.org/presentationml/2006/main">
   <p:cSld>
     <p:spTree>
       <p:nvGrpSpPr>
@@ -1462,7 +1520,7 @@
         <p:nvSpPr>
           <p:cNvPr id="2" name="Slide Image Placeholder 1"/>
           <p:cNvSpPr>
-            <a:spLocks noGrp="1"/>
+            <a:spLocks noGrp="1" noRot="1" noChangeAspect="1"/>
           </p:cNvSpPr>
           <p:nvPr>
             <p:ph type="sldImg" idx="2"/>
@@ -1477,7 +1535,7 @@
             <a:spLocks noGrp="1"/>
           </p:cNvSpPr>
           <p:nvPr>
-            <p:ph type="body" idx="3" sz="quarter"/>
+            <p:ph type="body" sz="quarter" idx="3"/>
           </p:nvPr>
         </p:nvSpPr>
         <p:spPr/>
@@ -1498,7 +1556,7 @@
             <a:spLocks noGrp="1"/>
           </p:cNvSpPr>
           <p:nvPr>
-            <p:ph type="sldNum" idx="5" sz="quarter"/>
+            <p:ph type="sldNum" sz="quarter" idx="5"/>
           </p:nvPr>
         </p:nvSpPr>
         <p:spPr/>
@@ -1512,7 +1570,7 @@
 </file>
 
 <file path=ppt/notesSlides/notesSlide4.xml><?xml version="1.0" encoding="utf-8"?>
-<p:notes xmlns:a="http://schemas.openxmlformats.org/drawingml/2006/main" xmlns:p="http://schemas.openxmlformats.org/presentationml/2006/main" xmlns:r="http://schemas.openxmlformats.org/officeDocument/2006/relationships">
+<p:notes xmlns:a="http://schemas.openxmlformats.org/drawingml/2006/main" xmlns:r="http://schemas.openxmlformats.org/officeDocument/2006/relationships" xmlns:p="http://schemas.openxmlformats.org/presentationml/2006/main">
   <p:cSld>
     <p:spTree>
       <p:nvGrpSpPr>
@@ -1532,7 +1590,7 @@
         <p:nvSpPr>
           <p:cNvPr id="2" name="Slide Image Placeholder 1"/>
           <p:cNvSpPr>
-            <a:spLocks noGrp="1"/>
+            <a:spLocks noGrp="1" noRot="1" noChangeAspect="1"/>
           </p:cNvSpPr>
           <p:nvPr>
             <p:ph type="sldImg" idx="2"/>
@@ -1547,7 +1605,7 @@
             <a:spLocks noGrp="1"/>
           </p:cNvSpPr>
           <p:nvPr>
-            <p:ph type="body" idx="3" sz="quarter"/>
+            <p:ph type="body" sz="quarter" idx="3"/>
           </p:nvPr>
         </p:nvSpPr>
         <p:spPr/>
@@ -1568,7 +1626,7 @@
             <a:spLocks noGrp="1"/>
           </p:cNvSpPr>
           <p:nvPr>
-            <p:ph type="sldNum" idx="5" sz="quarter"/>
+            <p:ph type="sldNum" sz="quarter" idx="5"/>
           </p:nvPr>
         </p:nvSpPr>
         <p:spPr/>
@@ -1582,7 +1640,7 @@
 </file>
 
 <file path=ppt/notesSlides/notesSlide5.xml><?xml version="1.0" encoding="utf-8"?>
-<p:notes xmlns:a="http://schemas.openxmlformats.org/drawingml/2006/main" xmlns:p="http://schemas.openxmlformats.org/presentationml/2006/main" xmlns:r="http://schemas.openxmlformats.org/officeDocument/2006/relationships">
+<p:notes xmlns:a="http://schemas.openxmlformats.org/drawingml/2006/main" xmlns:r="http://schemas.openxmlformats.org/officeDocument/2006/relationships" xmlns:p="http://schemas.openxmlformats.org/presentationml/2006/main">
   <p:cSld>
     <p:spTree>
       <p:nvGrpSpPr>
@@ -1602,7 +1660,7 @@
         <p:nvSpPr>
           <p:cNvPr id="2" name="Slide Image Placeholder 1"/>
           <p:cNvSpPr>
-            <a:spLocks noGrp="1"/>
+            <a:spLocks noGrp="1" noRot="1" noChangeAspect="1"/>
           </p:cNvSpPr>
           <p:nvPr>
             <p:ph type="sldImg" idx="2"/>
@@ -1617,7 +1675,7 @@
             <a:spLocks noGrp="1"/>
           </p:cNvSpPr>
           <p:nvPr>
-            <p:ph type="body" idx="3" sz="quarter"/>
+            <p:ph type="body" sz="quarter" idx="3"/>
           </p:nvPr>
         </p:nvSpPr>
         <p:spPr/>
@@ -1638,7 +1696,7 @@
             <a:spLocks noGrp="1"/>
           </p:cNvSpPr>
           <p:nvPr>
-            <p:ph type="sldNum" idx="5" sz="quarter"/>
+            <p:ph type="sldNum" sz="quarter" idx="5"/>
           </p:nvPr>
         </p:nvSpPr>
         <p:spPr/>
@@ -1652,7 +1710,7 @@
 </file>
 
 <file path=ppt/notesSlides/notesSlide6.xml><?xml version="1.0" encoding="utf-8"?>
-<p:notes xmlns:a="http://schemas.openxmlformats.org/drawingml/2006/main" xmlns:p="http://schemas.openxmlformats.org/presentationml/2006/main" xmlns:r="http://schemas.openxmlformats.org/officeDocument/2006/relationships">
+<p:notes xmlns:a="http://schemas.openxmlformats.org/drawingml/2006/main" xmlns:r="http://schemas.openxmlformats.org/officeDocument/2006/relationships" xmlns:p="http://schemas.openxmlformats.org/presentationml/2006/main">
   <p:cSld>
     <p:spTree>
       <p:nvGrpSpPr>
@@ -1672,7 +1730,7 @@
         <p:nvSpPr>
           <p:cNvPr id="2" name="Slide Image Placeholder 1"/>
           <p:cNvSpPr>
-            <a:spLocks noGrp="1"/>
+            <a:spLocks noGrp="1" noRot="1" noChangeAspect="1"/>
           </p:cNvSpPr>
           <p:nvPr>
             <p:ph type="sldImg" idx="2"/>
@@ -1687,7 +1745,7 @@
             <a:spLocks noGrp="1"/>
           </p:cNvSpPr>
           <p:nvPr>
-            <p:ph type="body" idx="3" sz="quarter"/>
+            <p:ph type="body" sz="quarter" idx="3"/>
           </p:nvPr>
         </p:nvSpPr>
         <p:spPr/>
@@ -1708,7 +1766,7 @@
             <a:spLocks noGrp="1"/>
           </p:cNvSpPr>
           <p:nvPr>
-            <p:ph type="sldNum" idx="5" sz="quarter"/>
+            <p:ph type="sldNum" sz="quarter" idx="5"/>
           </p:nvPr>
         </p:nvSpPr>
         <p:spPr/>
@@ -1722,7 +1780,7 @@
 </file>
 
 <file path=ppt/notesSlides/notesSlide7.xml><?xml version="1.0" encoding="utf-8"?>
-<p:notes xmlns:a="http://schemas.openxmlformats.org/drawingml/2006/main" xmlns:p="http://schemas.openxmlformats.org/presentationml/2006/main" xmlns:r="http://schemas.openxmlformats.org/officeDocument/2006/relationships">
+<p:notes xmlns:a="http://schemas.openxmlformats.org/drawingml/2006/main" xmlns:r="http://schemas.openxmlformats.org/officeDocument/2006/relationships" xmlns:p="http://schemas.openxmlformats.org/presentationml/2006/main">
   <p:cSld>
     <p:spTree>
       <p:nvGrpSpPr>
@@ -1742,7 +1800,7 @@
         <p:nvSpPr>
           <p:cNvPr id="2" name="Slide Image Placeholder 1"/>
           <p:cNvSpPr>
-            <a:spLocks noGrp="1"/>
+            <a:spLocks noGrp="1" noRot="1" noChangeAspect="1"/>
           </p:cNvSpPr>
           <p:nvPr>
             <p:ph type="sldImg" idx="2"/>
@@ -1757,7 +1815,7 @@
             <a:spLocks noGrp="1"/>
           </p:cNvSpPr>
           <p:nvPr>
-            <p:ph type="body" idx="3" sz="quarter"/>
+            <p:ph type="body" sz="quarter" idx="3"/>
           </p:nvPr>
         </p:nvSpPr>
         <p:spPr/>
@@ -1778,7 +1836,7 @@
             <a:spLocks noGrp="1"/>
           </p:cNvSpPr>
           <p:nvPr>
-            <p:ph type="sldNum" idx="5" sz="quarter"/>
+            <p:ph type="sldNum" sz="quarter" idx="5"/>
           </p:nvPr>
         </p:nvSpPr>
         <p:spPr/>
@@ -1792,7 +1850,7 @@
 </file>
 
 <file path=ppt/notesSlides/notesSlide8.xml><?xml version="1.0" encoding="utf-8"?>
-<p:notes xmlns:a="http://schemas.openxmlformats.org/drawingml/2006/main" xmlns:p="http://schemas.openxmlformats.org/presentationml/2006/main" xmlns:r="http://schemas.openxmlformats.org/officeDocument/2006/relationships">
+<p:notes xmlns:a="http://schemas.openxmlformats.org/drawingml/2006/main" xmlns:r="http://schemas.openxmlformats.org/officeDocument/2006/relationships" xmlns:p="http://schemas.openxmlformats.org/presentationml/2006/main">
   <p:cSld>
     <p:spTree>
       <p:nvGrpSpPr>
@@ -1812,7 +1870,7 @@
         <p:nvSpPr>
           <p:cNvPr id="2" name="Slide Image Placeholder 1"/>
           <p:cNvSpPr>
-            <a:spLocks noGrp="1"/>
+            <a:spLocks noGrp="1" noRot="1" noChangeAspect="1"/>
           </p:cNvSpPr>
           <p:nvPr>
             <p:ph type="sldImg" idx="2"/>
@@ -1827,7 +1885,7 @@
             <a:spLocks noGrp="1"/>
           </p:cNvSpPr>
           <p:nvPr>
-            <p:ph type="body" idx="3" sz="quarter"/>
+            <p:ph type="body" sz="quarter" idx="3"/>
           </p:nvPr>
         </p:nvSpPr>
         <p:spPr/>
@@ -1848,7 +1906,7 @@
             <a:spLocks noGrp="1"/>
           </p:cNvSpPr>
           <p:nvPr>
-            <p:ph type="sldNum" idx="5" sz="quarter"/>
+            <p:ph type="sldNum" sz="quarter" idx="5"/>
           </p:nvPr>
         </p:nvSpPr>
         <p:spPr/>
@@ -1862,7 +1920,7 @@
 </file>
 
 <file path=ppt/notesSlides/notesSlide9.xml><?xml version="1.0" encoding="utf-8"?>
-<p:notes xmlns:a="http://schemas.openxmlformats.org/drawingml/2006/main" xmlns:p="http://schemas.openxmlformats.org/presentationml/2006/main" xmlns:r="http://schemas.openxmlformats.org/officeDocument/2006/relationships">
+<p:notes xmlns:a="http://schemas.openxmlformats.org/drawingml/2006/main" xmlns:r="http://schemas.openxmlformats.org/officeDocument/2006/relationships" xmlns:p="http://schemas.openxmlformats.org/presentationml/2006/main">
   <p:cSld>
     <p:spTree>
       <p:nvGrpSpPr>
@@ -1882,7 +1940,7 @@
         <p:nvSpPr>
           <p:cNvPr id="2" name="Slide Image Placeholder 1"/>
           <p:cNvSpPr>
-            <a:spLocks noGrp="1"/>
+            <a:spLocks noGrp="1" noRot="1" noChangeAspect="1"/>
           </p:cNvSpPr>
           <p:nvPr>
             <p:ph type="sldImg" idx="2"/>
@@ -1897,7 +1955,7 @@
             <a:spLocks noGrp="1"/>
           </p:cNvSpPr>
           <p:nvPr>
-            <p:ph type="body" idx="3" sz="quarter"/>
+            <p:ph type="body" sz="quarter" idx="3"/>
           </p:nvPr>
         </p:nvSpPr>
         <p:spPr/>
@@ -1918,7 +1976,7 @@
             <a:spLocks noGrp="1"/>
           </p:cNvSpPr>
           <p:nvPr>
-            <p:ph type="sldNum" idx="5" sz="quarter"/>
+            <p:ph type="sldNum" sz="quarter" idx="5"/>
           </p:nvPr>
         </p:nvSpPr>
         <p:spPr/>
@@ -1969,10 +2027,9 @@
           <a:lstStyle/>
           <a:p>
             <a:r>
-              <a:rPr lang="en-US" smtClean="0"/>
+              <a:rPr lang="en-US"/>
               <a:t>Click to edit Master title style</a:t>
             </a:r>
-            <a:endParaRPr lang="en-US"/>
           </a:p>
         </p:txBody>
       </p:sp>
@@ -2088,10 +2145,9 @@
           </a:lstStyle>
           <a:p>
             <a:r>
-              <a:rPr lang="en-US" smtClean="0"/>
+              <a:rPr lang="en-US"/>
               <a:t>Click to edit Master subtitle style</a:t>
             </a:r>
-            <a:endParaRPr lang="en-US"/>
           </a:p>
         </p:txBody>
       </p:sp>
@@ -2112,7 +2168,7 @@
           <a:p>
             <a:fld id="{5BCAD085-E8A6-8845-BD4E-CB4CCA059FC4}" type="datetimeFigureOut">
               <a:rPr lang="en-US" smtClean="0"/>
-              <a:t>1/27/13</a:t>
+              <a:t>10/31/2026</a:t>
             </a:fld>
             <a:endParaRPr lang="en-US"/>
           </a:p>
@@ -2206,10 +2262,9 @@
           <a:lstStyle/>
           <a:p>
             <a:r>
-              <a:rPr lang="en-US" smtClean="0"/>
+              <a:rPr lang="en-US"/>
               <a:t>Click to edit Master title style</a:t>
             </a:r>
-            <a:endParaRPr lang="en-US"/>
           </a:p>
         </p:txBody>
       </p:sp>
@@ -2230,38 +2285,37 @@
           <a:p>
             <a:pPr lvl="0"/>
             <a:r>
-              <a:rPr lang="en-US" smtClean="0"/>
+              <a:rPr lang="en-US"/>
               <a:t>Click to edit Master text styles</a:t>
             </a:r>
           </a:p>
           <a:p>
             <a:pPr lvl="1"/>
             <a:r>
-              <a:rPr lang="en-US" smtClean="0"/>
+              <a:rPr lang="en-US"/>
               <a:t>Second level</a:t>
             </a:r>
           </a:p>
           <a:p>
             <a:pPr lvl="2"/>
             <a:r>
-              <a:rPr lang="en-US" smtClean="0"/>
+              <a:rPr lang="en-US"/>
               <a:t>Third level</a:t>
             </a:r>
           </a:p>
           <a:p>
             <a:pPr lvl="3"/>
             <a:r>
-              <a:rPr lang="en-US" smtClean="0"/>
+              <a:rPr lang="en-US"/>
               <a:t>Fourth level</a:t>
             </a:r>
           </a:p>
           <a:p>
             <a:pPr lvl="4"/>
             <a:r>
-              <a:rPr lang="en-US" smtClean="0"/>
+              <a:rPr lang="en-US"/>
               <a:t>Fifth level</a:t>
             </a:r>
-            <a:endParaRPr lang="en-US"/>
           </a:p>
         </p:txBody>
       </p:sp>
@@ -2282,7 +2336,7 @@
           <a:p>
             <a:fld id="{5BCAD085-E8A6-8845-BD4E-CB4CCA059FC4}" type="datetimeFigureOut">
               <a:rPr lang="en-US" smtClean="0"/>
-              <a:t>1/27/13</a:t>
+              <a:t>10/31/2026</a:t>
             </a:fld>
             <a:endParaRPr lang="en-US"/>
           </a:p>
@@ -2381,10 +2435,9 @@
           <a:lstStyle/>
           <a:p>
             <a:r>
-              <a:rPr lang="en-US" smtClean="0"/>
+              <a:rPr lang="en-US"/>
               <a:t>Click to edit Master title style</a:t>
             </a:r>
-            <a:endParaRPr lang="en-US"/>
           </a:p>
         </p:txBody>
       </p:sp>
@@ -2410,38 +2463,37 @@
           <a:p>
             <a:pPr lvl="0"/>
             <a:r>
-              <a:rPr lang="en-US" smtClean="0"/>
+              <a:rPr lang="en-US"/>
               <a:t>Click to edit Master text styles</a:t>
             </a:r>
           </a:p>
           <a:p>
             <a:pPr lvl="1"/>
             <a:r>
-              <a:rPr lang="en-US" smtClean="0"/>
+              <a:rPr lang="en-US"/>
               <a:t>Second level</a:t>
             </a:r>
           </a:p>
           <a:p>
             <a:pPr lvl="2"/>
             <a:r>
-              <a:rPr lang="en-US" smtClean="0"/>
+              <a:rPr lang="en-US"/>
               <a:t>Third level</a:t>
             </a:r>
           </a:p>
           <a:p>
             <a:pPr lvl="3"/>
             <a:r>
-              <a:rPr lang="en-US" smtClean="0"/>
+              <a:rPr lang="en-US"/>
               <a:t>Fourth level</a:t>
             </a:r>
           </a:p>
           <a:p>
             <a:pPr lvl="4"/>
             <a:r>
-              <a:rPr lang="en-US" smtClean="0"/>
+              <a:rPr lang="en-US"/>
               <a:t>Fifth level</a:t>
             </a:r>
-            <a:endParaRPr lang="en-US"/>
           </a:p>
         </p:txBody>
       </p:sp>
@@ -2462,7 +2514,7 @@
           <a:p>
             <a:fld id="{5BCAD085-E8A6-8845-BD4E-CB4CCA059FC4}" type="datetimeFigureOut">
               <a:rPr lang="en-US" smtClean="0"/>
-              <a:t>1/27/13</a:t>
+              <a:t>10/31/2026</a:t>
             </a:fld>
             <a:endParaRPr lang="en-US"/>
           </a:p>
@@ -2556,10 +2608,9 @@
           <a:lstStyle/>
           <a:p>
             <a:r>
-              <a:rPr lang="en-US" smtClean="0"/>
+              <a:rPr lang="en-US"/>
               <a:t>Click to edit Master title style</a:t>
             </a:r>
-            <a:endParaRPr lang="en-US"/>
           </a:p>
         </p:txBody>
       </p:sp>
@@ -2580,38 +2631,37 @@
           <a:p>
             <a:pPr lvl="0"/>
             <a:r>
-              <a:rPr lang="en-US" smtClean="0"/>
+              <a:rPr lang="en-US"/>
               <a:t>Click to edit Master text styles</a:t>
             </a:r>
           </a:p>
           <a:p>
             <a:pPr lvl="1"/>
             <a:r>
-              <a:rPr lang="en-US" smtClean="0"/>
+              <a:rPr lang="en-US"/>
               <a:t>Second level</a:t>
             </a:r>
           </a:p>
           <a:p>
             <a:pPr lvl="2"/>
             <a:r>
-              <a:rPr lang="en-US" smtClean="0"/>
+              <a:rPr lang="en-US"/>
               <a:t>Third level</a:t>
             </a:r>
           </a:p>
           <a:p>
             <a:pPr lvl="3"/>
             <a:r>
-              <a:rPr lang="en-US" smtClean="0"/>
+              <a:rPr lang="en-US"/>
               <a:t>Fourth level</a:t>
             </a:r>
           </a:p>
           <a:p>
             <a:pPr lvl="4"/>
             <a:r>
-              <a:rPr lang="en-US" smtClean="0"/>
+              <a:rPr lang="en-US"/>
               <a:t>Fifth level</a:t>
             </a:r>
-            <a:endParaRPr lang="en-US"/>
           </a:p>
         </p:txBody>
       </p:sp>
@@ -2632,7 +2682,7 @@
           <a:p>
             <a:fld id="{5BCAD085-E8A6-8845-BD4E-CB4CCA059FC4}" type="datetimeFigureOut">
               <a:rPr lang="en-US" smtClean="0"/>
-              <a:t>1/27/13</a:t>
+              <a:t>10/31/2026</a:t>
             </a:fld>
             <a:endParaRPr lang="en-US"/>
           </a:p>
@@ -2735,10 +2785,9 @@
           </a:lstStyle>
           <a:p>
             <a:r>
-              <a:rPr lang="en-US" smtClean="0"/>
+              <a:rPr lang="en-US"/>
               <a:t>Click to edit Master title style</a:t>
             </a:r>
-            <a:endParaRPr lang="en-US"/>
           </a:p>
         </p:txBody>
       </p:sp>
@@ -2855,7 +2904,7 @@
           <a:p>
             <a:pPr lvl="0"/>
             <a:r>
-              <a:rPr lang="en-US" smtClean="0"/>
+              <a:rPr lang="en-US"/>
               <a:t>Click to edit Master text styles</a:t>
             </a:r>
           </a:p>
@@ -2878,7 +2927,7 @@
           <a:p>
             <a:fld id="{5BCAD085-E8A6-8845-BD4E-CB4CCA059FC4}" type="datetimeFigureOut">
               <a:rPr lang="en-US" smtClean="0"/>
-              <a:t>1/27/13</a:t>
+              <a:t>10/31/2026</a:t>
             </a:fld>
             <a:endParaRPr lang="en-US"/>
           </a:p>
@@ -2972,10 +3021,9 @@
           <a:lstStyle/>
           <a:p>
             <a:r>
-              <a:rPr lang="en-US" smtClean="0"/>
+              <a:rPr lang="en-US"/>
               <a:t>Click to edit Master title style</a:t>
             </a:r>
-            <a:endParaRPr lang="en-US"/>
           </a:p>
         </p:txBody>
       </p:sp>
@@ -3029,38 +3077,37 @@
           <a:p>
             <a:pPr lvl="0"/>
             <a:r>
-              <a:rPr lang="en-US" smtClean="0"/>
+              <a:rPr lang="en-US"/>
               <a:t>Click to edit Master text styles</a:t>
             </a:r>
           </a:p>
           <a:p>
             <a:pPr lvl="1"/>
             <a:r>
-              <a:rPr lang="en-US" smtClean="0"/>
+              <a:rPr lang="en-US"/>
               <a:t>Second level</a:t>
             </a:r>
           </a:p>
           <a:p>
             <a:pPr lvl="2"/>
             <a:r>
-              <a:rPr lang="en-US" smtClean="0"/>
+              <a:rPr lang="en-US"/>
               <a:t>Third level</a:t>
             </a:r>
           </a:p>
           <a:p>
             <a:pPr lvl="3"/>
             <a:r>
-              <a:rPr lang="en-US" smtClean="0"/>
+              <a:rPr lang="en-US"/>
               <a:t>Fourth level</a:t>
             </a:r>
           </a:p>
           <a:p>
             <a:pPr lvl="4"/>
             <a:r>
-              <a:rPr lang="en-US" smtClean="0"/>
+              <a:rPr lang="en-US"/>
               <a:t>Fifth level</a:t>
             </a:r>
-            <a:endParaRPr lang="en-US"/>
           </a:p>
         </p:txBody>
       </p:sp>
@@ -3114,38 +3161,37 @@
           <a:p>
             <a:pPr lvl="0"/>
             <a:r>
-              <a:rPr lang="en-US" smtClean="0"/>
+              <a:rPr lang="en-US"/>
               <a:t>Click to edit Master text styles</a:t>
             </a:r>
           </a:p>
           <a:p>
             <a:pPr lvl="1"/>
             <a:r>
-              <a:rPr lang="en-US" smtClean="0"/>
+              <a:rPr lang="en-US"/>
               <a:t>Second level</a:t>
             </a:r>
           </a:p>
           <a:p>
             <a:pPr lvl="2"/>
             <a:r>
-              <a:rPr lang="en-US" smtClean="0"/>
+              <a:rPr lang="en-US"/>
               <a:t>Third level</a:t>
             </a:r>
           </a:p>
           <a:p>
             <a:pPr lvl="3"/>
             <a:r>
-              <a:rPr lang="en-US" smtClean="0"/>
+              <a:rPr lang="en-US"/>
               <a:t>Fourth level</a:t>
             </a:r>
           </a:p>
           <a:p>
             <a:pPr lvl="4"/>
             <a:r>
-              <a:rPr lang="en-US" smtClean="0"/>
+              <a:rPr lang="en-US"/>
               <a:t>Fifth level</a:t>
             </a:r>
-            <a:endParaRPr lang="en-US"/>
           </a:p>
         </p:txBody>
       </p:sp>
@@ -3166,7 +3212,7 @@
           <a:p>
             <a:fld id="{5BCAD085-E8A6-8845-BD4E-CB4CCA059FC4}" type="datetimeFigureOut">
               <a:rPr lang="en-US" smtClean="0"/>
-              <a:t>1/27/13</a:t>
+              <a:t>10/31/2026</a:t>
             </a:fld>
             <a:endParaRPr lang="en-US"/>
           </a:p>
@@ -3264,10 +3310,9 @@
           </a:lstStyle>
           <a:p>
             <a:r>
-              <a:rPr lang="en-US" smtClean="0"/>
+              <a:rPr lang="en-US"/>
               <a:t>Click to edit Master title style</a:t>
             </a:r>
-            <a:endParaRPr lang="en-US"/>
           </a:p>
         </p:txBody>
       </p:sp>
@@ -3330,7 +3375,7 @@
           <a:p>
             <a:pPr lvl="0"/>
             <a:r>
-              <a:rPr lang="en-US" smtClean="0"/>
+              <a:rPr lang="en-US"/>
               <a:t>Click to edit Master text styles</a:t>
             </a:r>
           </a:p>
@@ -3386,38 +3431,37 @@
           <a:p>
             <a:pPr lvl="0"/>
             <a:r>
-              <a:rPr lang="en-US" smtClean="0"/>
+              <a:rPr lang="en-US"/>
               <a:t>Click to edit Master text styles</a:t>
             </a:r>
           </a:p>
           <a:p>
             <a:pPr lvl="1"/>
             <a:r>
-              <a:rPr lang="en-US" smtClean="0"/>
+              <a:rPr lang="en-US"/>
               <a:t>Second level</a:t>
             </a:r>
           </a:p>
           <a:p>
             <a:pPr lvl="2"/>
             <a:r>
-              <a:rPr lang="en-US" smtClean="0"/>
+              <a:rPr lang="en-US"/>
               <a:t>Third level</a:t>
             </a:r>
           </a:p>
           <a:p>
             <a:pPr lvl="3"/>
             <a:r>
-              <a:rPr lang="en-US" smtClean="0"/>
+              <a:rPr lang="en-US"/>
               <a:t>Fourth level</a:t>
             </a:r>
           </a:p>
           <a:p>
             <a:pPr lvl="4"/>
             <a:r>
-              <a:rPr lang="en-US" smtClean="0"/>
+              <a:rPr lang="en-US"/>
               <a:t>Fifth level</a:t>
             </a:r>
-            <a:endParaRPr lang="en-US"/>
           </a:p>
         </p:txBody>
       </p:sp>
@@ -3480,7 +3524,7 @@
           <a:p>
             <a:pPr lvl="0"/>
             <a:r>
-              <a:rPr lang="en-US" smtClean="0"/>
+              <a:rPr lang="en-US"/>
               <a:t>Click to edit Master text styles</a:t>
             </a:r>
           </a:p>
@@ -3536,38 +3580,37 @@
           <a:p>
             <a:pPr lvl="0"/>
             <a:r>
-              <a:rPr lang="en-US" smtClean="0"/>
+              <a:rPr lang="en-US"/>
               <a:t>Click to edit Master text styles</a:t>
             </a:r>
           </a:p>
           <a:p>
             <a:pPr lvl="1"/>
             <a:r>
-              <a:rPr lang="en-US" smtClean="0"/>
+              <a:rPr lang="en-US"/>
               <a:t>Second level</a:t>
             </a:r>
           </a:p>
           <a:p>
             <a:pPr lvl="2"/>
             <a:r>
-              <a:rPr lang="en-US" smtClean="0"/>
+              <a:rPr lang="en-US"/>
               <a:t>Third level</a:t>
             </a:r>
           </a:p>
           <a:p>
             <a:pPr lvl="3"/>
             <a:r>
-              <a:rPr lang="en-US" smtClean="0"/>
+              <a:rPr lang="en-US"/>
               <a:t>Fourth level</a:t>
             </a:r>
           </a:p>
           <a:p>
             <a:pPr lvl="4"/>
             <a:r>
-              <a:rPr lang="en-US" smtClean="0"/>
+              <a:rPr lang="en-US"/>
               <a:t>Fifth level</a:t>
             </a:r>
-            <a:endParaRPr lang="en-US"/>
           </a:p>
         </p:txBody>
       </p:sp>
@@ -3588,7 +3631,7 @@
           <a:p>
             <a:fld id="{5BCAD085-E8A6-8845-BD4E-CB4CCA059FC4}" type="datetimeFigureOut">
               <a:rPr lang="en-US" smtClean="0"/>
-              <a:t>1/27/13</a:t>
+              <a:t>10/31/2026</a:t>
             </a:fld>
             <a:endParaRPr lang="en-US"/>
           </a:p>
@@ -3682,10 +3725,9 @@
           <a:lstStyle/>
           <a:p>
             <a:r>
-              <a:rPr lang="en-US" smtClean="0"/>
+              <a:rPr lang="en-US"/>
               <a:t>Click to edit Master title style</a:t>
             </a:r>
-            <a:endParaRPr lang="en-US"/>
           </a:p>
         </p:txBody>
       </p:sp>
@@ -3706,7 +3748,7 @@
           <a:p>
             <a:fld id="{5BCAD085-E8A6-8845-BD4E-CB4CCA059FC4}" type="datetimeFigureOut">
               <a:rPr lang="en-US" smtClean="0"/>
-              <a:t>1/27/13</a:t>
+              <a:t>10/31/2026</a:t>
             </a:fld>
             <a:endParaRPr lang="en-US"/>
           </a:p>
@@ -3801,7 +3843,7 @@
           <a:p>
             <a:fld id="{5BCAD085-E8A6-8845-BD4E-CB4CCA059FC4}" type="datetimeFigureOut">
               <a:rPr lang="en-US" smtClean="0"/>
-              <a:t>1/27/13</a:t>
+              <a:t>10/31/2026</a:t>
             </a:fld>
             <a:endParaRPr lang="en-US"/>
           </a:p>
@@ -3904,10 +3946,9 @@
           </a:lstStyle>
           <a:p>
             <a:r>
-              <a:rPr lang="en-US" smtClean="0"/>
+              <a:rPr lang="en-US"/>
               <a:t>Click to edit Master title style</a:t>
             </a:r>
-            <a:endParaRPr lang="en-US"/>
           </a:p>
         </p:txBody>
       </p:sp>
@@ -3961,38 +4002,37 @@
           <a:p>
             <a:pPr lvl="0"/>
             <a:r>
-              <a:rPr lang="en-US" smtClean="0"/>
+              <a:rPr lang="en-US"/>
               <a:t>Click to edit Master text styles</a:t>
             </a:r>
           </a:p>
           <a:p>
             <a:pPr lvl="1"/>
             <a:r>
-              <a:rPr lang="en-US" smtClean="0"/>
+              <a:rPr lang="en-US"/>
               <a:t>Second level</a:t>
             </a:r>
           </a:p>
           <a:p>
             <a:pPr lvl="2"/>
             <a:r>
-              <a:rPr lang="en-US" smtClean="0"/>
+              <a:rPr lang="en-US"/>
               <a:t>Third level</a:t>
             </a:r>
           </a:p>
           <a:p>
             <a:pPr lvl="3"/>
             <a:r>
-              <a:rPr lang="en-US" smtClean="0"/>
+              <a:rPr lang="en-US"/>
               <a:t>Fourth level</a:t>
             </a:r>
           </a:p>
           <a:p>
             <a:pPr lvl="4"/>
             <a:r>
-              <a:rPr lang="en-US" smtClean="0"/>
+              <a:rPr lang="en-US"/>
               <a:t>Fifth level</a:t>
             </a:r>
-            <a:endParaRPr lang="en-US"/>
           </a:p>
         </p:txBody>
       </p:sp>
@@ -4055,7 +4095,7 @@
           <a:p>
             <a:pPr lvl="0"/>
             <a:r>
-              <a:rPr lang="en-US" smtClean="0"/>
+              <a:rPr lang="en-US"/>
               <a:t>Click to edit Master text styles</a:t>
             </a:r>
           </a:p>
@@ -4078,7 +4118,7 @@
           <a:p>
             <a:fld id="{5BCAD085-E8A6-8845-BD4E-CB4CCA059FC4}" type="datetimeFigureOut">
               <a:rPr lang="en-US" smtClean="0"/>
-              <a:t>1/27/13</a:t>
+              <a:t>10/31/2026</a:t>
             </a:fld>
             <a:endParaRPr lang="en-US"/>
           </a:p>
@@ -4181,10 +4221,9 @@
           </a:lstStyle>
           <a:p>
             <a:r>
-              <a:rPr lang="en-US" smtClean="0"/>
+              <a:rPr lang="en-US"/>
               <a:t>Click to edit Master title style</a:t>
             </a:r>
-            <a:endParaRPr lang="en-US"/>
           </a:p>
         </p:txBody>
       </p:sp>
@@ -4308,7 +4347,7 @@
           <a:p>
             <a:pPr lvl="0"/>
             <a:r>
-              <a:rPr lang="en-US" smtClean="0"/>
+              <a:rPr lang="en-US"/>
               <a:t>Click to edit Master text styles</a:t>
             </a:r>
           </a:p>
@@ -4331,7 +4370,7 @@
           <a:p>
             <a:fld id="{5BCAD085-E8A6-8845-BD4E-CB4CCA059FC4}" type="datetimeFigureOut">
               <a:rPr lang="en-US" smtClean="0"/>
-              <a:t>1/27/13</a:t>
+              <a:t>10/31/2026</a:t>
             </a:fld>
             <a:endParaRPr lang="en-US"/>
           </a:p>
@@ -4440,10 +4479,9 @@
           <a:lstStyle/>
           <a:p>
             <a:r>
-              <a:rPr lang="en-US" smtClean="0"/>
+              <a:rPr lang="en-US"/>
               <a:t>Click to edit Master title style</a:t>
             </a:r>
-            <a:endParaRPr lang="en-US"/>
           </a:p>
         </p:txBody>
       </p:sp>
@@ -4474,38 +4512,37 @@
           <a:p>
             <a:pPr lvl="0"/>
             <a:r>
-              <a:rPr lang="en-US" smtClean="0"/>
+              <a:rPr lang="en-US"/>
               <a:t>Click to edit Master text styles</a:t>
             </a:r>
           </a:p>
           <a:p>
             <a:pPr lvl="1"/>
             <a:r>
-              <a:rPr lang="en-US" smtClean="0"/>
+              <a:rPr lang="en-US"/>
               <a:t>Second level</a:t>
             </a:r>
           </a:p>
           <a:p>
             <a:pPr lvl="2"/>
             <a:r>
-              <a:rPr lang="en-US" smtClean="0"/>
+              <a:rPr lang="en-US"/>
               <a:t>Third level</a:t>
             </a:r>
           </a:p>
           <a:p>
             <a:pPr lvl="3"/>
             <a:r>
-              <a:rPr lang="en-US" smtClean="0"/>
+              <a:rPr lang="en-US"/>
               <a:t>Fourth level</a:t>
             </a:r>
           </a:p>
           <a:p>
             <a:pPr lvl="4"/>
             <a:r>
-              <a:rPr lang="en-US" smtClean="0"/>
+              <a:rPr lang="en-US"/>
               <a:t>Fifth level</a:t>
             </a:r>
-            <a:endParaRPr lang="en-US"/>
           </a:p>
         </p:txBody>
       </p:sp>
@@ -4544,7 +4581,7 @@
           <a:p>
             <a:fld id="{5BCAD085-E8A6-8845-BD4E-CB4CCA059FC4}" type="datetimeFigureOut">
               <a:rPr lang="en-US" smtClean="0"/>
-              <a:t>1/27/13</a:t>
+              <a:t>10/31/2026</a:t>
             </a:fld>
             <a:endParaRPr lang="en-US"/>
           </a:p>
@@ -4903,7 +4940,7 @@
 </file>
 
 <file path=ppt/slides/slide1.xml><?xml version="1.0" encoding="utf-8"?>
-<p:sld xmlns:a="http://schemas.openxmlformats.org/drawingml/2006/main" xmlns:p="http://schemas.openxmlformats.org/presentationml/2006/main" xmlns:r="http://schemas.openxmlformats.org/officeDocument/2006/relationships">
+<p:sld xmlns:a="http://schemas.openxmlformats.org/drawingml/2006/main" xmlns:r="http://schemas.openxmlformats.org/officeDocument/2006/relationships" xmlns:p="http://schemas.openxmlformats.org/presentationml/2006/main">
   <p:cSld>
     <p:spTree>
       <p:nvGrpSpPr>
@@ -4911,7 +4948,14 @@
         <p:cNvGrpSpPr/>
         <p:nvPr/>
       </p:nvGrpSpPr>
-      <p:grpSpPr/>
+      <p:grpSpPr>
+        <a:xfrm>
+          <a:off x="0" y="0"/>
+          <a:ext cx="0" cy="0"/>
+          <a:chOff x="0" y="0"/>
+          <a:chExt cx="0" cy="0"/>
+        </a:xfrm>
+      </p:grpSpPr>
       <p:sp>
         <p:nvSpPr>
           <p:cNvPr id="2" name="TextBox 1"/>
@@ -4929,7 +4973,7 @@
           <a:noFill/>
         </p:spPr>
         <p:txBody>
-          <a:bodyPr wrap="square" anchor="t" lIns="0" rIns="0" tIns="0" bIns="0"/>
+          <a:bodyPr wrap="square" lIns="0" tIns="0" rIns="0" bIns="0" anchor="t"/>
           <a:lstStyle/>
           <a:p>
             <a:pPr algn="l">
@@ -4966,7 +5010,7 @@
           <a:noFill/>
         </p:spPr>
         <p:txBody>
-          <a:bodyPr wrap="square" anchor="b" lIns="0" rIns="0" tIns="0" bIns="0"/>
+          <a:bodyPr wrap="square" lIns="0" tIns="0" rIns="0" bIns="0" anchor="b"/>
           <a:lstStyle/>
           <a:p>
             <a:pPr algn="l">
@@ -5024,7 +5068,7 @@
           <a:noFill/>
         </p:spPr>
         <p:txBody>
-          <a:bodyPr wrap="square" anchor="t" lIns="0" rIns="0" tIns="0" bIns="0"/>
+          <a:bodyPr wrap="square" lIns="0" tIns="0" rIns="0" bIns="0" anchor="t"/>
           <a:lstStyle/>
           <a:p>
             <a:pPr algn="l">
@@ -5082,7 +5126,7 @@
           <a:noFill/>
         </p:spPr>
         <p:txBody>
-          <a:bodyPr wrap="square" anchor="t" lIns="0" rIns="0" tIns="0" bIns="0"/>
+          <a:bodyPr wrap="square" lIns="0" tIns="0" rIns="0" bIns="0" anchor="t"/>
           <a:lstStyle/>
           <a:p>
             <a:pPr algn="l">
@@ -5127,7 +5171,7 @@
 </file>
 
 <file path=ppt/slides/slide10.xml><?xml version="1.0" encoding="utf-8"?>
-<p:sld xmlns:a="http://schemas.openxmlformats.org/drawingml/2006/main" xmlns:p="http://schemas.openxmlformats.org/presentationml/2006/main" xmlns:r="http://schemas.openxmlformats.org/officeDocument/2006/relationships">
+<p:sld xmlns:a="http://schemas.openxmlformats.org/drawingml/2006/main" xmlns:r="http://schemas.openxmlformats.org/officeDocument/2006/relationships" xmlns:p="http://schemas.openxmlformats.org/presentationml/2006/main">
   <p:cSld>
     <p:spTree>
       <p:nvGrpSpPr>
@@ -5135,7 +5179,14 @@
         <p:cNvGrpSpPr/>
         <p:nvPr/>
       </p:nvGrpSpPr>
-      <p:grpSpPr/>
+      <p:grpSpPr>
+        <a:xfrm>
+          <a:off x="0" y="0"/>
+          <a:ext cx="0" cy="0"/>
+          <a:chOff x="0" y="0"/>
+          <a:chExt cx="0" cy="0"/>
+        </a:xfrm>
+      </p:grpSpPr>
       <p:sp>
         <p:nvSpPr>
           <p:cNvPr id="2" name="TextBox 1"/>
@@ -5153,7 +5204,7 @@
           <a:noFill/>
         </p:spPr>
         <p:txBody>
-          <a:bodyPr wrap="square" anchor="b" lIns="0" rIns="0" tIns="0" bIns="0"/>
+          <a:bodyPr wrap="square" lIns="0" tIns="0" rIns="0" bIns="0" anchor="b"/>
           <a:lstStyle/>
           <a:p>
             <a:pPr algn="l">
@@ -5232,7 +5283,7 @@
           <a:noFill/>
         </p:spPr>
         <p:txBody>
-          <a:bodyPr wrap="square" anchor="t" lIns="0" rIns="0" tIns="0" bIns="0"/>
+          <a:bodyPr wrap="square" lIns="0" tIns="0" rIns="0" bIns="0" anchor="t"/>
           <a:lstStyle/>
           <a:p>
             <a:pPr algn="l">
@@ -5269,7 +5320,7 @@
           <a:noFill/>
         </p:spPr>
         <p:txBody>
-          <a:bodyPr wrap="square" anchor="t" lIns="0" rIns="0" tIns="0" bIns="0"/>
+          <a:bodyPr wrap="square" lIns="0" tIns="0" rIns="0" bIns="0" anchor="t"/>
           <a:lstStyle/>
           <a:p>
             <a:pPr algn="r">
@@ -5306,7 +5357,7 @@
           <a:noFill/>
         </p:spPr>
         <p:txBody>
-          <a:bodyPr wrap="square" anchor="t" lIns="0" rIns="0" tIns="0" bIns="0"/>
+          <a:bodyPr wrap="square" lIns="0" tIns="0" rIns="0" bIns="0" anchor="t"/>
           <a:lstStyle/>
           <a:p>
             <a:pPr algn="l">
@@ -5340,7 +5391,7 @@
         </p:xfrm>
         <a:graphic>
           <a:graphicData uri="http://schemas.openxmlformats.org/drawingml/2006/chart">
-            <c:chart xmlns:c="http://schemas.openxmlformats.org/drawingml/2006/chart" r:id="rId3"/>
+            <c:chart xmlns:c="http://schemas.openxmlformats.org/drawingml/2006/chart" xmlns:r="http://schemas.openxmlformats.org/officeDocument/2006/relationships" r:id="rId3"/>
           </a:graphicData>
         </a:graphic>
       </p:graphicFrame>
@@ -5382,7 +5433,7 @@
           <a:noFill/>
         </p:spPr>
         <p:txBody>
-          <a:bodyPr wrap="square" anchor="t" lIns="0" rIns="0" tIns="0" bIns="0"/>
+          <a:bodyPr wrap="square" lIns="0" tIns="0" rIns="0" bIns="0" anchor="t"/>
           <a:lstStyle/>
           <a:p>
             <a:pPr algn="l">
@@ -5435,7 +5486,7 @@
           <a:noFill/>
         </p:spPr>
         <p:txBody>
-          <a:bodyPr wrap="square" anchor="t" lIns="0" rIns="0" tIns="0" bIns="0"/>
+          <a:bodyPr wrap="square" lIns="0" tIns="0" rIns="0" bIns="0" anchor="t"/>
           <a:lstStyle/>
           <a:p>
             <a:pPr algn="l">
@@ -5488,7 +5539,7 @@
           <a:noFill/>
         </p:spPr>
         <p:txBody>
-          <a:bodyPr wrap="square" anchor="t" lIns="0" rIns="0" tIns="0" bIns="0"/>
+          <a:bodyPr wrap="square" lIns="0" tIns="0" rIns="0" bIns="0" anchor="t"/>
           <a:lstStyle/>
           <a:p>
             <a:pPr algn="l">
@@ -5530,7 +5581,7 @@
           </a:ln>
         </p:spPr>
         <p:txBody>
-          <a:bodyPr rtlCol="0" anchor="ctr" wrap="square" lIns="109728" rIns="109728"/>
+          <a:bodyPr wrap="square" lIns="109728" rIns="109728" rtlCol="0" anchor="ctr"/>
           <a:lstStyle/>
           <a:p>
             <a:pPr algn="l">
@@ -5581,7 +5632,7 @@
           </a:ln>
         </p:spPr>
         <p:txBody>
-          <a:bodyPr rtlCol="0" anchor="ctr" wrap="square" lIns="109728" rIns="109728"/>
+          <a:bodyPr wrap="square" lIns="109728" rIns="109728" rtlCol="0" anchor="ctr"/>
           <a:lstStyle/>
           <a:p>
             <a:pPr algn="l">
@@ -5657,7 +5708,7 @@
           </a:ln>
         </p:spPr>
         <p:txBody>
-          <a:bodyPr rtlCol="0" anchor="ctr" wrap="square" lIns="109728" rIns="109728"/>
+          <a:bodyPr wrap="square" lIns="109728" rIns="109728" rtlCol="0" anchor="ctr"/>
           <a:lstStyle/>
           <a:p>
             <a:pPr algn="l">
@@ -5733,7 +5784,7 @@
           </a:ln>
         </p:spPr>
         <p:txBody>
-          <a:bodyPr rtlCol="0" anchor="ctr" wrap="square" lIns="109728" rIns="109728"/>
+          <a:bodyPr wrap="square" lIns="109728" rIns="109728" rtlCol="0" anchor="ctr"/>
           <a:lstStyle/>
           <a:p>
             <a:pPr algn="l">
@@ -5809,7 +5860,7 @@
           </a:ln>
         </p:spPr>
         <p:txBody>
-          <a:bodyPr rtlCol="0" anchor="ctr" wrap="square" lIns="109728" rIns="109728"/>
+          <a:bodyPr wrap="square" lIns="109728" rIns="109728" rtlCol="0" anchor="ctr"/>
           <a:lstStyle/>
           <a:p>
             <a:pPr algn="l">
@@ -5885,7 +5936,7 @@
           </a:ln>
         </p:spPr>
         <p:txBody>
-          <a:bodyPr rtlCol="0" anchor="ctr" wrap="square" lIns="109728" rIns="109728"/>
+          <a:bodyPr wrap="square" lIns="109728" rIns="109728" rtlCol="0" anchor="ctr"/>
           <a:lstStyle/>
           <a:p>
             <a:pPr algn="l">
@@ -5948,7 +5999,7 @@
 </file>
 
 <file path=ppt/slides/slide11.xml><?xml version="1.0" encoding="utf-8"?>
-<p:sld xmlns:a="http://schemas.openxmlformats.org/drawingml/2006/main" xmlns:p="http://schemas.openxmlformats.org/presentationml/2006/main" xmlns:r="http://schemas.openxmlformats.org/officeDocument/2006/relationships">
+<p:sld xmlns:a="http://schemas.openxmlformats.org/drawingml/2006/main" xmlns:r="http://schemas.openxmlformats.org/officeDocument/2006/relationships" xmlns:p="http://schemas.openxmlformats.org/presentationml/2006/main">
   <p:cSld>
     <p:spTree>
       <p:nvGrpSpPr>
@@ -5956,7 +6007,14 @@
         <p:cNvGrpSpPr/>
         <p:nvPr/>
       </p:nvGrpSpPr>
-      <p:grpSpPr/>
+      <p:grpSpPr>
+        <a:xfrm>
+          <a:off x="0" y="0"/>
+          <a:ext cx="0" cy="0"/>
+          <a:chOff x="0" y="0"/>
+          <a:chExt cx="0" cy="0"/>
+        </a:xfrm>
+      </p:grpSpPr>
       <p:sp>
         <p:nvSpPr>
           <p:cNvPr id="2" name="TextBox 1"/>
@@ -5974,7 +6032,7 @@
           <a:noFill/>
         </p:spPr>
         <p:txBody>
-          <a:bodyPr wrap="square" anchor="b" lIns="0" rIns="0" tIns="0" bIns="0"/>
+          <a:bodyPr wrap="square" lIns="0" tIns="0" rIns="0" bIns="0" anchor="b"/>
           <a:lstStyle/>
           <a:p>
             <a:pPr algn="l">
@@ -6053,7 +6111,7 @@
           <a:noFill/>
         </p:spPr>
         <p:txBody>
-          <a:bodyPr wrap="square" anchor="t" lIns="0" rIns="0" tIns="0" bIns="0"/>
+          <a:bodyPr wrap="square" lIns="0" tIns="0" rIns="0" bIns="0" anchor="t"/>
           <a:lstStyle/>
           <a:p>
             <a:pPr algn="l">
@@ -6090,7 +6148,7 @@
           <a:noFill/>
         </p:spPr>
         <p:txBody>
-          <a:bodyPr wrap="square" anchor="t" lIns="0" rIns="0" tIns="0" bIns="0"/>
+          <a:bodyPr wrap="square" lIns="0" tIns="0" rIns="0" bIns="0" anchor="t"/>
           <a:lstStyle/>
           <a:p>
             <a:pPr algn="r">
@@ -6129,15 +6187,39 @@
                 <a:tableStyleId>{2D5ABB26-0587-4C30-8999-92F81FD0307C}</a:tableStyleId>
               </a:tblPr>
               <a:tblGrid>
-                <a:gridCol w="1783080"/>
-                <a:gridCol w="2377440"/>
-                <a:gridCol w="3886200"/>
-                <a:gridCol w="3044952"/>
+                <a:gridCol w="1783080">
+                  <a:extLst>
+                    <a:ext uri="{9D8B030D-6E8A-4147-A177-3AD203B41FA5}">
+                      <a16:colId xmlns:a16="http://schemas.microsoft.com/office/drawing/2014/main" val="20000"/>
+                    </a:ext>
+                  </a:extLst>
+                </a:gridCol>
+                <a:gridCol w="2377440">
+                  <a:extLst>
+                    <a:ext uri="{9D8B030D-6E8A-4147-A177-3AD203B41FA5}">
+                      <a16:colId xmlns:a16="http://schemas.microsoft.com/office/drawing/2014/main" val="20001"/>
+                    </a:ext>
+                  </a:extLst>
+                </a:gridCol>
+                <a:gridCol w="3886200">
+                  <a:extLst>
+                    <a:ext uri="{9D8B030D-6E8A-4147-A177-3AD203B41FA5}">
+                      <a16:colId xmlns:a16="http://schemas.microsoft.com/office/drawing/2014/main" val="20002"/>
+                    </a:ext>
+                  </a:extLst>
+                </a:gridCol>
+                <a:gridCol w="3044952">
+                  <a:extLst>
+                    <a:ext uri="{9D8B030D-6E8A-4147-A177-3AD203B41FA5}">
+                      <a16:colId xmlns:a16="http://schemas.microsoft.com/office/drawing/2014/main" val="20003"/>
+                    </a:ext>
+                  </a:extLst>
+                </a:gridCol>
               </a:tblGrid>
               <a:tr h="329184">
                 <a:tc>
                   <a:txBody>
-                    <a:bodyPr wrap="square"/>
+                    <a:bodyPr/>
                     <a:lstStyle/>
                     <a:p>
                       <a:r>
@@ -6173,7 +6255,7 @@
                 </a:tc>
                 <a:tc>
                   <a:txBody>
-                    <a:bodyPr wrap="square"/>
+                    <a:bodyPr/>
                     <a:lstStyle/>
                     <a:p>
                       <a:r>
@@ -6209,7 +6291,7 @@
                 </a:tc>
                 <a:tc>
                   <a:txBody>
-                    <a:bodyPr wrap="square"/>
+                    <a:bodyPr/>
                     <a:lstStyle/>
                     <a:p>
                       <a:r>
@@ -6245,7 +6327,7 @@
                 </a:tc>
                 <a:tc>
                   <a:txBody>
-                    <a:bodyPr wrap="square"/>
+                    <a:bodyPr/>
                     <a:lstStyle/>
                     <a:p>
                       <a:r>
@@ -6279,11 +6361,16 @@
                     </a:solidFill>
                   </a:tcPr>
                 </a:tc>
+                <a:extLst>
+                  <a:ext uri="{0D108BD9-81ED-4DB2-BD59-A6C34878D82A}">
+                    <a16:rowId xmlns:a16="http://schemas.microsoft.com/office/drawing/2014/main" val="10000"/>
+                  </a:ext>
+                </a:extLst>
               </a:tr>
               <a:tr h="658368">
                 <a:tc>
                   <a:txBody>
-                    <a:bodyPr wrap="square"/>
+                    <a:bodyPr/>
                     <a:lstStyle/>
                     <a:p>
                       <a:r>
@@ -6297,15 +6384,21 @@
                       </a:r>
                     </a:p>
                   </a:txBody>
-                  <a:tcPr marL="73152" marR="73152" marT="36576" marB="36576" anchor="t">
+                  <a:tcPr marL="73152" marR="73152" marT="36576" marB="36576">
                     <a:lnL w="0">
                       <a:noFill/>
                     </a:lnL>
                     <a:lnR w="0">
                       <a:noFill/>
                     </a:lnR>
-                    <a:lnT w="0">
-                      <a:noFill/>
+                    <a:lnT w="12700" cap="flat" cmpd="sng" algn="ctr">
+                      <a:solidFill>
+                        <a:srgbClr val="1B2430"/>
+                      </a:solidFill>
+                      <a:prstDash val="solid"/>
+                      <a:round/>
+                      <a:headEnd type="none" w="med" len="med"/>
+                      <a:tailEnd type="none" w="med" len="med"/>
                     </a:lnT>
                     <a:lnB w="9525">
                       <a:solidFill>
@@ -6319,7 +6412,7 @@
                 </a:tc>
                 <a:tc>
                   <a:txBody>
-                    <a:bodyPr wrap="square"/>
+                    <a:bodyPr/>
                     <a:lstStyle/>
                     <a:p>
                       <a:r>
@@ -6333,15 +6426,21 @@
                       </a:r>
                     </a:p>
                   </a:txBody>
-                  <a:tcPr marL="73152" marR="73152" marT="36576" marB="36576" anchor="t">
+                  <a:tcPr marL="73152" marR="73152" marT="36576" marB="36576">
                     <a:lnL w="0">
                       <a:noFill/>
                     </a:lnL>
                     <a:lnR w="0">
                       <a:noFill/>
                     </a:lnR>
-                    <a:lnT w="0">
-                      <a:noFill/>
+                    <a:lnT w="12700" cap="flat" cmpd="sng" algn="ctr">
+                      <a:solidFill>
+                        <a:srgbClr val="1B2430"/>
+                      </a:solidFill>
+                      <a:prstDash val="solid"/>
+                      <a:round/>
+                      <a:headEnd type="none" w="med" len="med"/>
+                      <a:tailEnd type="none" w="med" len="med"/>
                     </a:lnT>
                     <a:lnB w="9525">
                       <a:solidFill>
@@ -6355,7 +6454,7 @@
                 </a:tc>
                 <a:tc>
                   <a:txBody>
-                    <a:bodyPr wrap="square"/>
+                    <a:bodyPr/>
                     <a:lstStyle/>
                     <a:p>
                       <a:r>
@@ -6369,15 +6468,21 @@
                       </a:r>
                     </a:p>
                   </a:txBody>
-                  <a:tcPr marL="73152" marR="73152" marT="36576" marB="36576" anchor="t">
+                  <a:tcPr marL="73152" marR="73152" marT="36576" marB="36576">
                     <a:lnL w="0">
                       <a:noFill/>
                     </a:lnL>
                     <a:lnR w="0">
                       <a:noFill/>
                     </a:lnR>
-                    <a:lnT w="0">
-                      <a:noFill/>
+                    <a:lnT w="12700" cap="flat" cmpd="sng" algn="ctr">
+                      <a:solidFill>
+                        <a:srgbClr val="1B2430"/>
+                      </a:solidFill>
+                      <a:prstDash val="solid"/>
+                      <a:round/>
+                      <a:headEnd type="none" w="med" len="med"/>
+                      <a:tailEnd type="none" w="med" len="med"/>
                     </a:lnT>
                     <a:lnB w="9525">
                       <a:solidFill>
@@ -6391,7 +6496,7 @@
                 </a:tc>
                 <a:tc>
                   <a:txBody>
-                    <a:bodyPr wrap="square"/>
+                    <a:bodyPr/>
                     <a:lstStyle/>
                     <a:p>
                       <a:r>
@@ -6405,15 +6510,21 @@
                       </a:r>
                     </a:p>
                   </a:txBody>
-                  <a:tcPr marL="73152" marR="73152" marT="36576" marB="36576" anchor="t">
+                  <a:tcPr marL="73152" marR="73152" marT="36576" marB="36576">
                     <a:lnL w="0">
                       <a:noFill/>
                     </a:lnL>
                     <a:lnR w="0">
                       <a:noFill/>
                     </a:lnR>
-                    <a:lnT w="0">
-                      <a:noFill/>
+                    <a:lnT w="12700" cap="flat" cmpd="sng" algn="ctr">
+                      <a:solidFill>
+                        <a:srgbClr val="1B2430"/>
+                      </a:solidFill>
+                      <a:prstDash val="solid"/>
+                      <a:round/>
+                      <a:headEnd type="none" w="med" len="med"/>
+                      <a:tailEnd type="none" w="med" len="med"/>
                     </a:lnT>
                     <a:lnB w="9525">
                       <a:solidFill>
@@ -6425,11 +6536,16 @@
                     </a:solidFill>
                   </a:tcPr>
                 </a:tc>
+                <a:extLst>
+                  <a:ext uri="{0D108BD9-81ED-4DB2-BD59-A6C34878D82A}">
+                    <a16:rowId xmlns:a16="http://schemas.microsoft.com/office/drawing/2014/main" val="10001"/>
+                  </a:ext>
+                </a:extLst>
               </a:tr>
               <a:tr h="658368">
                 <a:tc>
                   <a:txBody>
-                    <a:bodyPr wrap="square"/>
+                    <a:bodyPr/>
                     <a:lstStyle/>
                     <a:p>
                       <a:r>
@@ -6443,15 +6559,21 @@
                       </a:r>
                     </a:p>
                   </a:txBody>
-                  <a:tcPr marL="73152" marR="73152" marT="36576" marB="36576" anchor="t">
+                  <a:tcPr marL="73152" marR="73152" marT="36576" marB="36576">
                     <a:lnL w="0">
                       <a:noFill/>
                     </a:lnL>
                     <a:lnR w="0">
                       <a:noFill/>
                     </a:lnR>
-                    <a:lnT w="0">
-                      <a:noFill/>
+                    <a:lnT w="9525" cap="flat" cmpd="sng" algn="ctr">
+                      <a:solidFill>
+                        <a:srgbClr val="C9CED6"/>
+                      </a:solidFill>
+                      <a:prstDash val="solid"/>
+                      <a:round/>
+                      <a:headEnd type="none" w="med" len="med"/>
+                      <a:tailEnd type="none" w="med" len="med"/>
                     </a:lnT>
                     <a:lnB w="9525">
                       <a:solidFill>
@@ -6465,7 +6587,7 @@
                 </a:tc>
                 <a:tc>
                   <a:txBody>
-                    <a:bodyPr wrap="square"/>
+                    <a:bodyPr/>
                     <a:lstStyle/>
                     <a:p>
                       <a:r>
@@ -6479,15 +6601,21 @@
                       </a:r>
                     </a:p>
                   </a:txBody>
-                  <a:tcPr marL="73152" marR="73152" marT="36576" marB="36576" anchor="t">
+                  <a:tcPr marL="73152" marR="73152" marT="36576" marB="36576">
                     <a:lnL w="0">
                       <a:noFill/>
                     </a:lnL>
                     <a:lnR w="0">
                       <a:noFill/>
                     </a:lnR>
-                    <a:lnT w="0">
-                      <a:noFill/>
+                    <a:lnT w="9525" cap="flat" cmpd="sng" algn="ctr">
+                      <a:solidFill>
+                        <a:srgbClr val="C9CED6"/>
+                      </a:solidFill>
+                      <a:prstDash val="solid"/>
+                      <a:round/>
+                      <a:headEnd type="none" w="med" len="med"/>
+                      <a:tailEnd type="none" w="med" len="med"/>
                     </a:lnT>
                     <a:lnB w="9525">
                       <a:solidFill>
@@ -6501,7 +6629,7 @@
                 </a:tc>
                 <a:tc>
                   <a:txBody>
-                    <a:bodyPr wrap="square"/>
+                    <a:bodyPr/>
                     <a:lstStyle/>
                     <a:p>
                       <a:r>
@@ -6515,15 +6643,21 @@
                       </a:r>
                     </a:p>
                   </a:txBody>
-                  <a:tcPr marL="73152" marR="73152" marT="36576" marB="36576" anchor="t">
+                  <a:tcPr marL="73152" marR="73152" marT="36576" marB="36576">
                     <a:lnL w="0">
                       <a:noFill/>
                     </a:lnL>
                     <a:lnR w="0">
                       <a:noFill/>
                     </a:lnR>
-                    <a:lnT w="0">
-                      <a:noFill/>
+                    <a:lnT w="9525" cap="flat" cmpd="sng" algn="ctr">
+                      <a:solidFill>
+                        <a:srgbClr val="C9CED6"/>
+                      </a:solidFill>
+                      <a:prstDash val="solid"/>
+                      <a:round/>
+                      <a:headEnd type="none" w="med" len="med"/>
+                      <a:tailEnd type="none" w="med" len="med"/>
                     </a:lnT>
                     <a:lnB w="9525">
                       <a:solidFill>
@@ -6537,7 +6671,7 @@
                 </a:tc>
                 <a:tc>
                   <a:txBody>
-                    <a:bodyPr wrap="square"/>
+                    <a:bodyPr/>
                     <a:lstStyle/>
                     <a:p>
                       <a:r>
@@ -6551,15 +6685,21 @@
                       </a:r>
                     </a:p>
                   </a:txBody>
-                  <a:tcPr marL="73152" marR="73152" marT="36576" marB="36576" anchor="t">
+                  <a:tcPr marL="73152" marR="73152" marT="36576" marB="36576">
                     <a:lnL w="0">
                       <a:noFill/>
                     </a:lnL>
                     <a:lnR w="0">
                       <a:noFill/>
                     </a:lnR>
-                    <a:lnT w="0">
-                      <a:noFill/>
+                    <a:lnT w="9525" cap="flat" cmpd="sng" algn="ctr">
+                      <a:solidFill>
+                        <a:srgbClr val="C9CED6"/>
+                      </a:solidFill>
+                      <a:prstDash val="solid"/>
+                      <a:round/>
+                      <a:headEnd type="none" w="med" len="med"/>
+                      <a:tailEnd type="none" w="med" len="med"/>
                     </a:lnT>
                     <a:lnB w="9525">
                       <a:solidFill>
@@ -6571,11 +6711,16 @@
                     </a:solidFill>
                   </a:tcPr>
                 </a:tc>
+                <a:extLst>
+                  <a:ext uri="{0D108BD9-81ED-4DB2-BD59-A6C34878D82A}">
+                    <a16:rowId xmlns:a16="http://schemas.microsoft.com/office/drawing/2014/main" val="10002"/>
+                  </a:ext>
+                </a:extLst>
               </a:tr>
               <a:tr h="658368">
                 <a:tc>
                   <a:txBody>
-                    <a:bodyPr wrap="square"/>
+                    <a:bodyPr/>
                     <a:lstStyle/>
                     <a:p>
                       <a:r>
@@ -6589,15 +6734,21 @@
                       </a:r>
                     </a:p>
                   </a:txBody>
-                  <a:tcPr marL="73152" marR="73152" marT="36576" marB="36576" anchor="t">
+                  <a:tcPr marL="73152" marR="73152" marT="36576" marB="36576">
                     <a:lnL w="0">
                       <a:noFill/>
                     </a:lnL>
                     <a:lnR w="0">
                       <a:noFill/>
                     </a:lnR>
-                    <a:lnT w="0">
-                      <a:noFill/>
+                    <a:lnT w="9525" cap="flat" cmpd="sng" algn="ctr">
+                      <a:solidFill>
+                        <a:srgbClr val="C9CED6"/>
+                      </a:solidFill>
+                      <a:prstDash val="solid"/>
+                      <a:round/>
+                      <a:headEnd type="none" w="med" len="med"/>
+                      <a:tailEnd type="none" w="med" len="med"/>
                     </a:lnT>
                     <a:lnB w="9525">
                       <a:solidFill>
@@ -6611,7 +6762,7 @@
                 </a:tc>
                 <a:tc>
                   <a:txBody>
-                    <a:bodyPr wrap="square"/>
+                    <a:bodyPr/>
                     <a:lstStyle/>
                     <a:p>
                       <a:r>
@@ -6625,15 +6776,21 @@
                       </a:r>
                     </a:p>
                   </a:txBody>
-                  <a:tcPr marL="73152" marR="73152" marT="36576" marB="36576" anchor="t">
+                  <a:tcPr marL="73152" marR="73152" marT="36576" marB="36576">
                     <a:lnL w="0">
                       <a:noFill/>
                     </a:lnL>
                     <a:lnR w="0">
                       <a:noFill/>
                     </a:lnR>
-                    <a:lnT w="0">
-                      <a:noFill/>
+                    <a:lnT w="9525" cap="flat" cmpd="sng" algn="ctr">
+                      <a:solidFill>
+                        <a:srgbClr val="C9CED6"/>
+                      </a:solidFill>
+                      <a:prstDash val="solid"/>
+                      <a:round/>
+                      <a:headEnd type="none" w="med" len="med"/>
+                      <a:tailEnd type="none" w="med" len="med"/>
                     </a:lnT>
                     <a:lnB w="9525">
                       <a:solidFill>
@@ -6647,7 +6804,7 @@
                 </a:tc>
                 <a:tc>
                   <a:txBody>
-                    <a:bodyPr wrap="square"/>
+                    <a:bodyPr/>
                     <a:lstStyle/>
                     <a:p>
                       <a:r>
@@ -6661,15 +6818,21 @@
                       </a:r>
                     </a:p>
                   </a:txBody>
-                  <a:tcPr marL="73152" marR="73152" marT="36576" marB="36576" anchor="t">
+                  <a:tcPr marL="73152" marR="73152" marT="36576" marB="36576">
                     <a:lnL w="0">
                       <a:noFill/>
                     </a:lnL>
                     <a:lnR w="0">
                       <a:noFill/>
                     </a:lnR>
-                    <a:lnT w="0">
-                      <a:noFill/>
+                    <a:lnT w="9525" cap="flat" cmpd="sng" algn="ctr">
+                      <a:solidFill>
+                        <a:srgbClr val="C9CED6"/>
+                      </a:solidFill>
+                      <a:prstDash val="solid"/>
+                      <a:round/>
+                      <a:headEnd type="none" w="med" len="med"/>
+                      <a:tailEnd type="none" w="med" len="med"/>
                     </a:lnT>
                     <a:lnB w="9525">
                       <a:solidFill>
@@ -6683,7 +6846,7 @@
                 </a:tc>
                 <a:tc>
                   <a:txBody>
-                    <a:bodyPr wrap="square"/>
+                    <a:bodyPr/>
                     <a:lstStyle/>
                     <a:p>
                       <a:r>
@@ -6697,15 +6860,21 @@
                       </a:r>
                     </a:p>
                   </a:txBody>
-                  <a:tcPr marL="73152" marR="73152" marT="36576" marB="36576" anchor="t">
+                  <a:tcPr marL="73152" marR="73152" marT="36576" marB="36576">
                     <a:lnL w="0">
                       <a:noFill/>
                     </a:lnL>
                     <a:lnR w="0">
                       <a:noFill/>
                     </a:lnR>
-                    <a:lnT w="0">
-                      <a:noFill/>
+                    <a:lnT w="9525" cap="flat" cmpd="sng" algn="ctr">
+                      <a:solidFill>
+                        <a:srgbClr val="C9CED6"/>
+                      </a:solidFill>
+                      <a:prstDash val="solid"/>
+                      <a:round/>
+                      <a:headEnd type="none" w="med" len="med"/>
+                      <a:tailEnd type="none" w="med" len="med"/>
                     </a:lnT>
                     <a:lnB w="9525">
                       <a:solidFill>
@@ -6717,11 +6886,16 @@
                     </a:solidFill>
                   </a:tcPr>
                 </a:tc>
+                <a:extLst>
+                  <a:ext uri="{0D108BD9-81ED-4DB2-BD59-A6C34878D82A}">
+                    <a16:rowId xmlns:a16="http://schemas.microsoft.com/office/drawing/2014/main" val="10003"/>
+                  </a:ext>
+                </a:extLst>
               </a:tr>
               <a:tr h="658368">
                 <a:tc>
                   <a:txBody>
-                    <a:bodyPr wrap="square"/>
+                    <a:bodyPr/>
                     <a:lstStyle/>
                     <a:p>
                       <a:r>
@@ -6735,15 +6909,21 @@
                       </a:r>
                     </a:p>
                   </a:txBody>
-                  <a:tcPr marL="73152" marR="73152" marT="36576" marB="36576" anchor="t">
+                  <a:tcPr marL="73152" marR="73152" marT="36576" marB="36576">
                     <a:lnL w="0">
                       <a:noFill/>
                     </a:lnL>
                     <a:lnR w="0">
                       <a:noFill/>
                     </a:lnR>
-                    <a:lnT w="0">
-                      <a:noFill/>
+                    <a:lnT w="9525" cap="flat" cmpd="sng" algn="ctr">
+                      <a:solidFill>
+                        <a:srgbClr val="C9CED6"/>
+                      </a:solidFill>
+                      <a:prstDash val="solid"/>
+                      <a:round/>
+                      <a:headEnd type="none" w="med" len="med"/>
+                      <a:tailEnd type="none" w="med" len="med"/>
                     </a:lnT>
                     <a:lnB w="9525">
                       <a:solidFill>
@@ -6757,7 +6937,7 @@
                 </a:tc>
                 <a:tc>
                   <a:txBody>
-                    <a:bodyPr wrap="square"/>
+                    <a:bodyPr/>
                     <a:lstStyle/>
                     <a:p>
                       <a:r>
@@ -6771,15 +6951,21 @@
                       </a:r>
                     </a:p>
                   </a:txBody>
-                  <a:tcPr marL="73152" marR="73152" marT="36576" marB="36576" anchor="t">
+                  <a:tcPr marL="73152" marR="73152" marT="36576" marB="36576">
                     <a:lnL w="0">
                       <a:noFill/>
                     </a:lnL>
                     <a:lnR w="0">
                       <a:noFill/>
                     </a:lnR>
-                    <a:lnT w="0">
-                      <a:noFill/>
+                    <a:lnT w="9525" cap="flat" cmpd="sng" algn="ctr">
+                      <a:solidFill>
+                        <a:srgbClr val="C9CED6"/>
+                      </a:solidFill>
+                      <a:prstDash val="solid"/>
+                      <a:round/>
+                      <a:headEnd type="none" w="med" len="med"/>
+                      <a:tailEnd type="none" w="med" len="med"/>
                     </a:lnT>
                     <a:lnB w="9525">
                       <a:solidFill>
@@ -6793,7 +6979,7 @@
                 </a:tc>
                 <a:tc>
                   <a:txBody>
-                    <a:bodyPr wrap="square"/>
+                    <a:bodyPr/>
                     <a:lstStyle/>
                     <a:p>
                       <a:r>
@@ -6807,15 +6993,21 @@
                       </a:r>
                     </a:p>
                   </a:txBody>
-                  <a:tcPr marL="73152" marR="73152" marT="36576" marB="36576" anchor="t">
+                  <a:tcPr marL="73152" marR="73152" marT="36576" marB="36576">
                     <a:lnL w="0">
                       <a:noFill/>
                     </a:lnL>
                     <a:lnR w="0">
                       <a:noFill/>
                     </a:lnR>
-                    <a:lnT w="0">
-                      <a:noFill/>
+                    <a:lnT w="9525" cap="flat" cmpd="sng" algn="ctr">
+                      <a:solidFill>
+                        <a:srgbClr val="C9CED6"/>
+                      </a:solidFill>
+                      <a:prstDash val="solid"/>
+                      <a:round/>
+                      <a:headEnd type="none" w="med" len="med"/>
+                      <a:tailEnd type="none" w="med" len="med"/>
                     </a:lnT>
                     <a:lnB w="9525">
                       <a:solidFill>
@@ -6829,7 +7021,7 @@
                 </a:tc>
                 <a:tc>
                   <a:txBody>
-                    <a:bodyPr wrap="square"/>
+                    <a:bodyPr/>
                     <a:lstStyle/>
                     <a:p>
                       <a:r>
@@ -6843,15 +7035,21 @@
                       </a:r>
                     </a:p>
                   </a:txBody>
-                  <a:tcPr marL="73152" marR="73152" marT="36576" marB="36576" anchor="t">
+                  <a:tcPr marL="73152" marR="73152" marT="36576" marB="36576">
                     <a:lnL w="0">
                       <a:noFill/>
                     </a:lnL>
                     <a:lnR w="0">
                       <a:noFill/>
                     </a:lnR>
-                    <a:lnT w="0">
-                      <a:noFill/>
+                    <a:lnT w="9525" cap="flat" cmpd="sng" algn="ctr">
+                      <a:solidFill>
+                        <a:srgbClr val="C9CED6"/>
+                      </a:solidFill>
+                      <a:prstDash val="solid"/>
+                      <a:round/>
+                      <a:headEnd type="none" w="med" len="med"/>
+                      <a:tailEnd type="none" w="med" len="med"/>
                     </a:lnT>
                     <a:lnB w="9525">
                       <a:solidFill>
@@ -6863,11 +7061,16 @@
                     </a:solidFill>
                   </a:tcPr>
                 </a:tc>
+                <a:extLst>
+                  <a:ext uri="{0D108BD9-81ED-4DB2-BD59-A6C34878D82A}">
+                    <a16:rowId xmlns:a16="http://schemas.microsoft.com/office/drawing/2014/main" val="10004"/>
+                  </a:ext>
+                </a:extLst>
               </a:tr>
               <a:tr h="658368">
                 <a:tc>
                   <a:txBody>
-                    <a:bodyPr wrap="square"/>
+                    <a:bodyPr/>
                     <a:lstStyle/>
                     <a:p>
                       <a:r>
@@ -6881,15 +7084,21 @@
                       </a:r>
                     </a:p>
                   </a:txBody>
-                  <a:tcPr marL="73152" marR="73152" marT="36576" marB="36576" anchor="t">
+                  <a:tcPr marL="73152" marR="73152" marT="36576" marB="36576">
                     <a:lnL w="0">
                       <a:noFill/>
                     </a:lnL>
                     <a:lnR w="0">
                       <a:noFill/>
                     </a:lnR>
-                    <a:lnT w="0">
-                      <a:noFill/>
+                    <a:lnT w="9525" cap="flat" cmpd="sng" algn="ctr">
+                      <a:solidFill>
+                        <a:srgbClr val="C9CED6"/>
+                      </a:solidFill>
+                      <a:prstDash val="solid"/>
+                      <a:round/>
+                      <a:headEnd type="none" w="med" len="med"/>
+                      <a:tailEnd type="none" w="med" len="med"/>
                     </a:lnT>
                     <a:lnB w="9525">
                       <a:solidFill>
@@ -6903,7 +7112,7 @@
                 </a:tc>
                 <a:tc>
                   <a:txBody>
-                    <a:bodyPr wrap="square"/>
+                    <a:bodyPr/>
                     <a:lstStyle/>
                     <a:p>
                       <a:r>
@@ -6917,15 +7126,21 @@
                       </a:r>
                     </a:p>
                   </a:txBody>
-                  <a:tcPr marL="73152" marR="73152" marT="36576" marB="36576" anchor="t">
+                  <a:tcPr marL="73152" marR="73152" marT="36576" marB="36576">
                     <a:lnL w="0">
                       <a:noFill/>
                     </a:lnL>
                     <a:lnR w="0">
                       <a:noFill/>
                     </a:lnR>
-                    <a:lnT w="0">
-                      <a:noFill/>
+                    <a:lnT w="9525" cap="flat" cmpd="sng" algn="ctr">
+                      <a:solidFill>
+                        <a:srgbClr val="C9CED6"/>
+                      </a:solidFill>
+                      <a:prstDash val="solid"/>
+                      <a:round/>
+                      <a:headEnd type="none" w="med" len="med"/>
+                      <a:tailEnd type="none" w="med" len="med"/>
                     </a:lnT>
                     <a:lnB w="9525">
                       <a:solidFill>
@@ -6939,7 +7154,7 @@
                 </a:tc>
                 <a:tc>
                   <a:txBody>
-                    <a:bodyPr wrap="square"/>
+                    <a:bodyPr/>
                     <a:lstStyle/>
                     <a:p>
                       <a:r>
@@ -6953,15 +7168,21 @@
                       </a:r>
                     </a:p>
                   </a:txBody>
-                  <a:tcPr marL="73152" marR="73152" marT="36576" marB="36576" anchor="t">
+                  <a:tcPr marL="73152" marR="73152" marT="36576" marB="36576">
                     <a:lnL w="0">
                       <a:noFill/>
                     </a:lnL>
                     <a:lnR w="0">
                       <a:noFill/>
                     </a:lnR>
-                    <a:lnT w="0">
-                      <a:noFill/>
+                    <a:lnT w="9525" cap="flat" cmpd="sng" algn="ctr">
+                      <a:solidFill>
+                        <a:srgbClr val="C9CED6"/>
+                      </a:solidFill>
+                      <a:prstDash val="solid"/>
+                      <a:round/>
+                      <a:headEnd type="none" w="med" len="med"/>
+                      <a:tailEnd type="none" w="med" len="med"/>
                     </a:lnT>
                     <a:lnB w="9525">
                       <a:solidFill>
@@ -6975,7 +7196,7 @@
                 </a:tc>
                 <a:tc>
                   <a:txBody>
-                    <a:bodyPr wrap="square"/>
+                    <a:bodyPr/>
                     <a:lstStyle/>
                     <a:p>
                       <a:r>
@@ -6989,15 +7210,21 @@
                       </a:r>
                     </a:p>
                   </a:txBody>
-                  <a:tcPr marL="73152" marR="73152" marT="36576" marB="36576" anchor="t">
+                  <a:tcPr marL="73152" marR="73152" marT="36576" marB="36576">
                     <a:lnL w="0">
                       <a:noFill/>
                     </a:lnL>
                     <a:lnR w="0">
                       <a:noFill/>
                     </a:lnR>
-                    <a:lnT w="0">
-                      <a:noFill/>
+                    <a:lnT w="9525" cap="flat" cmpd="sng" algn="ctr">
+                      <a:solidFill>
+                        <a:srgbClr val="C9CED6"/>
+                      </a:solidFill>
+                      <a:prstDash val="solid"/>
+                      <a:round/>
+                      <a:headEnd type="none" w="med" len="med"/>
+                      <a:tailEnd type="none" w="med" len="med"/>
                     </a:lnT>
                     <a:lnB w="9525">
                       <a:solidFill>
@@ -7009,6 +7236,11 @@
                     </a:solidFill>
                   </a:tcPr>
                 </a:tc>
+                <a:extLst>
+                  <a:ext uri="{0D108BD9-81ED-4DB2-BD59-A6C34878D82A}">
+                    <a16:rowId xmlns:a16="http://schemas.microsoft.com/office/drawing/2014/main" val="10005"/>
+                  </a:ext>
+                </a:extLst>
               </a:tr>
             </a:tbl>
           </a:graphicData>
@@ -7031,7 +7263,7 @@
           <a:noFill/>
         </p:spPr>
         <p:txBody>
-          <a:bodyPr wrap="square" anchor="t" lIns="0" rIns="0" tIns="0" bIns="0"/>
+          <a:bodyPr wrap="square" lIns="0" tIns="0" rIns="0" bIns="0" anchor="t"/>
           <a:lstStyle/>
           <a:p>
             <a:pPr algn="l">
@@ -7069,7 +7301,7 @@
 </file>
 
 <file path=ppt/slides/slide12.xml><?xml version="1.0" encoding="utf-8"?>
-<p:sld xmlns:a="http://schemas.openxmlformats.org/drawingml/2006/main" xmlns:p="http://schemas.openxmlformats.org/presentationml/2006/main" xmlns:r="http://schemas.openxmlformats.org/officeDocument/2006/relationships">
+<p:sld xmlns:a="http://schemas.openxmlformats.org/drawingml/2006/main" xmlns:r="http://schemas.openxmlformats.org/officeDocument/2006/relationships" xmlns:p="http://schemas.openxmlformats.org/presentationml/2006/main">
   <p:cSld>
     <p:spTree>
       <p:nvGrpSpPr>
@@ -7077,7 +7309,14 @@
         <p:cNvGrpSpPr/>
         <p:nvPr/>
       </p:nvGrpSpPr>
-      <p:grpSpPr/>
+      <p:grpSpPr>
+        <a:xfrm>
+          <a:off x="0" y="0"/>
+          <a:ext cx="0" cy="0"/>
+          <a:chOff x="0" y="0"/>
+          <a:chExt cx="0" cy="0"/>
+        </a:xfrm>
+      </p:grpSpPr>
       <p:sp>
         <p:nvSpPr>
           <p:cNvPr id="2" name="TextBox 1"/>
@@ -7095,7 +7334,7 @@
           <a:noFill/>
         </p:spPr>
         <p:txBody>
-          <a:bodyPr wrap="square" anchor="b" lIns="0" rIns="0" tIns="0" bIns="0"/>
+          <a:bodyPr wrap="square" lIns="0" tIns="0" rIns="0" bIns="0" anchor="b"/>
           <a:lstStyle/>
           <a:p>
             <a:pPr algn="l">
@@ -7174,7 +7413,7 @@
           <a:noFill/>
         </p:spPr>
         <p:txBody>
-          <a:bodyPr wrap="square" anchor="t" lIns="0" rIns="0" tIns="0" bIns="0"/>
+          <a:bodyPr wrap="square" lIns="0" tIns="0" rIns="0" bIns="0" anchor="t"/>
           <a:lstStyle/>
           <a:p>
             <a:pPr algn="l">
@@ -7211,7 +7450,7 @@
           <a:noFill/>
         </p:spPr>
         <p:txBody>
-          <a:bodyPr wrap="square" anchor="t" lIns="0" rIns="0" tIns="0" bIns="0"/>
+          <a:bodyPr wrap="square" lIns="0" tIns="0" rIns="0" bIns="0" anchor="t"/>
           <a:lstStyle/>
           <a:p>
             <a:pPr algn="r">
@@ -7248,7 +7487,7 @@
           <a:noFill/>
         </p:spPr>
         <p:txBody>
-          <a:bodyPr wrap="square" anchor="t" lIns="0" rIns="0" tIns="0" bIns="0"/>
+          <a:bodyPr wrap="square" lIns="0" tIns="0" rIns="0" bIns="0" anchor="t"/>
           <a:lstStyle/>
           <a:p>
             <a:pPr algn="l">
@@ -7306,7 +7545,7 @@
           <a:noFill/>
         </p:spPr>
         <p:txBody>
-          <a:bodyPr wrap="square" anchor="t" lIns="0" rIns="0" tIns="0" bIns="0"/>
+          <a:bodyPr wrap="square" lIns="0" tIns="0" rIns="0" bIns="0" anchor="t"/>
           <a:lstStyle/>
           <a:p>
             <a:pPr algn="l">
@@ -7363,59 +7602,6 @@
           </a:ln>
         </p:spPr>
       </p:cxnSp>
-      <p:sp>
-        <p:nvSpPr>
-          <p:cNvPr id="11" name="TextBox 10"/>
-          <p:cNvSpPr txBox="1"/>
-          <p:nvPr/>
-        </p:nvSpPr>
-        <p:spPr>
-          <a:xfrm>
-            <a:off x="548640" y="2944368"/>
-            <a:ext cx="6035040" cy="960120"/>
-          </a:xfrm>
-          <a:prstGeom prst="rect">
-            <a:avLst/>
-          </a:prstGeom>
-          <a:noFill/>
-        </p:spPr>
-        <p:txBody>
-          <a:bodyPr wrap="square" anchor="t" lIns="0" rIns="0" tIns="0" bIns="0"/>
-          <a:lstStyle/>
-          <a:p>
-            <a:pPr algn="l">
-              <a:spcAft>
-                <a:spcPts val="300"/>
-              </a:spcAft>
-            </a:pPr>
-            <a:r>
-              <a:rPr sz="1500">
-                <a:solidFill>
-                  <a:srgbClr val="1B2430"/>
-                </a:solidFill>
-                <a:latin typeface="Segoe UI Semibold"/>
-              </a:rPr>
-              <a:t>Waiting on the election calendar</a:t>
-            </a:r>
-          </a:p>
-          <a:p>
-            <a:pPr algn="l">
-              <a:spcAft>
-                <a:spcPts val="0"/>
-              </a:spcAft>
-            </a:pPr>
-            <a:r>
-              <a:rPr sz="1250">
-                <a:solidFill>
-                  <a:srgbClr val="5B6675"/>
-                </a:solidFill>
-                <a:latin typeface="Segoe UI"/>
-              </a:rPr>
-              <a:t>phone checks on a real device and two follow-up fixes</a:t>
-            </a:r>
-          </a:p>
-        </p:txBody>
-      </p:sp>
       <p:cxnSp>
         <p:nvCxnSpPr>
           <p:cNvPr id="12" name="Connector 11"/>
@@ -7437,149 +7623,1260 @@
           </a:ln>
         </p:spPr>
       </p:cxnSp>
-      <p:sp>
-        <p:nvSpPr>
-          <p:cNvPr id="13" name="TextBox 12"/>
-          <p:cNvSpPr txBox="1"/>
-          <p:nvPr/>
-        </p:nvSpPr>
-        <p:spPr>
-          <a:xfrm>
-            <a:off x="548640" y="4133088"/>
-            <a:ext cx="6035040" cy="960120"/>
-          </a:xfrm>
-          <a:prstGeom prst="rect">
-            <a:avLst/>
-          </a:prstGeom>
-          <a:noFill/>
-        </p:spPr>
-        <p:txBody>
-          <a:bodyPr wrap="square" anchor="t" lIns="0" rIns="0" tIns="0" bIns="0"/>
-          <a:lstStyle/>
-          <a:p>
-            <a:pPr algn="l">
-              <a:spcAft>
-                <a:spcPts val="300"/>
-              </a:spcAft>
-            </a:pPr>
-            <a:r>
-              <a:rPr sz="1500">
-                <a:solidFill>
-                  <a:srgbClr val="1B2430"/>
-                </a:solidFill>
-                <a:latin typeface="Segoe UI Semibold"/>
-              </a:rPr>
-              <a:t>First live election</a:t>
-            </a:r>
-          </a:p>
-          <a:p>
-            <a:pPr algn="l">
-              <a:spcAft>
-                <a:spcPts val="0"/>
-              </a:spcAft>
-            </a:pPr>
-            <a:r>
-              <a:rPr sz="1250">
-                <a:solidFill>
-                  <a:srgbClr val="5B6675"/>
-                </a:solidFill>
-                <a:latin typeface="Segoe UI"/>
-              </a:rPr>
-              <a:t>then a report on how it ran, set against the quality scenarios</a:t>
-            </a:r>
-          </a:p>
-        </p:txBody>
-      </p:sp>
-      <p:sp>
-        <p:nvSpPr>
-          <p:cNvPr id="14" name="Rectangle 13"/>
-          <p:cNvSpPr/>
-          <p:nvPr/>
-        </p:nvSpPr>
-        <p:spPr>
-          <a:xfrm>
-            <a:off x="7315200" y="1325880"/>
-            <a:ext cx="4327855" cy="4846320"/>
-          </a:xfrm>
-          <a:prstGeom prst="rect">
-            <a:avLst/>
-          </a:prstGeom>
-          <a:solidFill>
-            <a:srgbClr val="F3F4F6"/>
-          </a:solidFill>
-          <a:ln>
-            <a:noFill/>
-          </a:ln>
-        </p:spPr>
-        <p:txBody>
-          <a:bodyPr rtlCol="0" anchor="ctr" wrap="square" lIns="411480" rIns="411480"/>
-          <a:lstStyle/>
-          <a:p>
-            <a:pPr algn="l">
-              <a:spcAft>
-                <a:spcPts val="1000"/>
-              </a:spcAft>
-            </a:pPr>
-            <a:r>
-              <a:rPr sz="4000">
-                <a:solidFill>
-                  <a:srgbClr val="1B2430"/>
-                </a:solidFill>
-                <a:latin typeface="Segoe UI Semibold"/>
-              </a:rPr>
-              <a:t>Questions</a:t>
-            </a:r>
-          </a:p>
-          <a:p>
-            <a:pPr algn="l">
-              <a:spcAft>
-                <a:spcPts val="2600"/>
-              </a:spcAft>
-            </a:pPr>
-            <a:r>
-              <a:rPr sz="2000">
-                <a:solidFill>
-                  <a:srgbClr val="5B6675"/>
-                </a:solidFill>
-                <a:latin typeface="Segoe UI"/>
-              </a:rPr>
-              <a:t>Thank you</a:t>
-            </a:r>
-          </a:p>
-          <a:p>
-            <a:pPr algn="l">
-              <a:spcAft>
-                <a:spcPts val="300"/>
-              </a:spcAft>
-            </a:pPr>
-            <a:r>
-              <a:rPr sz="1050">
-                <a:solidFill>
-                  <a:srgbClr val="0F6C73"/>
-                </a:solidFill>
-                <a:latin typeface="Segoe UI Semibold"/>
-              </a:rPr>
-              <a:t>SOURCE CODE</a:t>
-            </a:r>
-          </a:p>
-          <a:p>
-            <a:pPr algn="l">
-              <a:spcAft>
-                <a:spcPts val="0"/>
-              </a:spcAft>
-            </a:pPr>
-            <a:r>
-              <a:rPr sz="1400">
-                <a:solidFill>
-                  <a:srgbClr val="1B2430"/>
-                </a:solidFill>
-                <a:latin typeface="Segoe UI"/>
-              </a:rPr>
-              <a:t>github.com/shalin-rahman/GHCAA</a:t>
-            </a:r>
-          </a:p>
-        </p:txBody>
-      </p:sp>
+      <p:graphicFrame>
+        <p:nvGraphicFramePr>
+          <p:cNvPr id="15" name="Table 14">
+            <a:extLst>
+              <a:ext uri="{FF2B5EF4-FFF2-40B4-BE49-F238E27FC236}">
+                <a16:creationId xmlns:a16="http://schemas.microsoft.com/office/drawing/2014/main" id="{FB7B51A4-04EF-BD96-B234-55BC4409B2E9}"/>
+              </a:ext>
+            </a:extLst>
+          </p:cNvPr>
+          <p:cNvGraphicFramePr>
+            <a:graphicFrameLocks noGrp="1"/>
+          </p:cNvGraphicFramePr>
+          <p:nvPr>
+            <p:extLst>
+              <p:ext uri="{D42A27DB-BD31-4B8C-83A1-F6EECF244321}">
+                <p14:modId xmlns:p14="http://schemas.microsoft.com/office/powerpoint/2010/main" val="2927576445"/>
+              </p:ext>
+            </p:extLst>
+          </p:nvPr>
+        </p:nvGraphicFramePr>
+        <p:xfrm>
+          <a:off x="4287520" y="2388540"/>
+          <a:ext cx="6905415" cy="4469460"/>
+        </p:xfrm>
+        <a:graphic>
+          <a:graphicData uri="http://schemas.openxmlformats.org/drawingml/2006/table">
+            <a:tbl>
+              <a:tblPr>
+                <a:tableStyleId>{5C22544A-7EE6-4342-B048-85BDC9FD1C3A}</a:tableStyleId>
+              </a:tblPr>
+              <a:tblGrid>
+                <a:gridCol w="2301805">
+                  <a:extLst>
+                    <a:ext uri="{9D8B030D-6E8A-4147-A177-3AD203B41FA5}">
+                      <a16:colId xmlns:a16="http://schemas.microsoft.com/office/drawing/2014/main" val="2909966855"/>
+                    </a:ext>
+                  </a:extLst>
+                </a:gridCol>
+                <a:gridCol w="2301805">
+                  <a:extLst>
+                    <a:ext uri="{9D8B030D-6E8A-4147-A177-3AD203B41FA5}">
+                      <a16:colId xmlns:a16="http://schemas.microsoft.com/office/drawing/2014/main" val="3689321574"/>
+                    </a:ext>
+                  </a:extLst>
+                </a:gridCol>
+                <a:gridCol w="2301805">
+                  <a:extLst>
+                    <a:ext uri="{9D8B030D-6E8A-4147-A177-3AD203B41FA5}">
+                      <a16:colId xmlns:a16="http://schemas.microsoft.com/office/drawing/2014/main" val="3553014998"/>
+                    </a:ext>
+                  </a:extLst>
+                </a:gridCol>
+              </a:tblGrid>
+              <a:tr h="104056">
+                <a:tc>
+                  <a:txBody>
+                    <a:bodyPr/>
+                    <a:lstStyle/>
+                    <a:p>
+                      <a:pPr algn="l">
+                        <a:buNone/>
+                      </a:pPr>
+                      <a:r>
+                        <a:rPr lang="en-US" sz="700">
+                          <a:effectLst/>
+                        </a:rPr>
+                        <a:t>Document</a:t>
+                      </a:r>
+                      <a:endParaRPr lang="en-US" sz="700" b="0" i="0">
+                        <a:solidFill>
+                          <a:srgbClr val="BFBFBF"/>
+                        </a:solidFill>
+                        <a:effectLst/>
+                        <a:latin typeface="-apple-system"/>
+                      </a:endParaRPr>
+                    </a:p>
+                  </a:txBody>
+                  <a:tcPr marL="10298" marR="10298" marT="10298" marB="10298" anchor="ctr"/>
+                </a:tc>
+                <a:tc>
+                  <a:txBody>
+                    <a:bodyPr/>
+                    <a:lstStyle/>
+                    <a:p>
+                      <a:pPr algn="l">
+                        <a:buNone/>
+                      </a:pPr>
+                      <a:r>
+                        <a:rPr lang="en-US" sz="700">
+                          <a:effectLst/>
+                        </a:rPr>
+                        <a:t>GitHub (preprod branch)</a:t>
+                      </a:r>
+                      <a:endParaRPr lang="en-US" sz="700" b="0" i="0">
+                        <a:solidFill>
+                          <a:srgbClr val="BFBFBF"/>
+                        </a:solidFill>
+                        <a:effectLst/>
+                        <a:latin typeface="-apple-system"/>
+                      </a:endParaRPr>
+                    </a:p>
+                  </a:txBody>
+                  <a:tcPr marL="10298" marR="10298" marT="10298" marB="10298" anchor="ctr"/>
+                </a:tc>
+                <a:tc>
+                  <a:txBody>
+                    <a:bodyPr/>
+                    <a:lstStyle/>
+                    <a:p>
+                      <a:pPr algn="l">
+                        <a:buNone/>
+                      </a:pPr>
+                      <a:r>
+                        <a:rPr lang="en-US" sz="700">
+                          <a:effectLst/>
+                        </a:rPr>
+                        <a:t>Preprod / local</a:t>
+                      </a:r>
+                      <a:endParaRPr lang="en-US" sz="700" b="0" i="0">
+                        <a:solidFill>
+                          <a:srgbClr val="BFBFBF"/>
+                        </a:solidFill>
+                        <a:effectLst/>
+                        <a:latin typeface="-apple-system"/>
+                      </a:endParaRPr>
+                    </a:p>
+                  </a:txBody>
+                  <a:tcPr marL="10298" marR="10298" marT="10298" marB="10298" anchor="ctr"/>
+                </a:tc>
+                <a:extLst>
+                  <a:ext uri="{0D108BD9-81ED-4DB2-BD59-A6C34878D82A}">
+                    <a16:rowId xmlns:a16="http://schemas.microsoft.com/office/drawing/2014/main" val="2101345212"/>
+                  </a:ext>
+                </a:extLst>
+              </a:tr>
+              <a:tr h="288239">
+                <a:tc>
+                  <a:txBody>
+                    <a:bodyPr/>
+                    <a:lstStyle/>
+                    <a:p>
+                      <a:pPr algn="l">
+                        <a:buNone/>
+                      </a:pPr>
+                      <a:r>
+                        <a:rPr lang="en-US" sz="700">
+                          <a:effectLst/>
+                        </a:rPr>
+                        <a:t>ERD (book section 5.6, Data Modelling)</a:t>
+                      </a:r>
+                      <a:endParaRPr lang="en-US" sz="700" b="0" i="0">
+                        <a:solidFill>
+                          <a:srgbClr val="BFBFBF"/>
+                        </a:solidFill>
+                        <a:effectLst/>
+                        <a:latin typeface="-apple-system"/>
+                      </a:endParaRPr>
+                    </a:p>
+                  </a:txBody>
+                  <a:tcPr marL="10298" marR="10298" marT="10298" marB="10298" anchor="ctr"/>
+                </a:tc>
+                <a:tc>
+                  <a:txBody>
+                    <a:bodyPr/>
+                    <a:lstStyle/>
+                    <a:p>
+                      <a:pPr algn="l">
+                        <a:buNone/>
+                      </a:pPr>
+                      <a:r>
+                        <a:rPr lang="en-US" sz="700">
+                          <a:effectLst/>
+                          <a:hlinkClick r:id="rId3"/>
+                        </a:rPr>
+                        <a:t>https://github.com/shalin-rahman/GHCAA/blob/preprod/docs/book/05-system-analysis.md#56-data-modelling-and-analysis-model-review</a:t>
+                      </a:r>
+                      <a:endParaRPr lang="en-US" sz="700" b="0" i="0">
+                        <a:solidFill>
+                          <a:srgbClr val="BFBFBF"/>
+                        </a:solidFill>
+                        <a:effectLst/>
+                        <a:latin typeface="-apple-system"/>
+                      </a:endParaRPr>
+                    </a:p>
+                  </a:txBody>
+                  <a:tcPr marL="10298" marR="10298" marT="10298" marB="10298" anchor="ctr"/>
+                </a:tc>
+                <a:tc>
+                  <a:txBody>
+                    <a:bodyPr/>
+                    <a:lstStyle/>
+                    <a:p>
+                      <a:pPr algn="l">
+                        <a:buNone/>
+                      </a:pPr>
+                      <a:endParaRPr lang="en-US" sz="700" b="0" i="0" dirty="0">
+                        <a:solidFill>
+                          <a:srgbClr val="BFBFBF"/>
+                        </a:solidFill>
+                        <a:effectLst/>
+                        <a:latin typeface="-apple-system"/>
+                      </a:endParaRPr>
+                    </a:p>
+                  </a:txBody>
+                  <a:tcPr marL="10298" marR="10298" marT="10298" marB="10298" anchor="ctr"/>
+                </a:tc>
+                <a:extLst>
+                  <a:ext uri="{0D108BD9-81ED-4DB2-BD59-A6C34878D82A}">
+                    <a16:rowId xmlns:a16="http://schemas.microsoft.com/office/drawing/2014/main" val="1765435952"/>
+                  </a:ext>
+                </a:extLst>
+              </a:tr>
+              <a:tr h="191274">
+                <a:tc>
+                  <a:txBody>
+                    <a:bodyPr/>
+                    <a:lstStyle/>
+                    <a:p>
+                      <a:pPr algn="l">
+                        <a:buNone/>
+                      </a:pPr>
+                      <a:r>
+                        <a:rPr lang="en-US" sz="700">
+                          <a:effectLst/>
+                        </a:rPr>
+                        <a:t>SRS</a:t>
+                      </a:r>
+                      <a:endParaRPr lang="en-US" sz="700" b="0" i="0">
+                        <a:solidFill>
+                          <a:srgbClr val="BFBFBF"/>
+                        </a:solidFill>
+                        <a:effectLst/>
+                        <a:latin typeface="-apple-system"/>
+                      </a:endParaRPr>
+                    </a:p>
+                  </a:txBody>
+                  <a:tcPr marL="10298" marR="10298" marT="10298" marB="10298" anchor="ctr"/>
+                </a:tc>
+                <a:tc>
+                  <a:txBody>
+                    <a:bodyPr/>
+                    <a:lstStyle/>
+                    <a:p>
+                      <a:pPr algn="l">
+                        <a:buNone/>
+                      </a:pPr>
+                      <a:r>
+                        <a:rPr lang="en-US" sz="700">
+                          <a:effectLst/>
+                          <a:hlinkClick r:id="rId4"/>
+                        </a:rPr>
+                        <a:t>https://github.com/shalin-rahman/GHCAA/blob/preprod/docs/SRS.md</a:t>
+                      </a:r>
+                      <a:endParaRPr lang="en-US" sz="700" b="0" i="0">
+                        <a:solidFill>
+                          <a:srgbClr val="BFBFBF"/>
+                        </a:solidFill>
+                        <a:effectLst/>
+                        <a:latin typeface="-apple-system"/>
+                      </a:endParaRPr>
+                    </a:p>
+                  </a:txBody>
+                  <a:tcPr marL="10298" marR="10298" marT="10298" marB="10298" anchor="ctr"/>
+                </a:tc>
+                <a:tc>
+                  <a:txBody>
+                    <a:bodyPr/>
+                    <a:lstStyle/>
+                    <a:p>
+                      <a:pPr algn="l">
+                        <a:buNone/>
+                      </a:pPr>
+                      <a:endParaRPr lang="en-US" sz="700" b="0" i="0">
+                        <a:solidFill>
+                          <a:srgbClr val="BFBFBF"/>
+                        </a:solidFill>
+                        <a:effectLst/>
+                        <a:latin typeface="-apple-system"/>
+                      </a:endParaRPr>
+                    </a:p>
+                  </a:txBody>
+                  <a:tcPr marL="10298" marR="10298" marT="10298" marB="10298" anchor="ctr"/>
+                </a:tc>
+                <a:extLst>
+                  <a:ext uri="{0D108BD9-81ED-4DB2-BD59-A6C34878D82A}">
+                    <a16:rowId xmlns:a16="http://schemas.microsoft.com/office/drawing/2014/main" val="3152576386"/>
+                  </a:ext>
+                </a:extLst>
+              </a:tr>
+              <a:tr h="278492">
+                <a:tc>
+                  <a:txBody>
+                    <a:bodyPr/>
+                    <a:lstStyle/>
+                    <a:p>
+                      <a:pPr algn="l">
+                        <a:buNone/>
+                      </a:pPr>
+                      <a:r>
+                        <a:rPr lang="en-US" sz="700">
+                          <a:effectLst/>
+                        </a:rPr>
+                        <a:t>Functional requirements (SRS section 3)</a:t>
+                      </a:r>
+                      <a:endParaRPr lang="en-US" sz="700" b="0" i="0">
+                        <a:solidFill>
+                          <a:srgbClr val="BFBFBF"/>
+                        </a:solidFill>
+                        <a:effectLst/>
+                        <a:latin typeface="-apple-system"/>
+                      </a:endParaRPr>
+                    </a:p>
+                  </a:txBody>
+                  <a:tcPr marL="10298" marR="10298" marT="10298" marB="10298" anchor="ctr"/>
+                </a:tc>
+                <a:tc>
+                  <a:txBody>
+                    <a:bodyPr/>
+                    <a:lstStyle/>
+                    <a:p>
+                      <a:pPr algn="l">
+                        <a:buNone/>
+                      </a:pPr>
+                      <a:r>
+                        <a:rPr lang="en-US" sz="700">
+                          <a:effectLst/>
+                          <a:hlinkClick r:id="rId5"/>
+                        </a:rPr>
+                        <a:t>https://github.com/shalin-rahman/GHCAA/blob/preprod/docs/SRS.md#3-functional-requirements-fr</a:t>
+                      </a:r>
+                      <a:endParaRPr lang="en-US" sz="700" b="0" i="0">
+                        <a:solidFill>
+                          <a:srgbClr val="BFBFBF"/>
+                        </a:solidFill>
+                        <a:effectLst/>
+                        <a:latin typeface="-apple-system"/>
+                      </a:endParaRPr>
+                    </a:p>
+                  </a:txBody>
+                  <a:tcPr marL="10298" marR="10298" marT="10298" marB="10298" anchor="ctr"/>
+                </a:tc>
+                <a:tc>
+                  <a:txBody>
+                    <a:bodyPr/>
+                    <a:lstStyle/>
+                    <a:p>
+                      <a:pPr algn="l">
+                        <a:buNone/>
+                      </a:pPr>
+                      <a:endParaRPr lang="en-US" sz="700" b="0" i="0">
+                        <a:solidFill>
+                          <a:srgbClr val="BFBFBF"/>
+                        </a:solidFill>
+                        <a:effectLst/>
+                        <a:latin typeface="-apple-system"/>
+                      </a:endParaRPr>
+                    </a:p>
+                  </a:txBody>
+                  <a:tcPr marL="10298" marR="10298" marT="10298" marB="10298" anchor="ctr"/>
+                </a:tc>
+                <a:extLst>
+                  <a:ext uri="{0D108BD9-81ED-4DB2-BD59-A6C34878D82A}">
+                    <a16:rowId xmlns:a16="http://schemas.microsoft.com/office/drawing/2014/main" val="2771541504"/>
+                  </a:ext>
+                </a:extLst>
+              </a:tr>
+              <a:tr h="278492">
+                <a:tc>
+                  <a:txBody>
+                    <a:bodyPr/>
+                    <a:lstStyle/>
+                    <a:p>
+                      <a:pPr algn="l">
+                        <a:buNone/>
+                      </a:pPr>
+                      <a:r>
+                        <a:rPr lang="en-US" sz="700">
+                          <a:effectLst/>
+                        </a:rPr>
+                        <a:t>Functional requirements (book section 3.3)</a:t>
+                      </a:r>
+                      <a:endParaRPr lang="en-US" sz="700" b="0" i="0">
+                        <a:solidFill>
+                          <a:srgbClr val="BFBFBF"/>
+                        </a:solidFill>
+                        <a:effectLst/>
+                        <a:latin typeface="-apple-system"/>
+                      </a:endParaRPr>
+                    </a:p>
+                  </a:txBody>
+                  <a:tcPr marL="10298" marR="10298" marT="10298" marB="10298" anchor="ctr"/>
+                </a:tc>
+                <a:tc>
+                  <a:txBody>
+                    <a:bodyPr/>
+                    <a:lstStyle/>
+                    <a:p>
+                      <a:pPr algn="l">
+                        <a:buNone/>
+                      </a:pPr>
+                      <a:r>
+                        <a:rPr lang="en-US" sz="700">
+                          <a:effectLst/>
+                          <a:hlinkClick r:id="rId6"/>
+                        </a:rPr>
+                        <a:t>https://github.com/shalin-rahman/GHCAA/blob/preprod/docs/book/03-requirements.md#33-requirements-specification</a:t>
+                      </a:r>
+                      <a:endParaRPr lang="en-US" sz="700" b="0" i="0">
+                        <a:solidFill>
+                          <a:srgbClr val="BFBFBF"/>
+                        </a:solidFill>
+                        <a:effectLst/>
+                        <a:latin typeface="-apple-system"/>
+                      </a:endParaRPr>
+                    </a:p>
+                  </a:txBody>
+                  <a:tcPr marL="10298" marR="10298" marT="10298" marB="10298" anchor="ctr"/>
+                </a:tc>
+                <a:tc>
+                  <a:txBody>
+                    <a:bodyPr/>
+                    <a:lstStyle/>
+                    <a:p>
+                      <a:pPr algn="l">
+                        <a:buNone/>
+                      </a:pPr>
+                      <a:endParaRPr lang="en-US" sz="700" b="0" i="0">
+                        <a:solidFill>
+                          <a:srgbClr val="BFBFBF"/>
+                        </a:solidFill>
+                        <a:effectLst/>
+                        <a:latin typeface="-apple-system"/>
+                      </a:endParaRPr>
+                    </a:p>
+                  </a:txBody>
+                  <a:tcPr marL="10298" marR="10298" marT="10298" marB="10298" anchor="ctr"/>
+                </a:tc>
+                <a:extLst>
+                  <a:ext uri="{0D108BD9-81ED-4DB2-BD59-A6C34878D82A}">
+                    <a16:rowId xmlns:a16="http://schemas.microsoft.com/office/drawing/2014/main" val="4158759897"/>
+                  </a:ext>
+                </a:extLst>
+              </a:tr>
+              <a:tr h="278492">
+                <a:tc>
+                  <a:txBody>
+                    <a:bodyPr/>
+                    <a:lstStyle/>
+                    <a:p>
+                      <a:pPr algn="l">
+                        <a:buNone/>
+                      </a:pPr>
+                      <a:r>
+                        <a:rPr lang="en-US" sz="700">
+                          <a:effectLst/>
+                        </a:rPr>
+                        <a:t>Non-functional requirements (SRS section 4)</a:t>
+                      </a:r>
+                      <a:endParaRPr lang="en-US" sz="700" b="0" i="0">
+                        <a:solidFill>
+                          <a:srgbClr val="BFBFBF"/>
+                        </a:solidFill>
+                        <a:effectLst/>
+                        <a:latin typeface="-apple-system"/>
+                      </a:endParaRPr>
+                    </a:p>
+                  </a:txBody>
+                  <a:tcPr marL="10298" marR="10298" marT="10298" marB="10298" anchor="ctr"/>
+                </a:tc>
+                <a:tc>
+                  <a:txBody>
+                    <a:bodyPr/>
+                    <a:lstStyle/>
+                    <a:p>
+                      <a:pPr algn="l">
+                        <a:buNone/>
+                      </a:pPr>
+                      <a:r>
+                        <a:rPr lang="en-US" sz="700">
+                          <a:effectLst/>
+                          <a:hlinkClick r:id="rId7"/>
+                        </a:rPr>
+                        <a:t>https://github.com/shalin-rahman/GHCAA/blob/preprod/docs/SRS.md#4-non-functional-requirements-nfr</a:t>
+                      </a:r>
+                      <a:endParaRPr lang="en-US" sz="700" b="0" i="0">
+                        <a:solidFill>
+                          <a:srgbClr val="BFBFBF"/>
+                        </a:solidFill>
+                        <a:effectLst/>
+                        <a:latin typeface="-apple-system"/>
+                      </a:endParaRPr>
+                    </a:p>
+                  </a:txBody>
+                  <a:tcPr marL="10298" marR="10298" marT="10298" marB="10298" anchor="ctr"/>
+                </a:tc>
+                <a:tc>
+                  <a:txBody>
+                    <a:bodyPr/>
+                    <a:lstStyle/>
+                    <a:p>
+                      <a:pPr algn="l">
+                        <a:buNone/>
+                      </a:pPr>
+                      <a:endParaRPr lang="en-US" sz="700" b="0" i="0">
+                        <a:solidFill>
+                          <a:srgbClr val="BFBFBF"/>
+                        </a:solidFill>
+                        <a:effectLst/>
+                        <a:latin typeface="-apple-system"/>
+                      </a:endParaRPr>
+                    </a:p>
+                  </a:txBody>
+                  <a:tcPr marL="10298" marR="10298" marT="10298" marB="10298" anchor="ctr"/>
+                </a:tc>
+                <a:extLst>
+                  <a:ext uri="{0D108BD9-81ED-4DB2-BD59-A6C34878D82A}">
+                    <a16:rowId xmlns:a16="http://schemas.microsoft.com/office/drawing/2014/main" val="4076654057"/>
+                  </a:ext>
+                </a:extLst>
+              </a:tr>
+              <a:tr h="365710">
+                <a:tc>
+                  <a:txBody>
+                    <a:bodyPr/>
+                    <a:lstStyle/>
+                    <a:p>
+                      <a:pPr algn="l">
+                        <a:buNone/>
+                      </a:pPr>
+                      <a:r>
+                        <a:rPr lang="en-US" sz="700">
+                          <a:effectLst/>
+                        </a:rPr>
+                        <a:t>Non-functional requirements (book section 3.4)</a:t>
+                      </a:r>
+                      <a:endParaRPr lang="en-US" sz="700" b="0" i="0">
+                        <a:solidFill>
+                          <a:srgbClr val="BFBFBF"/>
+                        </a:solidFill>
+                        <a:effectLst/>
+                        <a:latin typeface="-apple-system"/>
+                      </a:endParaRPr>
+                    </a:p>
+                  </a:txBody>
+                  <a:tcPr marL="10298" marR="10298" marT="10298" marB="10298" anchor="ctr"/>
+                </a:tc>
+                <a:tc>
+                  <a:txBody>
+                    <a:bodyPr/>
+                    <a:lstStyle/>
+                    <a:p>
+                      <a:pPr algn="l">
+                        <a:buNone/>
+                      </a:pPr>
+                      <a:r>
+                        <a:rPr lang="en-US" sz="700">
+                          <a:effectLst/>
+                          <a:hlinkClick r:id="rId8"/>
+                        </a:rPr>
+                        <a:t>https://github.com/shalin-rahman/GHCAA/blob/preprod/docs/book/03-requirements.md#34-non-functional-requirements-and-quality-attribute-scenarios</a:t>
+                      </a:r>
+                      <a:endParaRPr lang="en-US" sz="700" b="0" i="0">
+                        <a:solidFill>
+                          <a:srgbClr val="BFBFBF"/>
+                        </a:solidFill>
+                        <a:effectLst/>
+                        <a:latin typeface="-apple-system"/>
+                      </a:endParaRPr>
+                    </a:p>
+                  </a:txBody>
+                  <a:tcPr marL="10298" marR="10298" marT="10298" marB="10298" anchor="ctr"/>
+                </a:tc>
+                <a:tc>
+                  <a:txBody>
+                    <a:bodyPr/>
+                    <a:lstStyle/>
+                    <a:p>
+                      <a:pPr algn="l">
+                        <a:buNone/>
+                      </a:pPr>
+                      <a:endParaRPr lang="en-US" sz="700" b="0" i="0">
+                        <a:solidFill>
+                          <a:srgbClr val="BFBFBF"/>
+                        </a:solidFill>
+                        <a:effectLst/>
+                        <a:latin typeface="-apple-system"/>
+                      </a:endParaRPr>
+                    </a:p>
+                  </a:txBody>
+                  <a:tcPr marL="10298" marR="10298" marT="10298" marB="10298" anchor="ctr"/>
+                </a:tc>
+                <a:extLst>
+                  <a:ext uri="{0D108BD9-81ED-4DB2-BD59-A6C34878D82A}">
+                    <a16:rowId xmlns:a16="http://schemas.microsoft.com/office/drawing/2014/main" val="2403148802"/>
+                  </a:ext>
+                </a:extLst>
+              </a:tr>
+              <a:tr h="365710">
+                <a:tc>
+                  <a:txBody>
+                    <a:bodyPr/>
+                    <a:lstStyle/>
+                    <a:p>
+                      <a:pPr algn="l">
+                        <a:buNone/>
+                      </a:pPr>
+                      <a:r>
+                        <a:rPr lang="en-US" sz="700">
+                          <a:effectLst/>
+                        </a:rPr>
+                        <a:t>Book HTML</a:t>
+                      </a:r>
+                      <a:endParaRPr lang="en-US" sz="700" b="0" i="0">
+                        <a:solidFill>
+                          <a:srgbClr val="BFBFBF"/>
+                        </a:solidFill>
+                        <a:effectLst/>
+                        <a:latin typeface="-apple-system"/>
+                      </a:endParaRPr>
+                    </a:p>
+                  </a:txBody>
+                  <a:tcPr marL="10298" marR="10298" marT="10298" marB="10298" anchor="ctr"/>
+                </a:tc>
+                <a:tc>
+                  <a:txBody>
+                    <a:bodyPr/>
+                    <a:lstStyle/>
+                    <a:p>
+                      <a:pPr algn="l">
+                        <a:buNone/>
+                      </a:pPr>
+                      <a:r>
+                        <a:rPr lang="en-US" sz="700">
+                          <a:effectLst/>
+                          <a:hlinkClick r:id="rId9"/>
+                        </a:rPr>
+                        <a:t>https://github.com/shalin-rahman/GHCAA/blob/preprod/docs/book/GHCAA-Documentation-Book.html</a:t>
+                      </a:r>
+                      <a:endParaRPr lang="en-US" sz="700" b="0" i="0">
+                        <a:solidFill>
+                          <a:srgbClr val="BFBFBF"/>
+                        </a:solidFill>
+                        <a:effectLst/>
+                        <a:latin typeface="-apple-system"/>
+                      </a:endParaRPr>
+                    </a:p>
+                  </a:txBody>
+                  <a:tcPr marL="10298" marR="10298" marT="10298" marB="10298" anchor="ctr"/>
+                </a:tc>
+                <a:tc>
+                  <a:txBody>
+                    <a:bodyPr/>
+                    <a:lstStyle/>
+                    <a:p>
+                      <a:pPr algn="l">
+                        <a:buNone/>
+                      </a:pPr>
+                      <a:r>
+                        <a:rPr lang="en-US" sz="700">
+                          <a:effectLst/>
+                        </a:rPr>
+                        <a:t>Rendered (public repo only): </a:t>
+                      </a:r>
+                      <a:r>
+                        <a:rPr lang="en-US" sz="700">
+                          <a:effectLst/>
+                          <a:hlinkClick r:id="rId10"/>
+                        </a:rPr>
+                        <a:t>https://htmlpreview.github.io/?https://github.com/shalin-rahman/GHCAA/blob/preprod/docs/book/GHCAA-Documentation-Book.html</a:t>
+                      </a:r>
+                      <a:endParaRPr lang="en-US" sz="700" b="0" i="0">
+                        <a:solidFill>
+                          <a:srgbClr val="BFBFBF"/>
+                        </a:solidFill>
+                        <a:effectLst/>
+                        <a:latin typeface="-apple-system"/>
+                      </a:endParaRPr>
+                    </a:p>
+                  </a:txBody>
+                  <a:tcPr marL="10298" marR="10298" marT="10298" marB="10298" anchor="ctr"/>
+                </a:tc>
+                <a:extLst>
+                  <a:ext uri="{0D108BD9-81ED-4DB2-BD59-A6C34878D82A}">
+                    <a16:rowId xmlns:a16="http://schemas.microsoft.com/office/drawing/2014/main" val="2063774775"/>
+                  </a:ext>
+                </a:extLst>
+              </a:tr>
+              <a:tr h="278492">
+                <a:tc>
+                  <a:txBody>
+                    <a:bodyPr/>
+                    <a:lstStyle/>
+                    <a:p>
+                      <a:pPr algn="l">
+                        <a:buNone/>
+                      </a:pPr>
+                      <a:r>
+                        <a:rPr lang="en-US" sz="700">
+                          <a:effectLst/>
+                        </a:rPr>
+                        <a:t>Book HTML, two-column</a:t>
+                      </a:r>
+                      <a:endParaRPr lang="en-US" sz="700" b="0" i="0">
+                        <a:solidFill>
+                          <a:srgbClr val="BFBFBF"/>
+                        </a:solidFill>
+                        <a:effectLst/>
+                        <a:latin typeface="-apple-system"/>
+                      </a:endParaRPr>
+                    </a:p>
+                  </a:txBody>
+                  <a:tcPr marL="10298" marR="10298" marT="10298" marB="10298" anchor="ctr"/>
+                </a:tc>
+                <a:tc>
+                  <a:txBody>
+                    <a:bodyPr/>
+                    <a:lstStyle/>
+                    <a:p>
+                      <a:pPr algn="l">
+                        <a:buNone/>
+                      </a:pPr>
+                      <a:r>
+                        <a:rPr lang="en-US" sz="700">
+                          <a:effectLst/>
+                          <a:hlinkClick r:id="rId11"/>
+                        </a:rPr>
+                        <a:t>https://github.com/shalin-rahman/GHCAA/blob/preprod/docs/book/GHCAA-Documentation-Book-2col.html</a:t>
+                      </a:r>
+                      <a:endParaRPr lang="en-US" sz="700" b="0" i="0">
+                        <a:solidFill>
+                          <a:srgbClr val="BFBFBF"/>
+                        </a:solidFill>
+                        <a:effectLst/>
+                        <a:latin typeface="-apple-system"/>
+                      </a:endParaRPr>
+                    </a:p>
+                  </a:txBody>
+                  <a:tcPr marL="10298" marR="10298" marT="10298" marB="10298" anchor="ctr"/>
+                </a:tc>
+                <a:tc>
+                  <a:txBody>
+                    <a:bodyPr/>
+                    <a:lstStyle/>
+                    <a:p>
+                      <a:pPr algn="l">
+                        <a:buNone/>
+                      </a:pPr>
+                      <a:endParaRPr lang="en-US" sz="700" b="0" i="0">
+                        <a:solidFill>
+                          <a:srgbClr val="BFBFBF"/>
+                        </a:solidFill>
+                        <a:effectLst/>
+                        <a:latin typeface="-apple-system"/>
+                      </a:endParaRPr>
+                    </a:p>
+                  </a:txBody>
+                  <a:tcPr marL="10298" marR="10298" marT="10298" marB="10298" anchor="ctr"/>
+                </a:tc>
+                <a:extLst>
+                  <a:ext uri="{0D108BD9-81ED-4DB2-BD59-A6C34878D82A}">
+                    <a16:rowId xmlns:a16="http://schemas.microsoft.com/office/drawing/2014/main" val="574942612"/>
+                  </a:ext>
+                </a:extLst>
+              </a:tr>
+              <a:tr h="278492">
+                <a:tc>
+                  <a:txBody>
+                    <a:bodyPr/>
+                    <a:lstStyle/>
+                    <a:p>
+                      <a:pPr algn="l">
+                        <a:buNone/>
+                      </a:pPr>
+                      <a:r>
+                        <a:rPr lang="en-US" sz="700">
+                          <a:effectLst/>
+                        </a:rPr>
+                        <a:t>Election master overview</a:t>
+                      </a:r>
+                      <a:endParaRPr lang="en-US" sz="700" b="0" i="0">
+                        <a:solidFill>
+                          <a:srgbClr val="BFBFBF"/>
+                        </a:solidFill>
+                        <a:effectLst/>
+                        <a:latin typeface="-apple-system"/>
+                      </a:endParaRPr>
+                    </a:p>
+                  </a:txBody>
+                  <a:tcPr marL="10298" marR="10298" marT="10298" marB="10298" anchor="ctr"/>
+                </a:tc>
+                <a:tc>
+                  <a:txBody>
+                    <a:bodyPr/>
+                    <a:lstStyle/>
+                    <a:p>
+                      <a:pPr algn="l">
+                        <a:buNone/>
+                      </a:pPr>
+                      <a:r>
+                        <a:rPr lang="en-US" sz="700">
+                          <a:effectLst/>
+                          <a:hlinkClick r:id="rId12"/>
+                        </a:rPr>
+                        <a:t>https://github.com/shalin-rahman/GHCAA/blob/preprod/docs/Elections/00-Election-Master-Overview.md</a:t>
+                      </a:r>
+                      <a:endParaRPr lang="en-US" sz="700" b="0" i="0">
+                        <a:solidFill>
+                          <a:srgbClr val="BFBFBF"/>
+                        </a:solidFill>
+                        <a:effectLst/>
+                        <a:latin typeface="-apple-system"/>
+                      </a:endParaRPr>
+                    </a:p>
+                  </a:txBody>
+                  <a:tcPr marL="10298" marR="10298" marT="10298" marB="10298" anchor="ctr"/>
+                </a:tc>
+                <a:tc>
+                  <a:txBody>
+                    <a:bodyPr/>
+                    <a:lstStyle/>
+                    <a:p>
+                      <a:pPr algn="l">
+                        <a:buNone/>
+                      </a:pPr>
+                      <a:endParaRPr lang="en-US" sz="700" b="0" i="0">
+                        <a:solidFill>
+                          <a:srgbClr val="BFBFBF"/>
+                        </a:solidFill>
+                        <a:effectLst/>
+                        <a:latin typeface="-apple-system"/>
+                      </a:endParaRPr>
+                    </a:p>
+                  </a:txBody>
+                  <a:tcPr marL="10298" marR="10298" marT="10298" marB="10298" anchor="ctr"/>
+                </a:tc>
+                <a:extLst>
+                  <a:ext uri="{0D108BD9-81ED-4DB2-BD59-A6C34878D82A}">
+                    <a16:rowId xmlns:a16="http://schemas.microsoft.com/office/drawing/2014/main" val="2116855814"/>
+                  </a:ext>
+                </a:extLst>
+              </a:tr>
+              <a:tr h="278492">
+                <a:tc>
+                  <a:txBody>
+                    <a:bodyPr/>
+                    <a:lstStyle/>
+                    <a:p>
+                      <a:pPr algn="l">
+                        <a:buNone/>
+                      </a:pPr>
+                      <a:r>
+                        <a:rPr lang="en-US" sz="700">
+                          <a:effectLst/>
+                        </a:rPr>
+                        <a:t>Spec 023 (ballot secrecy)</a:t>
+                      </a:r>
+                      <a:endParaRPr lang="en-US" sz="700" b="0" i="0">
+                        <a:solidFill>
+                          <a:srgbClr val="BFBFBF"/>
+                        </a:solidFill>
+                        <a:effectLst/>
+                        <a:latin typeface="-apple-system"/>
+                      </a:endParaRPr>
+                    </a:p>
+                  </a:txBody>
+                  <a:tcPr marL="10298" marR="10298" marT="10298" marB="10298" anchor="ctr"/>
+                </a:tc>
+                <a:tc>
+                  <a:txBody>
+                    <a:bodyPr/>
+                    <a:lstStyle/>
+                    <a:p>
+                      <a:pPr algn="l">
+                        <a:buNone/>
+                      </a:pPr>
+                      <a:r>
+                        <a:rPr lang="en-US" sz="700">
+                          <a:effectLst/>
+                          <a:hlinkClick r:id="rId13"/>
+                        </a:rPr>
+                        <a:t>https://github.com/shalin-rahman/GHCAA/blob/preprod/docs/specs/023-election-ballot-secrecy-and-standards/spec.md</a:t>
+                      </a:r>
+                      <a:endParaRPr lang="en-US" sz="700" b="0" i="0">
+                        <a:solidFill>
+                          <a:srgbClr val="BFBFBF"/>
+                        </a:solidFill>
+                        <a:effectLst/>
+                        <a:latin typeface="-apple-system"/>
+                      </a:endParaRPr>
+                    </a:p>
+                  </a:txBody>
+                  <a:tcPr marL="10298" marR="10298" marT="10298" marB="10298" anchor="ctr"/>
+                </a:tc>
+                <a:tc>
+                  <a:txBody>
+                    <a:bodyPr/>
+                    <a:lstStyle/>
+                    <a:p>
+                      <a:pPr algn="l">
+                        <a:buNone/>
+                      </a:pPr>
+                      <a:endParaRPr lang="en-US" sz="700" b="0" i="0">
+                        <a:solidFill>
+                          <a:srgbClr val="BFBFBF"/>
+                        </a:solidFill>
+                        <a:effectLst/>
+                        <a:latin typeface="-apple-system"/>
+                      </a:endParaRPr>
+                    </a:p>
+                  </a:txBody>
+                  <a:tcPr marL="10298" marR="10298" marT="10298" marB="10298" anchor="ctr"/>
+                </a:tc>
+                <a:extLst>
+                  <a:ext uri="{0D108BD9-81ED-4DB2-BD59-A6C34878D82A}">
+                    <a16:rowId xmlns:a16="http://schemas.microsoft.com/office/drawing/2014/main" val="3323631591"/>
+                  </a:ext>
+                </a:extLst>
+              </a:tr>
+              <a:tr h="191274">
+                <a:tc>
+                  <a:txBody>
+                    <a:bodyPr/>
+                    <a:lstStyle/>
+                    <a:p>
+                      <a:pPr algn="l">
+                        <a:buNone/>
+                      </a:pPr>
+                      <a:r>
+                        <a:rPr lang="en-US" sz="700">
+                          <a:effectLst/>
+                        </a:rPr>
+                        <a:t>TODO</a:t>
+                      </a:r>
+                      <a:endParaRPr lang="en-US" sz="700" b="0" i="0">
+                        <a:solidFill>
+                          <a:srgbClr val="BFBFBF"/>
+                        </a:solidFill>
+                        <a:effectLst/>
+                        <a:latin typeface="-apple-system"/>
+                      </a:endParaRPr>
+                    </a:p>
+                  </a:txBody>
+                  <a:tcPr marL="10298" marR="10298" marT="10298" marB="10298" anchor="ctr"/>
+                </a:tc>
+                <a:tc>
+                  <a:txBody>
+                    <a:bodyPr/>
+                    <a:lstStyle/>
+                    <a:p>
+                      <a:pPr algn="l">
+                        <a:buNone/>
+                      </a:pPr>
+                      <a:r>
+                        <a:rPr lang="en-US" sz="700">
+                          <a:effectLst/>
+                          <a:hlinkClick r:id="rId14"/>
+                        </a:rPr>
+                        <a:t>https://github.com/shalin-rahman/GHCAA/blob/preprod/docs/TODO.md</a:t>
+                      </a:r>
+                      <a:endParaRPr lang="en-US" sz="700" b="0" i="0">
+                        <a:solidFill>
+                          <a:srgbClr val="BFBFBF"/>
+                        </a:solidFill>
+                        <a:effectLst/>
+                        <a:latin typeface="-apple-system"/>
+                      </a:endParaRPr>
+                    </a:p>
+                  </a:txBody>
+                  <a:tcPr marL="10298" marR="10298" marT="10298" marB="10298" anchor="ctr"/>
+                </a:tc>
+                <a:tc>
+                  <a:txBody>
+                    <a:bodyPr/>
+                    <a:lstStyle/>
+                    <a:p>
+                      <a:pPr algn="l">
+                        <a:buNone/>
+                      </a:pPr>
+                      <a:endParaRPr lang="en-US" sz="700" b="0" i="0">
+                        <a:solidFill>
+                          <a:srgbClr val="BFBFBF"/>
+                        </a:solidFill>
+                        <a:effectLst/>
+                        <a:latin typeface="-apple-system"/>
+                      </a:endParaRPr>
+                    </a:p>
+                  </a:txBody>
+                  <a:tcPr marL="10298" marR="10298" marT="10298" marB="10298" anchor="ctr"/>
+                </a:tc>
+                <a:extLst>
+                  <a:ext uri="{0D108BD9-81ED-4DB2-BD59-A6C34878D82A}">
+                    <a16:rowId xmlns:a16="http://schemas.microsoft.com/office/drawing/2014/main" val="1453299862"/>
+                  </a:ext>
+                </a:extLst>
+              </a:tr>
+              <a:tr h="207367">
+                <a:tc>
+                  <a:txBody>
+                    <a:bodyPr/>
+                    <a:lstStyle/>
+                    <a:p>
+                      <a:pPr algn="l">
+                        <a:buNone/>
+                      </a:pPr>
+                      <a:r>
+                        <a:rPr lang="en-US" sz="700">
+                          <a:effectLst/>
+                        </a:rPr>
+                        <a:t>Tracker HTML</a:t>
+                      </a:r>
+                      <a:endParaRPr lang="en-US" sz="700" b="0" i="0">
+                        <a:solidFill>
+                          <a:srgbClr val="BFBFBF"/>
+                        </a:solidFill>
+                        <a:effectLst/>
+                        <a:latin typeface="-apple-system"/>
+                      </a:endParaRPr>
+                    </a:p>
+                  </a:txBody>
+                  <a:tcPr marL="10298" marR="10298" marT="10298" marB="10298" anchor="ctr"/>
+                </a:tc>
+                <a:tc>
+                  <a:txBody>
+                    <a:bodyPr/>
+                    <a:lstStyle/>
+                    <a:p>
+                      <a:pPr algn="l">
+                        <a:buNone/>
+                      </a:pPr>
+                      <a:r>
+                        <a:rPr lang="en-US" sz="700">
+                          <a:effectLst/>
+                        </a:rPr>
+                        <a:t>Not on GitHub (git-ignored)</a:t>
+                      </a:r>
+                      <a:endParaRPr lang="en-US" sz="700" b="0" i="0">
+                        <a:solidFill>
+                          <a:srgbClr val="BFBFBF"/>
+                        </a:solidFill>
+                        <a:effectLst/>
+                        <a:latin typeface="-apple-system"/>
+                      </a:endParaRPr>
+                    </a:p>
+                  </a:txBody>
+                  <a:tcPr marL="10298" marR="10298" marT="10298" marB="10298" anchor="ctr"/>
+                </a:tc>
+                <a:tc>
+                  <a:txBody>
+                    <a:bodyPr/>
+                    <a:lstStyle/>
+                    <a:p>
+                      <a:pPr algn="l">
+                        <a:buNone/>
+                      </a:pPr>
+                      <a:r>
+                        <a:rPr lang="en-US" sz="700">
+                          <a:effectLst/>
+                        </a:rPr>
+                        <a:t>Local: </a:t>
+                      </a:r>
+                      <a:r>
+                        <a:rPr lang="en-US" sz="700">
+                          <a:effectLst/>
+                          <a:hlinkClick r:id="rId15"/>
+                        </a:rPr>
+                        <a:t>docs/book/build/tracker.html</a:t>
+                      </a:r>
+                      <a:r>
+                        <a:rPr lang="en-US" sz="700">
+                          <a:effectLst/>
+                        </a:rPr>
+                        <a:t>, made by python docs/book/build/tracker_page.py</a:t>
+                      </a:r>
+                      <a:endParaRPr lang="en-US" sz="700" b="0" i="0">
+                        <a:solidFill>
+                          <a:srgbClr val="BFBFBF"/>
+                        </a:solidFill>
+                        <a:effectLst/>
+                        <a:latin typeface="-apple-system"/>
+                      </a:endParaRPr>
+                    </a:p>
+                  </a:txBody>
+                  <a:tcPr marL="10298" marR="10298" marT="10298" marB="10298" anchor="ctr"/>
+                </a:tc>
+                <a:extLst>
+                  <a:ext uri="{0D108BD9-81ED-4DB2-BD59-A6C34878D82A}">
+                    <a16:rowId xmlns:a16="http://schemas.microsoft.com/office/drawing/2014/main" val="2960727623"/>
+                  </a:ext>
+                </a:extLst>
+              </a:tr>
+              <a:tr h="191274">
+                <a:tc>
+                  <a:txBody>
+                    <a:bodyPr/>
+                    <a:lstStyle/>
+                    <a:p>
+                      <a:pPr algn="l">
+                        <a:buNone/>
+                      </a:pPr>
+                      <a:r>
+                        <a:rPr lang="en-US" sz="700">
+                          <a:effectLst/>
+                        </a:rPr>
+                        <a:t>Dev Tracker page</a:t>
+                      </a:r>
+                      <a:endParaRPr lang="en-US" sz="700" b="0" i="0">
+                        <a:solidFill>
+                          <a:srgbClr val="BFBFBF"/>
+                        </a:solidFill>
+                        <a:effectLst/>
+                        <a:latin typeface="-apple-system"/>
+                      </a:endParaRPr>
+                    </a:p>
+                  </a:txBody>
+                  <a:tcPr marL="10298" marR="10298" marT="10298" marB="10298" anchor="ctr"/>
+                </a:tc>
+                <a:tc>
+                  <a:txBody>
+                    <a:bodyPr/>
+                    <a:lstStyle/>
+                    <a:p>
+                      <a:pPr algn="l">
+                        <a:buNone/>
+                      </a:pPr>
+                      <a:endParaRPr lang="en-US" sz="700" b="0" i="0">
+                        <a:solidFill>
+                          <a:srgbClr val="BFBFBF"/>
+                        </a:solidFill>
+                        <a:effectLst/>
+                        <a:latin typeface="-apple-system"/>
+                      </a:endParaRPr>
+                    </a:p>
+                  </a:txBody>
+                  <a:tcPr marL="10298" marR="10298" marT="10298" marB="10298" anchor="ctr"/>
+                </a:tc>
+                <a:tc>
+                  <a:txBody>
+                    <a:bodyPr/>
+                    <a:lstStyle/>
+                    <a:p>
+                      <a:pPr algn="l">
+                        <a:buNone/>
+                      </a:pPr>
+                      <a:r>
+                        <a:rPr lang="en-US" sz="700">
+                          <a:effectLst/>
+                          <a:hlinkClick r:id="rId16"/>
+                        </a:rPr>
+                        <a:t>https://ghcaa-ryl6.onrender.com/admin/dev-tracker</a:t>
+                      </a:r>
+                      <a:r>
+                        <a:rPr lang="en-US" sz="700">
+                          <a:effectLst/>
+                        </a:rPr>
+                        <a:t> (SuperAdmin login)</a:t>
+                      </a:r>
+                      <a:endParaRPr lang="en-US" sz="700" b="0" i="0">
+                        <a:solidFill>
+                          <a:srgbClr val="BFBFBF"/>
+                        </a:solidFill>
+                        <a:effectLst/>
+                        <a:latin typeface="-apple-system"/>
+                      </a:endParaRPr>
+                    </a:p>
+                  </a:txBody>
+                  <a:tcPr marL="10298" marR="10298" marT="10298" marB="10298" anchor="ctr"/>
+                </a:tc>
+                <a:extLst>
+                  <a:ext uri="{0D108BD9-81ED-4DB2-BD59-A6C34878D82A}">
+                    <a16:rowId xmlns:a16="http://schemas.microsoft.com/office/drawing/2014/main" val="2481490186"/>
+                  </a:ext>
+                </a:extLst>
+              </a:tr>
+              <a:tr h="104056">
+                <a:tc>
+                  <a:txBody>
+                    <a:bodyPr/>
+                    <a:lstStyle/>
+                    <a:p>
+                      <a:pPr algn="l">
+                        <a:buNone/>
+                      </a:pPr>
+                      <a:r>
+                        <a:rPr lang="en-US" sz="700">
+                          <a:effectLst/>
+                        </a:rPr>
+                        <a:t>Preprod site</a:t>
+                      </a:r>
+                      <a:endParaRPr lang="en-US" sz="700" b="0" i="0">
+                        <a:solidFill>
+                          <a:srgbClr val="BFBFBF"/>
+                        </a:solidFill>
+                        <a:effectLst/>
+                        <a:latin typeface="-apple-system"/>
+                      </a:endParaRPr>
+                    </a:p>
+                  </a:txBody>
+                  <a:tcPr marL="10298" marR="10298" marT="10298" marB="10298" anchor="ctr"/>
+                </a:tc>
+                <a:tc>
+                  <a:txBody>
+                    <a:bodyPr/>
+                    <a:lstStyle/>
+                    <a:p>
+                      <a:pPr algn="l">
+                        <a:buNone/>
+                      </a:pPr>
+                      <a:endParaRPr lang="en-US" sz="700" b="0" i="0">
+                        <a:solidFill>
+                          <a:srgbClr val="BFBFBF"/>
+                        </a:solidFill>
+                        <a:effectLst/>
+                        <a:latin typeface="-apple-system"/>
+                      </a:endParaRPr>
+                    </a:p>
+                  </a:txBody>
+                  <a:tcPr marL="10298" marR="10298" marT="10298" marB="10298" anchor="ctr"/>
+                </a:tc>
+                <a:tc>
+                  <a:txBody>
+                    <a:bodyPr/>
+                    <a:lstStyle/>
+                    <a:p>
+                      <a:pPr algn="l">
+                        <a:buNone/>
+                      </a:pPr>
+                      <a:r>
+                        <a:rPr lang="en-US" sz="700" dirty="0">
+                          <a:effectLst/>
+                          <a:hlinkClick r:id="rId17"/>
+                        </a:rPr>
+                        <a:t>https://ghcaa-ryl6.onrender.com</a:t>
+                      </a:r>
+                      <a:endParaRPr lang="en-US" sz="700" b="0" i="0" dirty="0">
+                        <a:solidFill>
+                          <a:srgbClr val="BFBFBF"/>
+                        </a:solidFill>
+                        <a:effectLst/>
+                        <a:latin typeface="-apple-system"/>
+                      </a:endParaRPr>
+                    </a:p>
+                  </a:txBody>
+                  <a:tcPr marL="10298" marR="10298" marT="10298" marB="10298" anchor="ctr"/>
+                </a:tc>
+                <a:extLst>
+                  <a:ext uri="{0D108BD9-81ED-4DB2-BD59-A6C34878D82A}">
+                    <a16:rowId xmlns:a16="http://schemas.microsoft.com/office/drawing/2014/main" val="252553377"/>
+                  </a:ext>
+                </a:extLst>
+              </a:tr>
+            </a:tbl>
+          </a:graphicData>
+        </a:graphic>
+      </p:graphicFrame>
     </p:spTree>
   </p:cSld>
   <p:clrMapOvr>
@@ -7588,8 +8885,624 @@
 </p:sld>
 </file>
 
+<file path=ppt/slides/slide13.xml><?xml version="1.0" encoding="utf-8"?>
+<p:sld xmlns:a="http://schemas.openxmlformats.org/drawingml/2006/main" xmlns:r="http://schemas.openxmlformats.org/officeDocument/2006/relationships" xmlns:p="http://schemas.openxmlformats.org/presentationml/2006/main">
+  <p:cSld>
+    <p:spTree>
+      <p:nvGrpSpPr>
+        <p:cNvPr id="1" name="">
+          <a:extLst>
+            <a:ext uri="{FF2B5EF4-FFF2-40B4-BE49-F238E27FC236}">
+              <a16:creationId xmlns:a16="http://schemas.microsoft.com/office/drawing/2014/main" id="{F5AFBA5D-804F-DB40-FD10-70A638E0A9D3}"/>
+            </a:ext>
+          </a:extLst>
+        </p:cNvPr>
+        <p:cNvGrpSpPr/>
+        <p:nvPr/>
+      </p:nvGrpSpPr>
+      <p:grpSpPr>
+        <a:xfrm>
+          <a:off x="0" y="0"/>
+          <a:ext cx="0" cy="0"/>
+          <a:chOff x="0" y="0"/>
+          <a:chExt cx="0" cy="0"/>
+        </a:xfrm>
+      </p:grpSpPr>
+      <p:sp>
+        <p:nvSpPr>
+          <p:cNvPr id="2" name="TextBox 1">
+            <a:extLst>
+              <a:ext uri="{FF2B5EF4-FFF2-40B4-BE49-F238E27FC236}">
+                <a16:creationId xmlns:a16="http://schemas.microsoft.com/office/drawing/2014/main" id="{246EFC4D-6ACF-FEB6-0667-DA4FDD2452B5}"/>
+              </a:ext>
+            </a:extLst>
+          </p:cNvPr>
+          <p:cNvSpPr txBox="1"/>
+          <p:nvPr/>
+        </p:nvSpPr>
+        <p:spPr>
+          <a:xfrm>
+            <a:off x="548640" y="347472"/>
+            <a:ext cx="11094415" cy="566928"/>
+          </a:xfrm>
+          <a:prstGeom prst="rect">
+            <a:avLst/>
+          </a:prstGeom>
+          <a:noFill/>
+        </p:spPr>
+        <p:txBody>
+          <a:bodyPr wrap="square" lIns="0" tIns="0" rIns="0" bIns="0" anchor="b"/>
+          <a:lstStyle/>
+          <a:p>
+            <a:pPr algn="l">
+              <a:spcAft>
+                <a:spcPts val="0"/>
+              </a:spcAft>
+            </a:pPr>
+            <a:r>
+              <a:rPr sz="2600">
+                <a:solidFill>
+                  <a:srgbClr val="1B2430"/>
+                </a:solidFill>
+                <a:latin typeface="Segoe UI Semibold"/>
+              </a:rPr>
+              <a:t>What is left, and questions</a:t>
+            </a:r>
+          </a:p>
+        </p:txBody>
+      </p:sp>
+      <p:cxnSp>
+        <p:nvCxnSpPr>
+          <p:cNvPr id="3" name="Connector 2">
+            <a:extLst>
+              <a:ext uri="{FF2B5EF4-FFF2-40B4-BE49-F238E27FC236}">
+                <a16:creationId xmlns:a16="http://schemas.microsoft.com/office/drawing/2014/main" id="{883D0F7F-3A07-4D55-3E68-37CBD89F18AE}"/>
+              </a:ext>
+            </a:extLst>
+          </p:cNvPr>
+          <p:cNvCxnSpPr/>
+          <p:nvPr/>
+        </p:nvCxnSpPr>
+        <p:spPr>
+          <a:xfrm>
+            <a:off x="548640" y="1024128"/>
+            <a:ext cx="11094415" cy="0"/>
+          </a:xfrm>
+          <a:prstGeom prst="line">
+            <a:avLst/>
+          </a:prstGeom>
+          <a:ln w="9525">
+            <a:solidFill>
+              <a:srgbClr val="C9CED6"/>
+            </a:solidFill>
+          </a:ln>
+        </p:spPr>
+      </p:cxnSp>
+      <p:cxnSp>
+        <p:nvCxnSpPr>
+          <p:cNvPr id="4" name="Connector 3">
+            <a:extLst>
+              <a:ext uri="{FF2B5EF4-FFF2-40B4-BE49-F238E27FC236}">
+                <a16:creationId xmlns:a16="http://schemas.microsoft.com/office/drawing/2014/main" id="{EB9AD0B7-C4CD-2685-3C2D-AC5074429727}"/>
+              </a:ext>
+            </a:extLst>
+          </p:cNvPr>
+          <p:cNvCxnSpPr/>
+          <p:nvPr/>
+        </p:nvCxnSpPr>
+        <p:spPr>
+          <a:xfrm>
+            <a:off x="548640" y="1024128"/>
+            <a:ext cx="822960" cy="0"/>
+          </a:xfrm>
+          <a:prstGeom prst="line">
+            <a:avLst/>
+          </a:prstGeom>
+          <a:ln w="31750">
+            <a:solidFill>
+              <a:srgbClr val="0F6C73"/>
+            </a:solidFill>
+          </a:ln>
+        </p:spPr>
+      </p:cxnSp>
+      <p:sp>
+        <p:nvSpPr>
+          <p:cNvPr id="5" name="TextBox 4">
+            <a:extLst>
+              <a:ext uri="{FF2B5EF4-FFF2-40B4-BE49-F238E27FC236}">
+                <a16:creationId xmlns:a16="http://schemas.microsoft.com/office/drawing/2014/main" id="{C472ED79-59CA-C354-BBDB-EEAE3203324E}"/>
+              </a:ext>
+            </a:extLst>
+          </p:cNvPr>
+          <p:cNvSpPr txBox="1"/>
+          <p:nvPr/>
+        </p:nvSpPr>
+        <p:spPr>
+          <a:xfrm>
+            <a:off x="548640" y="6400800"/>
+            <a:ext cx="7315200" cy="274320"/>
+          </a:xfrm>
+          <a:prstGeom prst="rect">
+            <a:avLst/>
+          </a:prstGeom>
+          <a:noFill/>
+        </p:spPr>
+        <p:txBody>
+          <a:bodyPr wrap="square" lIns="0" tIns="0" rIns="0" bIns="0" anchor="t"/>
+          <a:lstStyle/>
+          <a:p>
+            <a:pPr algn="l">
+              <a:spcAft>
+                <a:spcPts val="0"/>
+              </a:spcAft>
+            </a:pPr>
+            <a:r>
+              <a:rPr sz="1000">
+                <a:solidFill>
+                  <a:srgbClr val="5B6675"/>
+                </a:solidFill>
+                <a:latin typeface="Segoe UI"/>
+              </a:rPr>
+              <a:t>GHCAA progress review  ·  31 October 2026</a:t>
+            </a:r>
+          </a:p>
+        </p:txBody>
+      </p:sp>
+      <p:sp>
+        <p:nvSpPr>
+          <p:cNvPr id="6" name="TextBox 5">
+            <a:extLst>
+              <a:ext uri="{FF2B5EF4-FFF2-40B4-BE49-F238E27FC236}">
+                <a16:creationId xmlns:a16="http://schemas.microsoft.com/office/drawing/2014/main" id="{7A381847-1BF7-6F8F-0505-1F286482D193}"/>
+              </a:ext>
+            </a:extLst>
+          </p:cNvPr>
+          <p:cNvSpPr txBox="1"/>
+          <p:nvPr/>
+        </p:nvSpPr>
+        <p:spPr>
+          <a:xfrm>
+            <a:off x="10271455" y="6400800"/>
+            <a:ext cx="1371600" cy="274320"/>
+          </a:xfrm>
+          <a:prstGeom prst="rect">
+            <a:avLst/>
+          </a:prstGeom>
+          <a:noFill/>
+        </p:spPr>
+        <p:txBody>
+          <a:bodyPr wrap="square" lIns="0" tIns="0" rIns="0" bIns="0" anchor="t"/>
+          <a:lstStyle/>
+          <a:p>
+            <a:pPr algn="r">
+              <a:spcAft>
+                <a:spcPts val="0"/>
+              </a:spcAft>
+            </a:pPr>
+            <a:r>
+              <a:rPr sz="1000">
+                <a:solidFill>
+                  <a:srgbClr val="5B6675"/>
+                </a:solidFill>
+                <a:latin typeface="Segoe UI"/>
+              </a:rPr>
+              <a:t>12 / 12</a:t>
+            </a:r>
+          </a:p>
+        </p:txBody>
+      </p:sp>
+      <p:sp>
+        <p:nvSpPr>
+          <p:cNvPr id="7" name="TextBox 6">
+            <a:extLst>
+              <a:ext uri="{FF2B5EF4-FFF2-40B4-BE49-F238E27FC236}">
+                <a16:creationId xmlns:a16="http://schemas.microsoft.com/office/drawing/2014/main" id="{60C919AA-48CB-1123-A60F-2803732BC7AE}"/>
+              </a:ext>
+            </a:extLst>
+          </p:cNvPr>
+          <p:cNvSpPr txBox="1"/>
+          <p:nvPr/>
+        </p:nvSpPr>
+        <p:spPr>
+          <a:xfrm>
+            <a:off x="548640" y="1280160"/>
+            <a:ext cx="5943600" cy="274320"/>
+          </a:xfrm>
+          <a:prstGeom prst="rect">
+            <a:avLst/>
+          </a:prstGeom>
+          <a:noFill/>
+        </p:spPr>
+        <p:txBody>
+          <a:bodyPr wrap="square" lIns="0" tIns="0" rIns="0" bIns="0" anchor="t"/>
+          <a:lstStyle/>
+          <a:p>
+            <a:pPr algn="l">
+              <a:spcAft>
+                <a:spcPts val="0"/>
+              </a:spcAft>
+            </a:pPr>
+            <a:r>
+              <a:rPr sz="1050">
+                <a:solidFill>
+                  <a:srgbClr val="5B6675"/>
+                </a:solidFill>
+                <a:latin typeface="Segoe UI Semibold"/>
+              </a:rPr>
+              <a:t>OPEN WORK</a:t>
+            </a:r>
+          </a:p>
+        </p:txBody>
+      </p:sp>
+      <p:cxnSp>
+        <p:nvCxnSpPr>
+          <p:cNvPr id="8" name="Connector 7">
+            <a:extLst>
+              <a:ext uri="{FF2B5EF4-FFF2-40B4-BE49-F238E27FC236}">
+                <a16:creationId xmlns:a16="http://schemas.microsoft.com/office/drawing/2014/main" id="{71CB9976-3013-8B2D-6164-2A3A0ED32420}"/>
+              </a:ext>
+            </a:extLst>
+          </p:cNvPr>
+          <p:cNvCxnSpPr/>
+          <p:nvPr/>
+        </p:nvCxnSpPr>
+        <p:spPr>
+          <a:xfrm>
+            <a:off x="548640" y="1645920"/>
+            <a:ext cx="6035039" cy="0"/>
+          </a:xfrm>
+          <a:prstGeom prst="line">
+            <a:avLst/>
+          </a:prstGeom>
+          <a:ln w="9525">
+            <a:solidFill>
+              <a:srgbClr val="C9CED6"/>
+            </a:solidFill>
+          </a:ln>
+        </p:spPr>
+      </p:cxnSp>
+      <p:sp>
+        <p:nvSpPr>
+          <p:cNvPr id="9" name="TextBox 8">
+            <a:extLst>
+              <a:ext uri="{FF2B5EF4-FFF2-40B4-BE49-F238E27FC236}">
+                <a16:creationId xmlns:a16="http://schemas.microsoft.com/office/drawing/2014/main" id="{6D50092E-1D3D-98D3-EC41-F34F824ED08B}"/>
+              </a:ext>
+            </a:extLst>
+          </p:cNvPr>
+          <p:cNvSpPr txBox="1"/>
+          <p:nvPr/>
+        </p:nvSpPr>
+        <p:spPr>
+          <a:xfrm>
+            <a:off x="548640" y="1755648"/>
+            <a:ext cx="6035040" cy="960120"/>
+          </a:xfrm>
+          <a:prstGeom prst="rect">
+            <a:avLst/>
+          </a:prstGeom>
+          <a:noFill/>
+        </p:spPr>
+        <p:txBody>
+          <a:bodyPr wrap="square" lIns="0" tIns="0" rIns="0" bIns="0" anchor="t"/>
+          <a:lstStyle/>
+          <a:p>
+            <a:pPr algn="l">
+              <a:spcAft>
+                <a:spcPts val="300"/>
+              </a:spcAft>
+            </a:pPr>
+            <a:r>
+              <a:rPr sz="1500">
+                <a:solidFill>
+                  <a:srgbClr val="1B2430"/>
+                </a:solidFill>
+                <a:latin typeface="Segoe UI Semibold"/>
+              </a:rPr>
+              <a:t>86 to do, 28 partial</a:t>
+            </a:r>
+          </a:p>
+          <a:p>
+            <a:pPr algn="l">
+              <a:spcAft>
+                <a:spcPts val="0"/>
+              </a:spcAft>
+            </a:pPr>
+            <a:r>
+              <a:rPr sz="1250">
+                <a:solidFill>
+                  <a:srgbClr val="5B6675"/>
+                </a:solidFill>
+                <a:latin typeface="Segoe UI"/>
+              </a:rPr>
+              <a:t>in the tracker; finished work moves to an archive, so these counts understate progress</a:t>
+            </a:r>
+          </a:p>
+        </p:txBody>
+      </p:sp>
+      <p:cxnSp>
+        <p:nvCxnSpPr>
+          <p:cNvPr id="10" name="Connector 9">
+            <a:extLst>
+              <a:ext uri="{FF2B5EF4-FFF2-40B4-BE49-F238E27FC236}">
+                <a16:creationId xmlns:a16="http://schemas.microsoft.com/office/drawing/2014/main" id="{17CF9439-1B27-DF02-CD15-AFA190533519}"/>
+              </a:ext>
+            </a:extLst>
+          </p:cNvPr>
+          <p:cNvCxnSpPr/>
+          <p:nvPr/>
+        </p:nvCxnSpPr>
+        <p:spPr>
+          <a:xfrm>
+            <a:off x="548640" y="2834640"/>
+            <a:ext cx="6035039" cy="0"/>
+          </a:xfrm>
+          <a:prstGeom prst="line">
+            <a:avLst/>
+          </a:prstGeom>
+          <a:ln w="9525">
+            <a:solidFill>
+              <a:srgbClr val="C9CED6"/>
+            </a:solidFill>
+          </a:ln>
+        </p:spPr>
+      </p:cxnSp>
+      <p:sp>
+        <p:nvSpPr>
+          <p:cNvPr id="11" name="TextBox 10">
+            <a:extLst>
+              <a:ext uri="{FF2B5EF4-FFF2-40B4-BE49-F238E27FC236}">
+                <a16:creationId xmlns:a16="http://schemas.microsoft.com/office/drawing/2014/main" id="{91138095-FC21-78C1-8FDF-E9917E90481F}"/>
+              </a:ext>
+            </a:extLst>
+          </p:cNvPr>
+          <p:cNvSpPr txBox="1"/>
+          <p:nvPr/>
+        </p:nvSpPr>
+        <p:spPr>
+          <a:xfrm>
+            <a:off x="548640" y="2944368"/>
+            <a:ext cx="6035040" cy="960120"/>
+          </a:xfrm>
+          <a:prstGeom prst="rect">
+            <a:avLst/>
+          </a:prstGeom>
+          <a:noFill/>
+        </p:spPr>
+        <p:txBody>
+          <a:bodyPr wrap="square" lIns="0" tIns="0" rIns="0" bIns="0" anchor="t"/>
+          <a:lstStyle/>
+          <a:p>
+            <a:pPr algn="l">
+              <a:spcAft>
+                <a:spcPts val="300"/>
+              </a:spcAft>
+            </a:pPr>
+            <a:r>
+              <a:rPr sz="1500">
+                <a:solidFill>
+                  <a:srgbClr val="1B2430"/>
+                </a:solidFill>
+                <a:latin typeface="Segoe UI Semibold"/>
+              </a:rPr>
+              <a:t>Waiting on the election calendar</a:t>
+            </a:r>
+          </a:p>
+          <a:p>
+            <a:pPr algn="l">
+              <a:spcAft>
+                <a:spcPts val="0"/>
+              </a:spcAft>
+            </a:pPr>
+            <a:r>
+              <a:rPr sz="1250">
+                <a:solidFill>
+                  <a:srgbClr val="5B6675"/>
+                </a:solidFill>
+                <a:latin typeface="Segoe UI"/>
+              </a:rPr>
+              <a:t>phone checks on a real device and two follow-up fixes</a:t>
+            </a:r>
+          </a:p>
+        </p:txBody>
+      </p:sp>
+      <p:cxnSp>
+        <p:nvCxnSpPr>
+          <p:cNvPr id="12" name="Connector 11">
+            <a:extLst>
+              <a:ext uri="{FF2B5EF4-FFF2-40B4-BE49-F238E27FC236}">
+                <a16:creationId xmlns:a16="http://schemas.microsoft.com/office/drawing/2014/main" id="{242A82BF-6AD1-6AF6-EB6D-7733D99EC12D}"/>
+              </a:ext>
+            </a:extLst>
+          </p:cNvPr>
+          <p:cNvCxnSpPr/>
+          <p:nvPr/>
+        </p:nvCxnSpPr>
+        <p:spPr>
+          <a:xfrm>
+            <a:off x="548640" y="4023360"/>
+            <a:ext cx="6035039" cy="0"/>
+          </a:xfrm>
+          <a:prstGeom prst="line">
+            <a:avLst/>
+          </a:prstGeom>
+          <a:ln w="9525">
+            <a:solidFill>
+              <a:srgbClr val="C9CED6"/>
+            </a:solidFill>
+          </a:ln>
+        </p:spPr>
+      </p:cxnSp>
+      <p:sp>
+        <p:nvSpPr>
+          <p:cNvPr id="13" name="TextBox 12">
+            <a:extLst>
+              <a:ext uri="{FF2B5EF4-FFF2-40B4-BE49-F238E27FC236}">
+                <a16:creationId xmlns:a16="http://schemas.microsoft.com/office/drawing/2014/main" id="{1A53F283-D11A-EB17-6131-30E6CCFE6D1A}"/>
+              </a:ext>
+            </a:extLst>
+          </p:cNvPr>
+          <p:cNvSpPr txBox="1"/>
+          <p:nvPr/>
+        </p:nvSpPr>
+        <p:spPr>
+          <a:xfrm>
+            <a:off x="548640" y="4133088"/>
+            <a:ext cx="6035040" cy="960120"/>
+          </a:xfrm>
+          <a:prstGeom prst="rect">
+            <a:avLst/>
+          </a:prstGeom>
+          <a:noFill/>
+        </p:spPr>
+        <p:txBody>
+          <a:bodyPr wrap="square" lIns="0" tIns="0" rIns="0" bIns="0" anchor="t"/>
+          <a:lstStyle/>
+          <a:p>
+            <a:pPr algn="l">
+              <a:spcAft>
+                <a:spcPts val="300"/>
+              </a:spcAft>
+            </a:pPr>
+            <a:r>
+              <a:rPr sz="1500">
+                <a:solidFill>
+                  <a:srgbClr val="1B2430"/>
+                </a:solidFill>
+                <a:latin typeface="Segoe UI Semibold"/>
+              </a:rPr>
+              <a:t>First live election</a:t>
+            </a:r>
+          </a:p>
+          <a:p>
+            <a:pPr algn="l">
+              <a:spcAft>
+                <a:spcPts val="0"/>
+              </a:spcAft>
+            </a:pPr>
+            <a:r>
+              <a:rPr sz="1250">
+                <a:solidFill>
+                  <a:srgbClr val="5B6675"/>
+                </a:solidFill>
+                <a:latin typeface="Segoe UI"/>
+              </a:rPr>
+              <a:t>then a report on how it ran, set against the quality scenarios</a:t>
+            </a:r>
+          </a:p>
+        </p:txBody>
+      </p:sp>
+      <p:sp>
+        <p:nvSpPr>
+          <p:cNvPr id="14" name="Rectangle 13">
+            <a:extLst>
+              <a:ext uri="{FF2B5EF4-FFF2-40B4-BE49-F238E27FC236}">
+                <a16:creationId xmlns:a16="http://schemas.microsoft.com/office/drawing/2014/main" id="{A07E46DA-E10B-27A3-EB7E-96B6CA01CE80}"/>
+              </a:ext>
+            </a:extLst>
+          </p:cNvPr>
+          <p:cNvSpPr/>
+          <p:nvPr/>
+        </p:nvSpPr>
+        <p:spPr>
+          <a:xfrm>
+            <a:off x="7315200" y="1325880"/>
+            <a:ext cx="4327855" cy="4846320"/>
+          </a:xfrm>
+          <a:prstGeom prst="rect">
+            <a:avLst/>
+          </a:prstGeom>
+          <a:solidFill>
+            <a:srgbClr val="F3F4F6"/>
+          </a:solidFill>
+          <a:ln>
+            <a:noFill/>
+          </a:ln>
+        </p:spPr>
+        <p:txBody>
+          <a:bodyPr wrap="square" lIns="411480" rIns="411480" rtlCol="0" anchor="ctr"/>
+          <a:lstStyle/>
+          <a:p>
+            <a:pPr algn="l">
+              <a:spcAft>
+                <a:spcPts val="1000"/>
+              </a:spcAft>
+            </a:pPr>
+            <a:r>
+              <a:rPr sz="4000">
+                <a:solidFill>
+                  <a:srgbClr val="1B2430"/>
+                </a:solidFill>
+                <a:latin typeface="Segoe UI Semibold"/>
+              </a:rPr>
+              <a:t>Questions</a:t>
+            </a:r>
+          </a:p>
+          <a:p>
+            <a:pPr algn="l">
+              <a:spcAft>
+                <a:spcPts val="2600"/>
+              </a:spcAft>
+            </a:pPr>
+            <a:r>
+              <a:rPr sz="2000">
+                <a:solidFill>
+                  <a:srgbClr val="5B6675"/>
+                </a:solidFill>
+                <a:latin typeface="Segoe UI"/>
+              </a:rPr>
+              <a:t>Thank you</a:t>
+            </a:r>
+          </a:p>
+          <a:p>
+            <a:pPr algn="l">
+              <a:spcAft>
+                <a:spcPts val="300"/>
+              </a:spcAft>
+            </a:pPr>
+            <a:r>
+              <a:rPr sz="1050">
+                <a:solidFill>
+                  <a:srgbClr val="0F6C73"/>
+                </a:solidFill>
+                <a:latin typeface="Segoe UI Semibold"/>
+              </a:rPr>
+              <a:t>SOURCE CODE</a:t>
+            </a:r>
+          </a:p>
+          <a:p>
+            <a:pPr algn="l">
+              <a:spcAft>
+                <a:spcPts val="0"/>
+              </a:spcAft>
+            </a:pPr>
+            <a:r>
+              <a:rPr sz="1400">
+                <a:solidFill>
+                  <a:srgbClr val="1B2430"/>
+                </a:solidFill>
+                <a:latin typeface="Segoe UI"/>
+              </a:rPr>
+              <a:t>github.com/shalin-rahman/GHCAA</a:t>
+            </a:r>
+          </a:p>
+        </p:txBody>
+      </p:sp>
+    </p:spTree>
+    <p:extLst>
+      <p:ext uri="{BB962C8B-B14F-4D97-AF65-F5344CB8AC3E}">
+        <p14:creationId xmlns:p14="http://schemas.microsoft.com/office/powerpoint/2010/main" val="695071669"/>
+      </p:ext>
+    </p:extLst>
+  </p:cSld>
+  <p:clrMapOvr>
+    <a:masterClrMapping/>
+  </p:clrMapOvr>
+</p:sld>
+</file>
+
 <file path=ppt/slides/slide2.xml><?xml version="1.0" encoding="utf-8"?>
-<p:sld xmlns:a="http://schemas.openxmlformats.org/drawingml/2006/main" xmlns:p="http://schemas.openxmlformats.org/presentationml/2006/main" xmlns:r="http://schemas.openxmlformats.org/officeDocument/2006/relationships">
+<p:sld xmlns:a="http://schemas.openxmlformats.org/drawingml/2006/main" xmlns:r="http://schemas.openxmlformats.org/officeDocument/2006/relationships" xmlns:p="http://schemas.openxmlformats.org/presentationml/2006/main">
   <p:cSld>
     <p:spTree>
       <p:nvGrpSpPr>
@@ -7597,7 +9510,14 @@
         <p:cNvGrpSpPr/>
         <p:nvPr/>
       </p:nvGrpSpPr>
-      <p:grpSpPr/>
+      <p:grpSpPr>
+        <a:xfrm>
+          <a:off x="0" y="0"/>
+          <a:ext cx="0" cy="0"/>
+          <a:chOff x="0" y="0"/>
+          <a:chExt cx="0" cy="0"/>
+        </a:xfrm>
+      </p:grpSpPr>
       <p:sp>
         <p:nvSpPr>
           <p:cNvPr id="2" name="TextBox 1"/>
@@ -7615,7 +9535,7 @@
           <a:noFill/>
         </p:spPr>
         <p:txBody>
-          <a:bodyPr wrap="square" anchor="b" lIns="0" rIns="0" tIns="0" bIns="0"/>
+          <a:bodyPr wrap="square" lIns="0" tIns="0" rIns="0" bIns="0" anchor="b"/>
           <a:lstStyle/>
           <a:p>
             <a:pPr algn="l">
@@ -7694,7 +9614,7 @@
           <a:noFill/>
         </p:spPr>
         <p:txBody>
-          <a:bodyPr wrap="square" anchor="t" lIns="0" rIns="0" tIns="0" bIns="0"/>
+          <a:bodyPr wrap="square" lIns="0" tIns="0" rIns="0" bIns="0" anchor="t"/>
           <a:lstStyle/>
           <a:p>
             <a:pPr algn="l">
@@ -7731,7 +9651,7 @@
           <a:noFill/>
         </p:spPr>
         <p:txBody>
-          <a:bodyPr wrap="square" anchor="t" lIns="0" rIns="0" tIns="0" bIns="0"/>
+          <a:bodyPr wrap="square" lIns="0" tIns="0" rIns="0" bIns="0" anchor="t"/>
           <a:lstStyle/>
           <a:p>
             <a:pPr algn="r">
@@ -7789,7 +9709,7 @@
           <a:noFill/>
         </p:spPr>
         <p:txBody>
-          <a:bodyPr wrap="square" anchor="t" lIns="0" rIns="0" tIns="0" bIns="0"/>
+          <a:bodyPr wrap="square" lIns="0" tIns="0" rIns="0" bIns="0" anchor="t"/>
           <a:lstStyle/>
           <a:p>
             <a:pPr algn="l">
@@ -7826,7 +9746,7 @@
           <a:noFill/>
         </p:spPr>
         <p:txBody>
-          <a:bodyPr wrap="square" anchor="t" lIns="0" rIns="0" tIns="0" bIns="0"/>
+          <a:bodyPr wrap="square" lIns="0" tIns="0" rIns="0" bIns="0" anchor="t"/>
           <a:lstStyle/>
           <a:p>
             <a:pPr algn="l">
@@ -7884,7 +9804,7 @@
           <a:noFill/>
         </p:spPr>
         <p:txBody>
-          <a:bodyPr wrap="square" anchor="t" lIns="0" rIns="0" tIns="0" bIns="0"/>
+          <a:bodyPr wrap="square" lIns="0" tIns="0" rIns="0" bIns="0" anchor="t"/>
           <a:lstStyle/>
           <a:p>
             <a:pPr algn="l">
@@ -7921,7 +9841,7 @@
           <a:noFill/>
         </p:spPr>
         <p:txBody>
-          <a:bodyPr wrap="square" anchor="t" lIns="0" rIns="0" tIns="0" bIns="0"/>
+          <a:bodyPr wrap="square" lIns="0" tIns="0" rIns="0" bIns="0" anchor="t"/>
           <a:lstStyle/>
           <a:p>
             <a:pPr algn="l">
@@ -7979,7 +9899,7 @@
           <a:noFill/>
         </p:spPr>
         <p:txBody>
-          <a:bodyPr wrap="square" anchor="t" lIns="0" rIns="0" tIns="0" bIns="0"/>
+          <a:bodyPr wrap="square" lIns="0" tIns="0" rIns="0" bIns="0" anchor="t"/>
           <a:lstStyle/>
           <a:p>
             <a:pPr algn="l">
@@ -8016,7 +9936,7 @@
           <a:noFill/>
         </p:spPr>
         <p:txBody>
-          <a:bodyPr wrap="square" anchor="t" lIns="0" rIns="0" tIns="0" bIns="0"/>
+          <a:bodyPr wrap="square" lIns="0" tIns="0" rIns="0" bIns="0" anchor="t"/>
           <a:lstStyle/>
           <a:p>
             <a:pPr algn="l">
@@ -8074,7 +9994,7 @@
           <a:noFill/>
         </p:spPr>
         <p:txBody>
-          <a:bodyPr wrap="square" anchor="t" lIns="0" rIns="0" tIns="0" bIns="0"/>
+          <a:bodyPr wrap="square" lIns="0" tIns="0" rIns="0" bIns="0" anchor="t"/>
           <a:lstStyle/>
           <a:p>
             <a:pPr algn="l">
@@ -8111,7 +10031,7 @@
           <a:noFill/>
         </p:spPr>
         <p:txBody>
-          <a:bodyPr wrap="square" anchor="t" lIns="0" rIns="0" tIns="0" bIns="0"/>
+          <a:bodyPr wrap="square" lIns="0" tIns="0" rIns="0" bIns="0" anchor="t"/>
           <a:lstStyle/>
           <a:p>
             <a:pPr algn="l">
@@ -8169,7 +10089,7 @@
           <a:noFill/>
         </p:spPr>
         <p:txBody>
-          <a:bodyPr wrap="square" anchor="t" lIns="0" rIns="0" tIns="0" bIns="0"/>
+          <a:bodyPr wrap="square" lIns="0" tIns="0" rIns="0" bIns="0" anchor="t"/>
           <a:lstStyle/>
           <a:p>
             <a:pPr algn="l">
@@ -8206,7 +10126,7 @@
           <a:noFill/>
         </p:spPr>
         <p:txBody>
-          <a:bodyPr wrap="square" anchor="t" lIns="0" rIns="0" tIns="0" bIns="0"/>
+          <a:bodyPr wrap="square" lIns="0" tIns="0" rIns="0" bIns="0" anchor="t"/>
           <a:lstStyle/>
           <a:p>
             <a:pPr algn="l">
@@ -8264,7 +10184,7 @@
           <a:noFill/>
         </p:spPr>
         <p:txBody>
-          <a:bodyPr wrap="square" anchor="t" lIns="0" rIns="0" tIns="0" bIns="0"/>
+          <a:bodyPr wrap="square" lIns="0" tIns="0" rIns="0" bIns="0" anchor="t"/>
           <a:lstStyle/>
           <a:p>
             <a:pPr algn="l">
@@ -8301,7 +10221,7 @@
           <a:noFill/>
         </p:spPr>
         <p:txBody>
-          <a:bodyPr wrap="square" anchor="t" lIns="0" rIns="0" tIns="0" bIns="0"/>
+          <a:bodyPr wrap="square" lIns="0" tIns="0" rIns="0" bIns="0" anchor="t"/>
           <a:lstStyle/>
           <a:p>
             <a:pPr algn="l">
@@ -8359,7 +10279,7 @@
           <a:noFill/>
         </p:spPr>
         <p:txBody>
-          <a:bodyPr wrap="square" anchor="t" lIns="0" rIns="0" tIns="0" bIns="0"/>
+          <a:bodyPr wrap="square" lIns="0" tIns="0" rIns="0" bIns="0" anchor="t"/>
           <a:lstStyle/>
           <a:p>
             <a:pPr algn="l">
@@ -8405,7 +10325,7 @@
           <a:noFill/>
         </p:spPr>
         <p:txBody>
-          <a:bodyPr wrap="square" anchor="t" lIns="0" rIns="0" tIns="0" bIns="0"/>
+          <a:bodyPr wrap="square" lIns="0" tIns="0" rIns="0" bIns="0" anchor="t"/>
           <a:lstStyle/>
           <a:p>
             <a:pPr algn="l">
@@ -8443,7 +10363,7 @@
 </file>
 
 <file path=ppt/slides/slide3.xml><?xml version="1.0" encoding="utf-8"?>
-<p:sld xmlns:a="http://schemas.openxmlformats.org/drawingml/2006/main" xmlns:p="http://schemas.openxmlformats.org/presentationml/2006/main" xmlns:r="http://schemas.openxmlformats.org/officeDocument/2006/relationships">
+<p:sld xmlns:a="http://schemas.openxmlformats.org/drawingml/2006/main" xmlns:r="http://schemas.openxmlformats.org/officeDocument/2006/relationships" xmlns:p="http://schemas.openxmlformats.org/presentationml/2006/main">
   <p:cSld>
     <p:spTree>
       <p:nvGrpSpPr>
@@ -8451,7 +10371,14 @@
         <p:cNvGrpSpPr/>
         <p:nvPr/>
       </p:nvGrpSpPr>
-      <p:grpSpPr/>
+      <p:grpSpPr>
+        <a:xfrm>
+          <a:off x="0" y="0"/>
+          <a:ext cx="0" cy="0"/>
+          <a:chOff x="0" y="0"/>
+          <a:chExt cx="0" cy="0"/>
+        </a:xfrm>
+      </p:grpSpPr>
       <p:sp>
         <p:nvSpPr>
           <p:cNvPr id="2" name="TextBox 1"/>
@@ -8469,7 +10396,7 @@
           <a:noFill/>
         </p:spPr>
         <p:txBody>
-          <a:bodyPr wrap="square" anchor="b" lIns="0" rIns="0" tIns="0" bIns="0"/>
+          <a:bodyPr wrap="square" lIns="0" tIns="0" rIns="0" bIns="0" anchor="b"/>
           <a:lstStyle/>
           <a:p>
             <a:pPr algn="l">
@@ -8548,7 +10475,7 @@
           <a:noFill/>
         </p:spPr>
         <p:txBody>
-          <a:bodyPr wrap="square" anchor="t" lIns="0" rIns="0" tIns="0" bIns="0"/>
+          <a:bodyPr wrap="square" lIns="0" tIns="0" rIns="0" bIns="0" anchor="t"/>
           <a:lstStyle/>
           <a:p>
             <a:pPr algn="l">
@@ -8585,7 +10512,7 @@
           <a:noFill/>
         </p:spPr>
         <p:txBody>
-          <a:bodyPr wrap="square" anchor="t" lIns="0" rIns="0" tIns="0" bIns="0"/>
+          <a:bodyPr wrap="square" lIns="0" tIns="0" rIns="0" bIns="0" anchor="t"/>
           <a:lstStyle/>
           <a:p>
             <a:pPr algn="r">
@@ -8622,7 +10549,7 @@
           <a:noFill/>
         </p:spPr>
         <p:txBody>
-          <a:bodyPr wrap="square" anchor="t" lIns="0" rIns="0" tIns="0" bIns="0"/>
+          <a:bodyPr wrap="square" lIns="0" tIns="0" rIns="0" bIns="0" anchor="t"/>
           <a:lstStyle/>
           <a:p>
             <a:pPr algn="l">
@@ -8664,7 +10591,7 @@
           </a:ln>
         </p:spPr>
         <p:txBody>
-          <a:bodyPr rtlCol="0" anchor="ctr" wrap="square" lIns="109728" rIns="109728"/>
+          <a:bodyPr wrap="square" lIns="109728" rIns="109728" rtlCol="0" anchor="ctr"/>
           <a:lstStyle/>
           <a:p>
             <a:pPr algn="l">
@@ -8738,7 +10665,7 @@
           </a:ln>
         </p:spPr>
         <p:txBody>
-          <a:bodyPr rtlCol="0" anchor="ctr" wrap="square" lIns="109728" rIns="109728"/>
+          <a:bodyPr wrap="square" lIns="109728" rIns="109728" rtlCol="0" anchor="ctr"/>
           <a:lstStyle/>
           <a:p>
             <a:pPr algn="l">
@@ -8812,7 +10739,7 @@
           </a:ln>
         </p:spPr>
         <p:txBody>
-          <a:bodyPr rtlCol="0" anchor="ctr" wrap="square" lIns="109728" rIns="109728"/>
+          <a:bodyPr wrap="square" lIns="109728" rIns="109728" rtlCol="0" anchor="ctr"/>
           <a:lstStyle/>
           <a:p>
             <a:pPr algn="l">
@@ -8886,10 +10813,11 @@
           </a:ln>
         </p:spPr>
         <p:txBody>
-          <a:bodyPr rtlCol="0" anchor="ctr" wrap="square" lIns="73152" rIns="73152"/>
+          <a:bodyPr wrap="square" lIns="73152" rIns="73152" rtlCol="0" anchor="ctr"/>
           <a:lstStyle/>
           <a:p>
             <a:pPr algn="ctr"/>
+            <a:endParaRPr/>
           </a:p>
         </p:txBody>
       </p:sp>
@@ -8910,7 +10838,7 @@
           <a:noFill/>
         </p:spPr>
         <p:txBody>
-          <a:bodyPr wrap="square" anchor="t" lIns="0" rIns="0" tIns="0" bIns="0"/>
+          <a:bodyPr wrap="square" lIns="0" tIns="0" rIns="0" bIns="0" anchor="t"/>
           <a:lstStyle/>
           <a:p>
             <a:pPr algn="l">
@@ -8952,7 +10880,7 @@
           </a:ln>
         </p:spPr>
         <p:txBody>
-          <a:bodyPr rtlCol="0" anchor="ctr" wrap="square" lIns="109728" rIns="109728"/>
+          <a:bodyPr wrap="square" lIns="109728" rIns="109728" rtlCol="0" anchor="ctr"/>
           <a:lstStyle/>
           <a:p>
             <a:pPr algn="l">
@@ -9003,7 +10931,7 @@
           </a:ln>
         </p:spPr>
         <p:txBody>
-          <a:bodyPr rtlCol="0" anchor="ctr" wrap="square" lIns="109728" rIns="109728"/>
+          <a:bodyPr wrap="square" lIns="109728" rIns="109728" rtlCol="0" anchor="ctr"/>
           <a:lstStyle/>
           <a:p>
             <a:pPr algn="l">
@@ -9054,7 +10982,7 @@
           </a:ln>
         </p:spPr>
         <p:txBody>
-          <a:bodyPr rtlCol="0" anchor="ctr" wrap="square" lIns="109728" rIns="109728"/>
+          <a:bodyPr wrap="square" lIns="109728" rIns="109728" rtlCol="0" anchor="ctr"/>
           <a:lstStyle/>
           <a:p>
             <a:pPr algn="l">
@@ -9107,7 +11035,7 @@
           </a:ln>
         </p:spPr>
         <p:txBody>
-          <a:bodyPr rtlCol="0" anchor="ctr" wrap="square" lIns="109728" rIns="109728"/>
+          <a:bodyPr wrap="square" lIns="109728" rIns="109728" rtlCol="0" anchor="ctr"/>
           <a:lstStyle/>
           <a:p>
             <a:pPr algn="l">
@@ -9228,7 +11156,7 @@
           <a:noFill/>
         </p:spPr>
         <p:txBody>
-          <a:bodyPr wrap="square" anchor="t" lIns="0" rIns="0" tIns="0" bIns="0"/>
+          <a:bodyPr wrap="square" lIns="0" tIns="0" rIns="0" bIns="0" anchor="t"/>
           <a:lstStyle/>
           <a:p>
             <a:pPr algn="l">
@@ -9287,7 +11215,7 @@
           <a:noFill/>
         </p:spPr>
         <p:txBody>
-          <a:bodyPr wrap="square" anchor="t" lIns="0" rIns="0" tIns="0" bIns="0"/>
+          <a:bodyPr wrap="square" lIns="0" tIns="0" rIns="0" bIns="0" anchor="t"/>
           <a:lstStyle/>
           <a:p>
             <a:pPr algn="ctr">
@@ -9347,7 +11275,7 @@
           <a:noFill/>
         </p:spPr>
         <p:txBody>
-          <a:bodyPr wrap="square" anchor="t" lIns="0" rIns="0" tIns="0" bIns="0"/>
+          <a:bodyPr wrap="square" lIns="0" tIns="0" rIns="0" bIns="0" anchor="t"/>
           <a:lstStyle/>
           <a:p>
             <a:pPr algn="ctr">
@@ -9407,7 +11335,7 @@
           <a:noFill/>
         </p:spPr>
         <p:txBody>
-          <a:bodyPr wrap="square" anchor="t" lIns="0" rIns="0" tIns="0" bIns="0"/>
+          <a:bodyPr wrap="square" lIns="0" tIns="0" rIns="0" bIns="0" anchor="t"/>
           <a:lstStyle/>
           <a:p>
             <a:pPr algn="ctr">
@@ -9445,7 +11373,7 @@
           <a:noFill/>
         </p:spPr>
         <p:txBody>
-          <a:bodyPr wrap="square" anchor="t" lIns="0" rIns="0" tIns="0" bIns="0"/>
+          <a:bodyPr wrap="square" lIns="0" tIns="0" rIns="0" bIns="0" anchor="t"/>
           <a:lstStyle/>
           <a:p>
             <a:pPr algn="l">
@@ -9487,7 +11415,7 @@
           </a:ln>
         </p:spPr>
         <p:txBody>
-          <a:bodyPr rtlCol="0" anchor="ctr" wrap="square" lIns="109728" rIns="109728"/>
+          <a:bodyPr wrap="square" lIns="109728" rIns="109728" rtlCol="0" anchor="ctr"/>
           <a:lstStyle/>
           <a:p>
             <a:pPr algn="l">
@@ -9570,7 +11498,7 @@
           </a:ln>
         </p:spPr>
         <p:txBody>
-          <a:bodyPr rtlCol="0" anchor="ctr" wrap="square" lIns="109728" rIns="109728"/>
+          <a:bodyPr wrap="square" lIns="109728" rIns="109728" rtlCol="0" anchor="ctr"/>
           <a:lstStyle/>
           <a:p>
             <a:pPr algn="l">
@@ -9653,7 +11581,7 @@
           </a:ln>
         </p:spPr>
         <p:txBody>
-          <a:bodyPr rtlCol="0" anchor="ctr" wrap="square" lIns="109728" rIns="109728"/>
+          <a:bodyPr wrap="square" lIns="109728" rIns="109728" rtlCol="0" anchor="ctr"/>
           <a:lstStyle/>
           <a:p>
             <a:pPr algn="l">
@@ -9736,7 +11664,7 @@
           </a:ln>
         </p:spPr>
         <p:txBody>
-          <a:bodyPr rtlCol="0" anchor="ctr" wrap="square" lIns="109728" rIns="109728"/>
+          <a:bodyPr wrap="square" lIns="109728" rIns="109728" rtlCol="0" anchor="ctr"/>
           <a:lstStyle/>
           <a:p>
             <a:pPr algn="l">
@@ -9814,7 +11742,7 @@
           <a:noFill/>
         </p:spPr>
         <p:txBody>
-          <a:bodyPr wrap="square" anchor="t" lIns="0" rIns="0" tIns="0" bIns="0"/>
+          <a:bodyPr wrap="square" lIns="0" tIns="0" rIns="0" bIns="0" anchor="t"/>
           <a:lstStyle/>
           <a:p>
             <a:pPr algn="l">
@@ -9843,7 +11771,7 @@
 </file>
 
 <file path=ppt/slides/slide4.xml><?xml version="1.0" encoding="utf-8"?>
-<p:sld xmlns:a="http://schemas.openxmlformats.org/drawingml/2006/main" xmlns:p="http://schemas.openxmlformats.org/presentationml/2006/main" xmlns:r="http://schemas.openxmlformats.org/officeDocument/2006/relationships">
+<p:sld xmlns:a="http://schemas.openxmlformats.org/drawingml/2006/main" xmlns:r="http://schemas.openxmlformats.org/officeDocument/2006/relationships" xmlns:p="http://schemas.openxmlformats.org/presentationml/2006/main">
   <p:cSld>
     <p:spTree>
       <p:nvGrpSpPr>
@@ -9851,7 +11779,14 @@
         <p:cNvGrpSpPr/>
         <p:nvPr/>
       </p:nvGrpSpPr>
-      <p:grpSpPr/>
+      <p:grpSpPr>
+        <a:xfrm>
+          <a:off x="0" y="0"/>
+          <a:ext cx="0" cy="0"/>
+          <a:chOff x="0" y="0"/>
+          <a:chExt cx="0" cy="0"/>
+        </a:xfrm>
+      </p:grpSpPr>
       <p:sp>
         <p:nvSpPr>
           <p:cNvPr id="2" name="TextBox 1"/>
@@ -9869,7 +11804,7 @@
           <a:noFill/>
         </p:spPr>
         <p:txBody>
-          <a:bodyPr wrap="square" anchor="b" lIns="0" rIns="0" tIns="0" bIns="0"/>
+          <a:bodyPr wrap="square" lIns="0" tIns="0" rIns="0" bIns="0" anchor="b"/>
           <a:lstStyle/>
           <a:p>
             <a:pPr algn="l">
@@ -9948,7 +11883,7 @@
           <a:noFill/>
         </p:spPr>
         <p:txBody>
-          <a:bodyPr wrap="square" anchor="t" lIns="0" rIns="0" tIns="0" bIns="0"/>
+          <a:bodyPr wrap="square" lIns="0" tIns="0" rIns="0" bIns="0" anchor="t"/>
           <a:lstStyle/>
           <a:p>
             <a:pPr algn="l">
@@ -9985,7 +11920,7 @@
           <a:noFill/>
         </p:spPr>
         <p:txBody>
-          <a:bodyPr wrap="square" anchor="t" lIns="0" rIns="0" tIns="0" bIns="0"/>
+          <a:bodyPr wrap="square" lIns="0" tIns="0" rIns="0" bIns="0" anchor="t"/>
           <a:lstStyle/>
           <a:p>
             <a:pPr algn="r">
@@ -10022,7 +11957,7 @@
           <a:noFill/>
         </p:spPr>
         <p:txBody>
-          <a:bodyPr wrap="square" anchor="t" lIns="0" rIns="0" tIns="0" bIns="0"/>
+          <a:bodyPr wrap="square" lIns="0" tIns="0" rIns="0" bIns="0" anchor="t"/>
           <a:lstStyle/>
           <a:p>
             <a:pPr algn="l">
@@ -10064,7 +11999,7 @@
           </a:ln>
         </p:spPr>
         <p:txBody>
-          <a:bodyPr rtlCol="0" anchor="t" wrap="square"/>
+          <a:bodyPr wrap="square" rtlCol="0" anchor="t"/>
           <a:lstStyle/>
           <a:p>
             <a:pPr algn="l">
@@ -10154,7 +12089,7 @@
           </a:ln>
         </p:spPr>
         <p:txBody>
-          <a:bodyPr rtlCol="0" anchor="t" wrap="square"/>
+          <a:bodyPr wrap="square" rtlCol="0" anchor="t"/>
           <a:lstStyle/>
           <a:p>
             <a:pPr algn="l">
@@ -10269,7 +12204,7 @@
           </a:ln>
         </p:spPr>
         <p:txBody>
-          <a:bodyPr rtlCol="0" anchor="t" wrap="square"/>
+          <a:bodyPr wrap="square" rtlCol="0" anchor="t"/>
           <a:lstStyle/>
           <a:p>
             <a:pPr algn="l">
@@ -10384,7 +12319,7 @@
           </a:ln>
         </p:spPr>
         <p:txBody>
-          <a:bodyPr rtlCol="0" anchor="t" wrap="square"/>
+          <a:bodyPr wrap="square" rtlCol="0" anchor="t"/>
           <a:lstStyle/>
           <a:p>
             <a:pPr algn="l">
@@ -10499,7 +12434,7 @@
           </a:ln>
         </p:spPr>
         <p:txBody>
-          <a:bodyPr rtlCol="0" anchor="t" wrap="square"/>
+          <a:bodyPr wrap="square" rtlCol="0" anchor="t"/>
           <a:lstStyle/>
           <a:p>
             <a:pPr algn="l">
@@ -10614,7 +12549,7 @@
           </a:ln>
         </p:spPr>
         <p:txBody>
-          <a:bodyPr rtlCol="0" anchor="t" wrap="square"/>
+          <a:bodyPr wrap="square" rtlCol="0" anchor="t"/>
           <a:lstStyle/>
           <a:p>
             <a:pPr algn="l">
@@ -10724,7 +12659,7 @@
           <a:noFill/>
         </p:spPr>
         <p:txBody>
-          <a:bodyPr wrap="square" anchor="t" lIns="0" rIns="0" tIns="0" bIns="0"/>
+          <a:bodyPr wrap="square" lIns="0" tIns="0" rIns="0" bIns="0" anchor="t"/>
           <a:lstStyle/>
           <a:p>
             <a:pPr algn="l">
@@ -10763,13 +12698,25 @@
                 <a:tableStyleId>{2D5ABB26-0587-4C30-8999-92F81FD0307C}</a:tableStyleId>
               </a:tblPr>
               <a:tblGrid>
-                <a:gridCol w="3246120"/>
-                <a:gridCol w="3749039"/>
+                <a:gridCol w="3246120">
+                  <a:extLst>
+                    <a:ext uri="{9D8B030D-6E8A-4147-A177-3AD203B41FA5}">
+                      <a16:colId xmlns:a16="http://schemas.microsoft.com/office/drawing/2014/main" val="20000"/>
+                    </a:ext>
+                  </a:extLst>
+                </a:gridCol>
+                <a:gridCol w="3749039">
+                  <a:extLst>
+                    <a:ext uri="{9D8B030D-6E8A-4147-A177-3AD203B41FA5}">
+                      <a16:colId xmlns:a16="http://schemas.microsoft.com/office/drawing/2014/main" val="20001"/>
+                    </a:ext>
+                  </a:extLst>
+                </a:gridCol>
               </a:tblGrid>
               <a:tr h="329184">
                 <a:tc>
                   <a:txBody>
-                    <a:bodyPr wrap="square"/>
+                    <a:bodyPr/>
                     <a:lstStyle/>
                     <a:p>
                       <a:r>
@@ -10805,7 +12752,7 @@
                 </a:tc>
                 <a:tc>
                   <a:txBody>
-                    <a:bodyPr wrap="square"/>
+                    <a:bodyPr/>
                     <a:lstStyle/>
                     <a:p>
                       <a:r>
@@ -10839,11 +12786,16 @@
                     </a:solidFill>
                   </a:tcPr>
                 </a:tc>
+                <a:extLst>
+                  <a:ext uri="{0D108BD9-81ED-4DB2-BD59-A6C34878D82A}">
+                    <a16:rowId xmlns:a16="http://schemas.microsoft.com/office/drawing/2014/main" val="10000"/>
+                  </a:ext>
+                </a:extLst>
               </a:tr>
               <a:tr h="420624">
                 <a:tc>
                   <a:txBody>
-                    <a:bodyPr wrap="square"/>
+                    <a:bodyPr/>
                     <a:lstStyle/>
                     <a:p>
                       <a:r>
@@ -10857,15 +12809,21 @@
                       </a:r>
                     </a:p>
                   </a:txBody>
-                  <a:tcPr marL="73152" marR="73152" marT="36576" marB="36576" anchor="t">
+                  <a:tcPr marL="73152" marR="73152" marT="36576" marB="36576">
                     <a:lnL w="0">
                       <a:noFill/>
                     </a:lnL>
                     <a:lnR w="0">
                       <a:noFill/>
                     </a:lnR>
-                    <a:lnT w="0">
-                      <a:noFill/>
+                    <a:lnT w="12700" cap="flat" cmpd="sng" algn="ctr">
+                      <a:solidFill>
+                        <a:srgbClr val="1B2430"/>
+                      </a:solidFill>
+                      <a:prstDash val="solid"/>
+                      <a:round/>
+                      <a:headEnd type="none" w="med" len="med"/>
+                      <a:tailEnd type="none" w="med" len="med"/>
                     </a:lnT>
                     <a:lnB w="9525">
                       <a:solidFill>
@@ -10879,7 +12837,7 @@
                 </a:tc>
                 <a:tc>
                   <a:txBody>
-                    <a:bodyPr wrap="square"/>
+                    <a:bodyPr/>
                     <a:lstStyle/>
                     <a:p>
                       <a:r>
@@ -10893,15 +12851,21 @@
                       </a:r>
                     </a:p>
                   </a:txBody>
-                  <a:tcPr marL="73152" marR="73152" marT="36576" marB="36576" anchor="t">
+                  <a:tcPr marL="73152" marR="73152" marT="36576" marB="36576">
                     <a:lnL w="0">
                       <a:noFill/>
                     </a:lnL>
                     <a:lnR w="0">
                       <a:noFill/>
                     </a:lnR>
-                    <a:lnT w="0">
-                      <a:noFill/>
+                    <a:lnT w="12700" cap="flat" cmpd="sng" algn="ctr">
+                      <a:solidFill>
+                        <a:srgbClr val="1B2430"/>
+                      </a:solidFill>
+                      <a:prstDash val="solid"/>
+                      <a:round/>
+                      <a:headEnd type="none" w="med" len="med"/>
+                      <a:tailEnd type="none" w="med" len="med"/>
                     </a:lnT>
                     <a:lnB w="9525">
                       <a:solidFill>
@@ -10913,11 +12877,16 @@
                     </a:solidFill>
                   </a:tcPr>
                 </a:tc>
+                <a:extLst>
+                  <a:ext uri="{0D108BD9-81ED-4DB2-BD59-A6C34878D82A}">
+                    <a16:rowId xmlns:a16="http://schemas.microsoft.com/office/drawing/2014/main" val="10001"/>
+                  </a:ext>
+                </a:extLst>
               </a:tr>
               <a:tr h="420624">
                 <a:tc>
                   <a:txBody>
-                    <a:bodyPr wrap="square"/>
+                    <a:bodyPr/>
                     <a:lstStyle/>
                     <a:p>
                       <a:r>
@@ -10931,15 +12900,21 @@
                       </a:r>
                     </a:p>
                   </a:txBody>
-                  <a:tcPr marL="73152" marR="73152" marT="36576" marB="36576" anchor="t">
+                  <a:tcPr marL="73152" marR="73152" marT="36576" marB="36576">
                     <a:lnL w="0">
                       <a:noFill/>
                     </a:lnL>
                     <a:lnR w="0">
                       <a:noFill/>
                     </a:lnR>
-                    <a:lnT w="0">
-                      <a:noFill/>
+                    <a:lnT w="9525" cap="flat" cmpd="sng" algn="ctr">
+                      <a:solidFill>
+                        <a:srgbClr val="C9CED6"/>
+                      </a:solidFill>
+                      <a:prstDash val="solid"/>
+                      <a:round/>
+                      <a:headEnd type="none" w="med" len="med"/>
+                      <a:tailEnd type="none" w="med" len="med"/>
                     </a:lnT>
                     <a:lnB w="9525">
                       <a:solidFill>
@@ -10953,7 +12928,7 @@
                 </a:tc>
                 <a:tc>
                   <a:txBody>
-                    <a:bodyPr wrap="square"/>
+                    <a:bodyPr/>
                     <a:lstStyle/>
                     <a:p>
                       <a:r>
@@ -10967,15 +12942,21 @@
                       </a:r>
                     </a:p>
                   </a:txBody>
-                  <a:tcPr marL="73152" marR="73152" marT="36576" marB="36576" anchor="t">
+                  <a:tcPr marL="73152" marR="73152" marT="36576" marB="36576">
                     <a:lnL w="0">
                       <a:noFill/>
                     </a:lnL>
                     <a:lnR w="0">
                       <a:noFill/>
                     </a:lnR>
-                    <a:lnT w="0">
-                      <a:noFill/>
+                    <a:lnT w="9525" cap="flat" cmpd="sng" algn="ctr">
+                      <a:solidFill>
+                        <a:srgbClr val="C9CED6"/>
+                      </a:solidFill>
+                      <a:prstDash val="solid"/>
+                      <a:round/>
+                      <a:headEnd type="none" w="med" len="med"/>
+                      <a:tailEnd type="none" w="med" len="med"/>
                     </a:lnT>
                     <a:lnB w="9525">
                       <a:solidFill>
@@ -10987,11 +12968,16 @@
                     </a:solidFill>
                   </a:tcPr>
                 </a:tc>
+                <a:extLst>
+                  <a:ext uri="{0D108BD9-81ED-4DB2-BD59-A6C34878D82A}">
+                    <a16:rowId xmlns:a16="http://schemas.microsoft.com/office/drawing/2014/main" val="10002"/>
+                  </a:ext>
+                </a:extLst>
               </a:tr>
               <a:tr h="420624">
                 <a:tc>
                   <a:txBody>
-                    <a:bodyPr wrap="square"/>
+                    <a:bodyPr/>
                     <a:lstStyle/>
                     <a:p>
                       <a:r>
@@ -11005,15 +12991,21 @@
                       </a:r>
                     </a:p>
                   </a:txBody>
-                  <a:tcPr marL="73152" marR="73152" marT="36576" marB="36576" anchor="t">
+                  <a:tcPr marL="73152" marR="73152" marT="36576" marB="36576">
                     <a:lnL w="0">
                       <a:noFill/>
                     </a:lnL>
                     <a:lnR w="0">
                       <a:noFill/>
                     </a:lnR>
-                    <a:lnT w="0">
-                      <a:noFill/>
+                    <a:lnT w="9525" cap="flat" cmpd="sng" algn="ctr">
+                      <a:solidFill>
+                        <a:srgbClr val="C9CED6"/>
+                      </a:solidFill>
+                      <a:prstDash val="solid"/>
+                      <a:round/>
+                      <a:headEnd type="none" w="med" len="med"/>
+                      <a:tailEnd type="none" w="med" len="med"/>
                     </a:lnT>
                     <a:lnB w="9525">
                       <a:solidFill>
@@ -11027,7 +13019,7 @@
                 </a:tc>
                 <a:tc>
                   <a:txBody>
-                    <a:bodyPr wrap="square"/>
+                    <a:bodyPr/>
                     <a:lstStyle/>
                     <a:p>
                       <a:r>
@@ -11041,15 +13033,21 @@
                       </a:r>
                     </a:p>
                   </a:txBody>
-                  <a:tcPr marL="73152" marR="73152" marT="36576" marB="36576" anchor="t">
+                  <a:tcPr marL="73152" marR="73152" marT="36576" marB="36576">
                     <a:lnL w="0">
                       <a:noFill/>
                     </a:lnL>
                     <a:lnR w="0">
                       <a:noFill/>
                     </a:lnR>
-                    <a:lnT w="0">
-                      <a:noFill/>
+                    <a:lnT w="9525" cap="flat" cmpd="sng" algn="ctr">
+                      <a:solidFill>
+                        <a:srgbClr val="C9CED6"/>
+                      </a:solidFill>
+                      <a:prstDash val="solid"/>
+                      <a:round/>
+                      <a:headEnd type="none" w="med" len="med"/>
+                      <a:tailEnd type="none" w="med" len="med"/>
                     </a:lnT>
                     <a:lnB w="9525">
                       <a:solidFill>
@@ -11061,11 +13059,16 @@
                     </a:solidFill>
                   </a:tcPr>
                 </a:tc>
+                <a:extLst>
+                  <a:ext uri="{0D108BD9-81ED-4DB2-BD59-A6C34878D82A}">
+                    <a16:rowId xmlns:a16="http://schemas.microsoft.com/office/drawing/2014/main" val="10003"/>
+                  </a:ext>
+                </a:extLst>
               </a:tr>
               <a:tr h="420624">
                 <a:tc>
                   <a:txBody>
-                    <a:bodyPr wrap="square"/>
+                    <a:bodyPr/>
                     <a:lstStyle/>
                     <a:p>
                       <a:r>
@@ -11079,15 +13082,21 @@
                       </a:r>
                     </a:p>
                   </a:txBody>
-                  <a:tcPr marL="73152" marR="73152" marT="36576" marB="36576" anchor="t">
+                  <a:tcPr marL="73152" marR="73152" marT="36576" marB="36576">
                     <a:lnL w="0">
                       <a:noFill/>
                     </a:lnL>
                     <a:lnR w="0">
                       <a:noFill/>
                     </a:lnR>
-                    <a:lnT w="0">
-                      <a:noFill/>
+                    <a:lnT w="9525" cap="flat" cmpd="sng" algn="ctr">
+                      <a:solidFill>
+                        <a:srgbClr val="C9CED6"/>
+                      </a:solidFill>
+                      <a:prstDash val="solid"/>
+                      <a:round/>
+                      <a:headEnd type="none" w="med" len="med"/>
+                      <a:tailEnd type="none" w="med" len="med"/>
                     </a:lnT>
                     <a:lnB w="9525">
                       <a:solidFill>
@@ -11101,7 +13110,7 @@
                 </a:tc>
                 <a:tc>
                   <a:txBody>
-                    <a:bodyPr wrap="square"/>
+                    <a:bodyPr/>
                     <a:lstStyle/>
                     <a:p>
                       <a:r>
@@ -11115,15 +13124,21 @@
                       </a:r>
                     </a:p>
                   </a:txBody>
-                  <a:tcPr marL="73152" marR="73152" marT="36576" marB="36576" anchor="t">
+                  <a:tcPr marL="73152" marR="73152" marT="36576" marB="36576">
                     <a:lnL w="0">
                       <a:noFill/>
                     </a:lnL>
                     <a:lnR w="0">
                       <a:noFill/>
                     </a:lnR>
-                    <a:lnT w="0">
-                      <a:noFill/>
+                    <a:lnT w="9525" cap="flat" cmpd="sng" algn="ctr">
+                      <a:solidFill>
+                        <a:srgbClr val="C9CED6"/>
+                      </a:solidFill>
+                      <a:prstDash val="solid"/>
+                      <a:round/>
+                      <a:headEnd type="none" w="med" len="med"/>
+                      <a:tailEnd type="none" w="med" len="med"/>
                     </a:lnT>
                     <a:lnB w="9525">
                       <a:solidFill>
@@ -11135,11 +13150,16 @@
                     </a:solidFill>
                   </a:tcPr>
                 </a:tc>
+                <a:extLst>
+                  <a:ext uri="{0D108BD9-81ED-4DB2-BD59-A6C34878D82A}">
+                    <a16:rowId xmlns:a16="http://schemas.microsoft.com/office/drawing/2014/main" val="10004"/>
+                  </a:ext>
+                </a:extLst>
               </a:tr>
               <a:tr h="420624">
                 <a:tc>
                   <a:txBody>
-                    <a:bodyPr wrap="square"/>
+                    <a:bodyPr/>
                     <a:lstStyle/>
                     <a:p>
                       <a:r>
@@ -11153,15 +13173,21 @@
                       </a:r>
                     </a:p>
                   </a:txBody>
-                  <a:tcPr marL="73152" marR="73152" marT="36576" marB="36576" anchor="t">
+                  <a:tcPr marL="73152" marR="73152" marT="36576" marB="36576">
                     <a:lnL w="0">
                       <a:noFill/>
                     </a:lnL>
                     <a:lnR w="0">
                       <a:noFill/>
                     </a:lnR>
-                    <a:lnT w="0">
-                      <a:noFill/>
+                    <a:lnT w="9525" cap="flat" cmpd="sng" algn="ctr">
+                      <a:solidFill>
+                        <a:srgbClr val="C9CED6"/>
+                      </a:solidFill>
+                      <a:prstDash val="solid"/>
+                      <a:round/>
+                      <a:headEnd type="none" w="med" len="med"/>
+                      <a:tailEnd type="none" w="med" len="med"/>
                     </a:lnT>
                     <a:lnB w="9525">
                       <a:solidFill>
@@ -11175,7 +13201,7 @@
                 </a:tc>
                 <a:tc>
                   <a:txBody>
-                    <a:bodyPr wrap="square"/>
+                    <a:bodyPr/>
                     <a:lstStyle/>
                     <a:p>
                       <a:r>
@@ -11189,15 +13215,21 @@
                       </a:r>
                     </a:p>
                   </a:txBody>
-                  <a:tcPr marL="73152" marR="73152" marT="36576" marB="36576" anchor="t">
+                  <a:tcPr marL="73152" marR="73152" marT="36576" marB="36576">
                     <a:lnL w="0">
                       <a:noFill/>
                     </a:lnL>
                     <a:lnR w="0">
                       <a:noFill/>
                     </a:lnR>
-                    <a:lnT w="0">
-                      <a:noFill/>
+                    <a:lnT w="9525" cap="flat" cmpd="sng" algn="ctr">
+                      <a:solidFill>
+                        <a:srgbClr val="C9CED6"/>
+                      </a:solidFill>
+                      <a:prstDash val="solid"/>
+                      <a:round/>
+                      <a:headEnd type="none" w="med" len="med"/>
+                      <a:tailEnd type="none" w="med" len="med"/>
                     </a:lnT>
                     <a:lnB w="9525">
                       <a:solidFill>
@@ -11209,6 +13241,11 @@
                     </a:solidFill>
                   </a:tcPr>
                 </a:tc>
+                <a:extLst>
+                  <a:ext uri="{0D108BD9-81ED-4DB2-BD59-A6C34878D82A}">
+                    <a16:rowId xmlns:a16="http://schemas.microsoft.com/office/drawing/2014/main" val="10005"/>
+                  </a:ext>
+                </a:extLst>
               </a:tr>
             </a:tbl>
           </a:graphicData>
@@ -11231,7 +13268,7 @@
           <a:noFill/>
         </p:spPr>
         <p:txBody>
-          <a:bodyPr wrap="square" anchor="t" lIns="0" rIns="0" tIns="0" bIns="0"/>
+          <a:bodyPr wrap="square" lIns="0" tIns="0" rIns="0" bIns="0" anchor="t"/>
           <a:lstStyle/>
           <a:p>
             <a:pPr algn="l">
@@ -11273,7 +13310,7 @@
           </a:ln>
         </p:spPr>
         <p:txBody>
-          <a:bodyPr rtlCol="0" anchor="ctr" wrap="square" lIns="109728" rIns="109728"/>
+          <a:bodyPr wrap="square" lIns="109728" rIns="109728" rtlCol="0" anchor="ctr"/>
           <a:lstStyle/>
           <a:p>
             <a:pPr algn="l">
@@ -11315,7 +13352,7 @@
           </a:ln>
         </p:spPr>
         <p:txBody>
-          <a:bodyPr rtlCol="0" anchor="ctr" wrap="square" lIns="109728" rIns="109728"/>
+          <a:bodyPr wrap="square" lIns="109728" rIns="109728" rtlCol="0" anchor="ctr"/>
           <a:lstStyle/>
           <a:p>
             <a:pPr algn="l">
@@ -11382,7 +13419,7 @@
           </a:ln>
         </p:spPr>
         <p:txBody>
-          <a:bodyPr rtlCol="0" anchor="ctr" wrap="square" lIns="109728" rIns="109728"/>
+          <a:bodyPr wrap="square" lIns="109728" rIns="109728" rtlCol="0" anchor="ctr"/>
           <a:lstStyle/>
           <a:p>
             <a:pPr algn="l">
@@ -11449,7 +13486,7 @@
           </a:ln>
         </p:spPr>
         <p:txBody>
-          <a:bodyPr rtlCol="0" anchor="ctr" wrap="square" lIns="109728" rIns="109728"/>
+          <a:bodyPr wrap="square" lIns="109728" rIns="109728" rtlCol="0" anchor="ctr"/>
           <a:lstStyle/>
           <a:p>
             <a:pPr algn="l">
@@ -11516,7 +13553,7 @@
           </a:ln>
         </p:spPr>
         <p:txBody>
-          <a:bodyPr rtlCol="0" anchor="ctr" wrap="square" lIns="109728" rIns="109728"/>
+          <a:bodyPr wrap="square" lIns="109728" rIns="109728" rtlCol="0" anchor="ctr"/>
           <a:lstStyle/>
           <a:p>
             <a:pPr algn="l">
@@ -11570,7 +13607,7 @@
 </file>
 
 <file path=ppt/slides/slide5.xml><?xml version="1.0" encoding="utf-8"?>
-<p:sld xmlns:a="http://schemas.openxmlformats.org/drawingml/2006/main" xmlns:p="http://schemas.openxmlformats.org/presentationml/2006/main" xmlns:r="http://schemas.openxmlformats.org/officeDocument/2006/relationships">
+<p:sld xmlns:a="http://schemas.openxmlformats.org/drawingml/2006/main" xmlns:r="http://schemas.openxmlformats.org/officeDocument/2006/relationships" xmlns:p="http://schemas.openxmlformats.org/presentationml/2006/main">
   <p:cSld>
     <p:spTree>
       <p:nvGrpSpPr>
@@ -11578,7 +13615,14 @@
         <p:cNvGrpSpPr/>
         <p:nvPr/>
       </p:nvGrpSpPr>
-      <p:grpSpPr/>
+      <p:grpSpPr>
+        <a:xfrm>
+          <a:off x="0" y="0"/>
+          <a:ext cx="0" cy="0"/>
+          <a:chOff x="0" y="0"/>
+          <a:chExt cx="0" cy="0"/>
+        </a:xfrm>
+      </p:grpSpPr>
       <p:sp>
         <p:nvSpPr>
           <p:cNvPr id="2" name="TextBox 1"/>
@@ -11596,7 +13640,7 @@
           <a:noFill/>
         </p:spPr>
         <p:txBody>
-          <a:bodyPr wrap="square" anchor="b" lIns="0" rIns="0" tIns="0" bIns="0"/>
+          <a:bodyPr wrap="square" lIns="0" tIns="0" rIns="0" bIns="0" anchor="b"/>
           <a:lstStyle/>
           <a:p>
             <a:pPr algn="l">
@@ -11675,7 +13719,7 @@
           <a:noFill/>
         </p:spPr>
         <p:txBody>
-          <a:bodyPr wrap="square" anchor="t" lIns="0" rIns="0" tIns="0" bIns="0"/>
+          <a:bodyPr wrap="square" lIns="0" tIns="0" rIns="0" bIns="0" anchor="t"/>
           <a:lstStyle/>
           <a:p>
             <a:pPr algn="l">
@@ -11712,7 +13756,7 @@
           <a:noFill/>
         </p:spPr>
         <p:txBody>
-          <a:bodyPr wrap="square" anchor="t" lIns="0" rIns="0" tIns="0" bIns="0"/>
+          <a:bodyPr wrap="square" lIns="0" tIns="0" rIns="0" bIns="0" anchor="t"/>
           <a:lstStyle/>
           <a:p>
             <a:pPr algn="r">
@@ -11749,7 +13793,7 @@
           <a:noFill/>
         </p:spPr>
         <p:txBody>
-          <a:bodyPr wrap="square" anchor="t" lIns="0" rIns="0" tIns="0" bIns="0"/>
+          <a:bodyPr wrap="square" lIns="0" tIns="0" rIns="0" bIns="0" anchor="t"/>
           <a:lstStyle/>
           <a:p>
             <a:pPr algn="l">
@@ -11807,7 +13851,7 @@
           <a:noFill/>
         </p:spPr>
         <p:txBody>
-          <a:bodyPr wrap="square" anchor="t" lIns="0" rIns="0" tIns="0" bIns="0"/>
+          <a:bodyPr wrap="square" lIns="0" tIns="0" rIns="0" bIns="0" anchor="t"/>
           <a:lstStyle/>
           <a:p>
             <a:pPr algn="l">
@@ -11865,7 +13909,7 @@
           <a:noFill/>
         </p:spPr>
         <p:txBody>
-          <a:bodyPr wrap="square" anchor="t" lIns="0" rIns="0" tIns="0" bIns="0"/>
+          <a:bodyPr wrap="square" lIns="0" tIns="0" rIns="0" bIns="0" anchor="t"/>
           <a:lstStyle/>
           <a:p>
             <a:pPr algn="l">
@@ -11928,7 +13972,7 @@
           </a:ln>
         </p:spPr>
         <p:txBody>
-          <a:bodyPr rtlCol="0" anchor="ctr" wrap="square" lIns="36576" rIns="36576" tIns="36576" bIns="36576"/>
+          <a:bodyPr wrap="square" lIns="36576" tIns="36576" rIns="36576" bIns="36576" rtlCol="0" anchor="ctr"/>
           <a:lstStyle/>
           <a:p>
             <a:pPr algn="ctr">
@@ -11970,7 +14014,7 @@
           </a:ln>
         </p:spPr>
         <p:txBody>
-          <a:bodyPr rtlCol="0" anchor="ctr" wrap="square" lIns="36576" rIns="36576" tIns="36576" bIns="36576"/>
+          <a:bodyPr wrap="square" lIns="36576" tIns="36576" rIns="36576" bIns="36576" rtlCol="0" anchor="ctr"/>
           <a:lstStyle/>
           <a:p>
             <a:pPr algn="ctr">
@@ -12012,7 +14056,7 @@
           </a:ln>
         </p:spPr>
         <p:txBody>
-          <a:bodyPr rtlCol="0" anchor="ctr" wrap="square" lIns="36576" rIns="36576" tIns="36576" bIns="36576"/>
+          <a:bodyPr wrap="square" lIns="36576" tIns="36576" rIns="36576" bIns="36576" rtlCol="0" anchor="ctr"/>
           <a:lstStyle/>
           <a:p>
             <a:pPr algn="ctr">
@@ -12054,7 +14098,7 @@
           </a:ln>
         </p:spPr>
         <p:txBody>
-          <a:bodyPr rtlCol="0" anchor="ctr" wrap="square" lIns="36576" rIns="36576" tIns="36576" bIns="36576"/>
+          <a:bodyPr wrap="square" lIns="36576" tIns="36576" rIns="36576" bIns="36576" rtlCol="0" anchor="ctr"/>
           <a:lstStyle/>
           <a:p>
             <a:pPr algn="ctr">
@@ -12096,7 +14140,7 @@
           </a:ln>
         </p:spPr>
         <p:txBody>
-          <a:bodyPr rtlCol="0" anchor="ctr" wrap="square" lIns="36576" rIns="36576" tIns="36576" bIns="36576"/>
+          <a:bodyPr wrap="square" lIns="36576" tIns="36576" rIns="36576" bIns="36576" rtlCol="0" anchor="ctr"/>
           <a:lstStyle/>
           <a:p>
             <a:pPr algn="ctr">
@@ -12138,7 +14182,7 @@
           </a:ln>
         </p:spPr>
         <p:txBody>
-          <a:bodyPr rtlCol="0" anchor="ctr" wrap="square" lIns="36576" rIns="36576" tIns="36576" bIns="36576"/>
+          <a:bodyPr wrap="square" lIns="36576" tIns="36576" rIns="36576" bIns="36576" rtlCol="0" anchor="ctr"/>
           <a:lstStyle/>
           <a:p>
             <a:pPr algn="ctr">
@@ -12180,7 +14224,7 @@
           </a:ln>
         </p:spPr>
         <p:txBody>
-          <a:bodyPr rtlCol="0" anchor="ctr" wrap="square" lIns="36576" rIns="36576" tIns="36576" bIns="36576"/>
+          <a:bodyPr wrap="square" lIns="36576" tIns="36576" rIns="36576" bIns="36576" rtlCol="0" anchor="ctr"/>
           <a:lstStyle/>
           <a:p>
             <a:pPr algn="ctr">
@@ -12222,7 +14266,7 @@
           </a:ln>
         </p:spPr>
         <p:txBody>
-          <a:bodyPr rtlCol="0" anchor="ctr" wrap="square" lIns="36576" rIns="36576" tIns="36576" bIns="36576"/>
+          <a:bodyPr wrap="square" lIns="36576" tIns="36576" rIns="36576" bIns="36576" rtlCol="0" anchor="ctr"/>
           <a:lstStyle/>
           <a:p>
             <a:pPr algn="ctr">
@@ -12266,7 +14310,7 @@
           </a:ln>
         </p:spPr>
         <p:txBody>
-          <a:bodyPr rtlCol="0" anchor="ctr" wrap="square" lIns="36576" rIns="36576" tIns="36576" bIns="36576"/>
+          <a:bodyPr wrap="square" lIns="36576" tIns="36576" rIns="36576" bIns="36576" rtlCol="0" anchor="ctr"/>
           <a:lstStyle/>
           <a:p>
             <a:pPr algn="ctr">
@@ -12310,7 +14354,7 @@
           </a:ln>
         </p:spPr>
         <p:txBody>
-          <a:bodyPr rtlCol="0" anchor="ctr" wrap="square" lIns="36576" rIns="36576" tIns="36576" bIns="36576"/>
+          <a:bodyPr wrap="square" lIns="36576" tIns="36576" rIns="36576" bIns="36576" rtlCol="0" anchor="ctr"/>
           <a:lstStyle/>
           <a:p>
             <a:pPr algn="ctr">
@@ -12593,7 +14637,7 @@
           <a:noFill/>
         </p:spPr>
         <p:txBody>
-          <a:bodyPr wrap="square" anchor="t" lIns="0" rIns="0" tIns="0" bIns="0"/>
+          <a:bodyPr wrap="square" lIns="0" tIns="0" rIns="0" bIns="0" anchor="t"/>
           <a:lstStyle/>
           <a:p>
             <a:pPr algn="l">
@@ -12623,7 +14667,7 @@
         </p:nvGraphicFramePr>
         <p:xfrm>
           <a:off x="548640" y="3017520"/>
-          <a:ext cx="11091672" cy="2926080"/>
+          <a:ext cx="11091672" cy="3200400"/>
         </p:xfrm>
         <a:graphic>
           <a:graphicData uri="http://schemas.openxmlformats.org/drawingml/2006/table">
@@ -12632,26 +14676,42 @@
                 <a:tableStyleId>{2D5ABB26-0587-4C30-8999-92F81FD0307C}</a:tableStyleId>
               </a:tblPr>
               <a:tblGrid>
-                <a:gridCol w="411480"/>
-                <a:gridCol w="2606040"/>
-                <a:gridCol w="6537960"/>
-                <a:gridCol w="1536192"/>
+                <a:gridCol w="411480">
+                  <a:extLst>
+                    <a:ext uri="{9D8B030D-6E8A-4147-A177-3AD203B41FA5}">
+                      <a16:colId xmlns:a16="http://schemas.microsoft.com/office/drawing/2014/main" val="20000"/>
+                    </a:ext>
+                  </a:extLst>
+                </a:gridCol>
+                <a:gridCol w="2606040">
+                  <a:extLst>
+                    <a:ext uri="{9D8B030D-6E8A-4147-A177-3AD203B41FA5}">
+                      <a16:colId xmlns:a16="http://schemas.microsoft.com/office/drawing/2014/main" val="20001"/>
+                    </a:ext>
+                  </a:extLst>
+                </a:gridCol>
+                <a:gridCol w="6537960">
+                  <a:extLst>
+                    <a:ext uri="{9D8B030D-6E8A-4147-A177-3AD203B41FA5}">
+                      <a16:colId xmlns:a16="http://schemas.microsoft.com/office/drawing/2014/main" val="20002"/>
+                    </a:ext>
+                  </a:extLst>
+                </a:gridCol>
+                <a:gridCol w="1536192">
+                  <a:extLst>
+                    <a:ext uri="{9D8B030D-6E8A-4147-A177-3AD203B41FA5}">
+                      <a16:colId xmlns:a16="http://schemas.microsoft.com/office/drawing/2014/main" val="20003"/>
+                    </a:ext>
+                  </a:extLst>
+                </a:gridCol>
               </a:tblGrid>
               <a:tr h="292608">
                 <a:tc>
                   <a:txBody>
-                    <a:bodyPr wrap="square"/>
+                    <a:bodyPr/>
                     <a:lstStyle/>
                     <a:p>
-                      <a:r>
-                        <a:rPr sz="1050">
-                          <a:solidFill>
-                            <a:srgbClr val="1B2430"/>
-                          </a:solidFill>
-                          <a:latin typeface="Segoe UI Semibold"/>
-                        </a:rPr>
-                        <a:t/>
-                      </a:r>
+                      <a:endParaRPr/>
                     </a:p>
                   </a:txBody>
                   <a:tcPr marL="73152" marR="73152" marT="36576" marB="36576" anchor="ctr">
@@ -12676,7 +14736,7 @@
                 </a:tc>
                 <a:tc>
                   <a:txBody>
-                    <a:bodyPr wrap="square"/>
+                    <a:bodyPr/>
                     <a:lstStyle/>
                     <a:p>
                       <a:r>
@@ -12712,7 +14772,7 @@
                 </a:tc>
                 <a:tc>
                   <a:txBody>
-                    <a:bodyPr wrap="square"/>
+                    <a:bodyPr/>
                     <a:lstStyle/>
                     <a:p>
                       <a:r>
@@ -12748,7 +14808,7 @@
                 </a:tc>
                 <a:tc>
                   <a:txBody>
-                    <a:bodyPr wrap="square"/>
+                    <a:bodyPr/>
                     <a:lstStyle/>
                     <a:p>
                       <a:r>
@@ -12782,11 +14842,16 @@
                     </a:solidFill>
                   </a:tcPr>
                 </a:tc>
+                <a:extLst>
+                  <a:ext uri="{0D108BD9-81ED-4DB2-BD59-A6C34878D82A}">
+                    <a16:rowId xmlns:a16="http://schemas.microsoft.com/office/drawing/2014/main" val="10000"/>
+                  </a:ext>
+                </a:extLst>
               </a:tr>
               <a:tr h="292608">
                 <a:tc>
                   <a:txBody>
-                    <a:bodyPr wrap="square"/>
+                    <a:bodyPr/>
                     <a:lstStyle/>
                     <a:p>
                       <a:r>
@@ -12800,15 +14865,21 @@
                       </a:r>
                     </a:p>
                   </a:txBody>
-                  <a:tcPr marL="73152" marR="73152" marT="36576" marB="36576" anchor="t">
+                  <a:tcPr marL="73152" marR="73152" marT="36576" marB="36576">
                     <a:lnL w="0">
                       <a:noFill/>
                     </a:lnL>
                     <a:lnR w="0">
                       <a:noFill/>
                     </a:lnR>
-                    <a:lnT w="0">
-                      <a:noFill/>
+                    <a:lnT w="12700" cap="flat" cmpd="sng" algn="ctr">
+                      <a:solidFill>
+                        <a:srgbClr val="1B2430"/>
+                      </a:solidFill>
+                      <a:prstDash val="solid"/>
+                      <a:round/>
+                      <a:headEnd type="none" w="med" len="med"/>
+                      <a:tailEnd type="none" w="med" len="med"/>
                     </a:lnT>
                     <a:lnB w="9525">
                       <a:solidFill>
@@ -12822,7 +14893,7 @@
                 </a:tc>
                 <a:tc>
                   <a:txBody>
-                    <a:bodyPr wrap="square"/>
+                    <a:bodyPr/>
                     <a:lstStyle/>
                     <a:p>
                       <a:r>
@@ -12836,15 +14907,21 @@
                       </a:r>
                     </a:p>
                   </a:txBody>
-                  <a:tcPr marL="73152" marR="73152" marT="36576" marB="36576" anchor="t">
+                  <a:tcPr marL="73152" marR="73152" marT="36576" marB="36576">
                     <a:lnL w="0">
                       <a:noFill/>
                     </a:lnL>
                     <a:lnR w="0">
                       <a:noFill/>
                     </a:lnR>
-                    <a:lnT w="0">
-                      <a:noFill/>
+                    <a:lnT w="12700" cap="flat" cmpd="sng" algn="ctr">
+                      <a:solidFill>
+                        <a:srgbClr val="1B2430"/>
+                      </a:solidFill>
+                      <a:prstDash val="solid"/>
+                      <a:round/>
+                      <a:headEnd type="none" w="med" len="med"/>
+                      <a:tailEnd type="none" w="med" len="med"/>
                     </a:lnT>
                     <a:lnB w="9525">
                       <a:solidFill>
@@ -12858,7 +14935,7 @@
                 </a:tc>
                 <a:tc>
                   <a:txBody>
-                    <a:bodyPr wrap="square"/>
+                    <a:bodyPr/>
                     <a:lstStyle/>
                     <a:p>
                       <a:r>
@@ -12872,15 +14949,21 @@
                       </a:r>
                     </a:p>
                   </a:txBody>
-                  <a:tcPr marL="73152" marR="73152" marT="36576" marB="36576" anchor="t">
+                  <a:tcPr marL="73152" marR="73152" marT="36576" marB="36576">
                     <a:lnL w="0">
                       <a:noFill/>
                     </a:lnL>
                     <a:lnR w="0">
                       <a:noFill/>
                     </a:lnR>
-                    <a:lnT w="0">
-                      <a:noFill/>
+                    <a:lnT w="12700" cap="flat" cmpd="sng" algn="ctr">
+                      <a:solidFill>
+                        <a:srgbClr val="1B2430"/>
+                      </a:solidFill>
+                      <a:prstDash val="solid"/>
+                      <a:round/>
+                      <a:headEnd type="none" w="med" len="med"/>
+                      <a:tailEnd type="none" w="med" len="med"/>
                     </a:lnT>
                     <a:lnB w="9525">
                       <a:solidFill>
@@ -12894,7 +14977,7 @@
                 </a:tc>
                 <a:tc>
                   <a:txBody>
-                    <a:bodyPr wrap="square"/>
+                    <a:bodyPr/>
                     <a:lstStyle/>
                     <a:p>
                       <a:r>
@@ -12908,15 +14991,21 @@
                       </a:r>
                     </a:p>
                   </a:txBody>
-                  <a:tcPr marL="73152" marR="73152" marT="36576" marB="36576" anchor="t">
+                  <a:tcPr marL="73152" marR="73152" marT="36576" marB="36576">
                     <a:lnL w="0">
                       <a:noFill/>
                     </a:lnL>
                     <a:lnR w="0">
                       <a:noFill/>
                     </a:lnR>
-                    <a:lnT w="0">
-                      <a:noFill/>
+                    <a:lnT w="12700" cap="flat" cmpd="sng" algn="ctr">
+                      <a:solidFill>
+                        <a:srgbClr val="1B2430"/>
+                      </a:solidFill>
+                      <a:prstDash val="solid"/>
+                      <a:round/>
+                      <a:headEnd type="none" w="med" len="med"/>
+                      <a:tailEnd type="none" w="med" len="med"/>
                     </a:lnT>
                     <a:lnB w="9525">
                       <a:solidFill>
@@ -12928,11 +15017,16 @@
                     </a:solidFill>
                   </a:tcPr>
                 </a:tc>
+                <a:extLst>
+                  <a:ext uri="{0D108BD9-81ED-4DB2-BD59-A6C34878D82A}">
+                    <a16:rowId xmlns:a16="http://schemas.microsoft.com/office/drawing/2014/main" val="10001"/>
+                  </a:ext>
+                </a:extLst>
               </a:tr>
               <a:tr h="292608">
                 <a:tc>
                   <a:txBody>
-                    <a:bodyPr wrap="square"/>
+                    <a:bodyPr/>
                     <a:lstStyle/>
                     <a:p>
                       <a:r>
@@ -12946,15 +15040,21 @@
                       </a:r>
                     </a:p>
                   </a:txBody>
-                  <a:tcPr marL="73152" marR="73152" marT="36576" marB="36576" anchor="t">
+                  <a:tcPr marL="73152" marR="73152" marT="36576" marB="36576">
                     <a:lnL w="0">
                       <a:noFill/>
                     </a:lnL>
                     <a:lnR w="0">
                       <a:noFill/>
                     </a:lnR>
-                    <a:lnT w="0">
-                      <a:noFill/>
+                    <a:lnT w="9525" cap="flat" cmpd="sng" algn="ctr">
+                      <a:solidFill>
+                        <a:srgbClr val="C9CED6"/>
+                      </a:solidFill>
+                      <a:prstDash val="solid"/>
+                      <a:round/>
+                      <a:headEnd type="none" w="med" len="med"/>
+                      <a:tailEnd type="none" w="med" len="med"/>
                     </a:lnT>
                     <a:lnB w="9525">
                       <a:solidFill>
@@ -12968,7 +15068,7 @@
                 </a:tc>
                 <a:tc>
                   <a:txBody>
-                    <a:bodyPr wrap="square"/>
+                    <a:bodyPr/>
                     <a:lstStyle/>
                     <a:p>
                       <a:r>
@@ -12982,15 +15082,21 @@
                       </a:r>
                     </a:p>
                   </a:txBody>
-                  <a:tcPr marL="73152" marR="73152" marT="36576" marB="36576" anchor="t">
+                  <a:tcPr marL="73152" marR="73152" marT="36576" marB="36576">
                     <a:lnL w="0">
                       <a:noFill/>
                     </a:lnL>
                     <a:lnR w="0">
                       <a:noFill/>
                     </a:lnR>
-                    <a:lnT w="0">
-                      <a:noFill/>
+                    <a:lnT w="9525" cap="flat" cmpd="sng" algn="ctr">
+                      <a:solidFill>
+                        <a:srgbClr val="C9CED6"/>
+                      </a:solidFill>
+                      <a:prstDash val="solid"/>
+                      <a:round/>
+                      <a:headEnd type="none" w="med" len="med"/>
+                      <a:tailEnd type="none" w="med" len="med"/>
                     </a:lnT>
                     <a:lnB w="9525">
                       <a:solidFill>
@@ -13004,7 +15110,7 @@
                 </a:tc>
                 <a:tc>
                   <a:txBody>
-                    <a:bodyPr wrap="square"/>
+                    <a:bodyPr/>
                     <a:lstStyle/>
                     <a:p>
                       <a:r>
@@ -13018,15 +15124,21 @@
                       </a:r>
                     </a:p>
                   </a:txBody>
-                  <a:tcPr marL="73152" marR="73152" marT="36576" marB="36576" anchor="t">
+                  <a:tcPr marL="73152" marR="73152" marT="36576" marB="36576">
                     <a:lnL w="0">
                       <a:noFill/>
                     </a:lnL>
                     <a:lnR w="0">
                       <a:noFill/>
                     </a:lnR>
-                    <a:lnT w="0">
-                      <a:noFill/>
+                    <a:lnT w="9525" cap="flat" cmpd="sng" algn="ctr">
+                      <a:solidFill>
+                        <a:srgbClr val="C9CED6"/>
+                      </a:solidFill>
+                      <a:prstDash val="solid"/>
+                      <a:round/>
+                      <a:headEnd type="none" w="med" len="med"/>
+                      <a:tailEnd type="none" w="med" len="med"/>
                     </a:lnT>
                     <a:lnB w="9525">
                       <a:solidFill>
@@ -13040,29 +15152,27 @@
                 </a:tc>
                 <a:tc>
                   <a:txBody>
-                    <a:bodyPr wrap="square"/>
+                    <a:bodyPr/>
                     <a:lstStyle/>
                     <a:p>
-                      <a:r>
-                        <a:rPr sz="1050">
-                          <a:solidFill>
-                            <a:srgbClr val="1B2430"/>
-                          </a:solidFill>
-                          <a:latin typeface="Segoe UI"/>
-                        </a:rPr>
-                        <a:t/>
-                      </a:r>
+                      <a:endParaRPr/>
                     </a:p>
                   </a:txBody>
-                  <a:tcPr marL="73152" marR="73152" marT="36576" marB="36576" anchor="t">
+                  <a:tcPr marL="73152" marR="73152" marT="36576" marB="36576">
                     <a:lnL w="0">
                       <a:noFill/>
                     </a:lnL>
                     <a:lnR w="0">
                       <a:noFill/>
                     </a:lnR>
-                    <a:lnT w="0">
-                      <a:noFill/>
+                    <a:lnT w="9525" cap="flat" cmpd="sng" algn="ctr">
+                      <a:solidFill>
+                        <a:srgbClr val="C9CED6"/>
+                      </a:solidFill>
+                      <a:prstDash val="solid"/>
+                      <a:round/>
+                      <a:headEnd type="none" w="med" len="med"/>
+                      <a:tailEnd type="none" w="med" len="med"/>
                     </a:lnT>
                     <a:lnB w="9525">
                       <a:solidFill>
@@ -13074,11 +15184,16 @@
                     </a:solidFill>
                   </a:tcPr>
                 </a:tc>
+                <a:extLst>
+                  <a:ext uri="{0D108BD9-81ED-4DB2-BD59-A6C34878D82A}">
+                    <a16:rowId xmlns:a16="http://schemas.microsoft.com/office/drawing/2014/main" val="10002"/>
+                  </a:ext>
+                </a:extLst>
               </a:tr>
               <a:tr h="292608">
                 <a:tc>
                   <a:txBody>
-                    <a:bodyPr wrap="square"/>
+                    <a:bodyPr/>
                     <a:lstStyle/>
                     <a:p>
                       <a:r>
@@ -13092,15 +15207,21 @@
                       </a:r>
                     </a:p>
                   </a:txBody>
-                  <a:tcPr marL="73152" marR="73152" marT="36576" marB="36576" anchor="t">
+                  <a:tcPr marL="73152" marR="73152" marT="36576" marB="36576">
                     <a:lnL w="0">
                       <a:noFill/>
                     </a:lnL>
                     <a:lnR w="0">
                       <a:noFill/>
                     </a:lnR>
-                    <a:lnT w="0">
-                      <a:noFill/>
+                    <a:lnT w="9525" cap="flat" cmpd="sng" algn="ctr">
+                      <a:solidFill>
+                        <a:srgbClr val="C9CED6"/>
+                      </a:solidFill>
+                      <a:prstDash val="solid"/>
+                      <a:round/>
+                      <a:headEnd type="none" w="med" len="med"/>
+                      <a:tailEnd type="none" w="med" len="med"/>
                     </a:lnT>
                     <a:lnB w="9525">
                       <a:solidFill>
@@ -13114,7 +15235,7 @@
                 </a:tc>
                 <a:tc>
                   <a:txBody>
-                    <a:bodyPr wrap="square"/>
+                    <a:bodyPr/>
                     <a:lstStyle/>
                     <a:p>
                       <a:r>
@@ -13128,15 +15249,21 @@
                       </a:r>
                     </a:p>
                   </a:txBody>
-                  <a:tcPr marL="73152" marR="73152" marT="36576" marB="36576" anchor="t">
+                  <a:tcPr marL="73152" marR="73152" marT="36576" marB="36576">
                     <a:lnL w="0">
                       <a:noFill/>
                     </a:lnL>
                     <a:lnR w="0">
                       <a:noFill/>
                     </a:lnR>
-                    <a:lnT w="0">
-                      <a:noFill/>
+                    <a:lnT w="9525" cap="flat" cmpd="sng" algn="ctr">
+                      <a:solidFill>
+                        <a:srgbClr val="C9CED6"/>
+                      </a:solidFill>
+                      <a:prstDash val="solid"/>
+                      <a:round/>
+                      <a:headEnd type="none" w="med" len="med"/>
+                      <a:tailEnd type="none" w="med" len="med"/>
                     </a:lnT>
                     <a:lnB w="9525">
                       <a:solidFill>
@@ -13150,7 +15277,7 @@
                 </a:tc>
                 <a:tc>
                   <a:txBody>
-                    <a:bodyPr wrap="square"/>
+                    <a:bodyPr/>
                     <a:lstStyle/>
                     <a:p>
                       <a:r>
@@ -13164,15 +15291,21 @@
                       </a:r>
                     </a:p>
                   </a:txBody>
-                  <a:tcPr marL="73152" marR="73152" marT="36576" marB="36576" anchor="t">
+                  <a:tcPr marL="73152" marR="73152" marT="36576" marB="36576">
                     <a:lnL w="0">
                       <a:noFill/>
                     </a:lnL>
                     <a:lnR w="0">
                       <a:noFill/>
                     </a:lnR>
-                    <a:lnT w="0">
-                      <a:noFill/>
+                    <a:lnT w="9525" cap="flat" cmpd="sng" algn="ctr">
+                      <a:solidFill>
+                        <a:srgbClr val="C9CED6"/>
+                      </a:solidFill>
+                      <a:prstDash val="solid"/>
+                      <a:round/>
+                      <a:headEnd type="none" w="med" len="med"/>
+                      <a:tailEnd type="none" w="med" len="med"/>
                     </a:lnT>
                     <a:lnB w="9525">
                       <a:solidFill>
@@ -13186,29 +15319,27 @@
                 </a:tc>
                 <a:tc>
                   <a:txBody>
-                    <a:bodyPr wrap="square"/>
+                    <a:bodyPr/>
                     <a:lstStyle/>
                     <a:p>
-                      <a:r>
-                        <a:rPr sz="1050">
-                          <a:solidFill>
-                            <a:srgbClr val="1B2430"/>
-                          </a:solidFill>
-                          <a:latin typeface="Segoe UI"/>
-                        </a:rPr>
-                        <a:t/>
-                      </a:r>
+                      <a:endParaRPr/>
                     </a:p>
                   </a:txBody>
-                  <a:tcPr marL="73152" marR="73152" marT="36576" marB="36576" anchor="t">
+                  <a:tcPr marL="73152" marR="73152" marT="36576" marB="36576">
                     <a:lnL w="0">
                       <a:noFill/>
                     </a:lnL>
                     <a:lnR w="0">
                       <a:noFill/>
                     </a:lnR>
-                    <a:lnT w="0">
-                      <a:noFill/>
+                    <a:lnT w="9525" cap="flat" cmpd="sng" algn="ctr">
+                      <a:solidFill>
+                        <a:srgbClr val="C9CED6"/>
+                      </a:solidFill>
+                      <a:prstDash val="solid"/>
+                      <a:round/>
+                      <a:headEnd type="none" w="med" len="med"/>
+                      <a:tailEnd type="none" w="med" len="med"/>
                     </a:lnT>
                     <a:lnB w="9525">
                       <a:solidFill>
@@ -13220,11 +15351,16 @@
                     </a:solidFill>
                   </a:tcPr>
                 </a:tc>
+                <a:extLst>
+                  <a:ext uri="{0D108BD9-81ED-4DB2-BD59-A6C34878D82A}">
+                    <a16:rowId xmlns:a16="http://schemas.microsoft.com/office/drawing/2014/main" val="10003"/>
+                  </a:ext>
+                </a:extLst>
               </a:tr>
               <a:tr h="292608">
                 <a:tc>
                   <a:txBody>
-                    <a:bodyPr wrap="square"/>
+                    <a:bodyPr/>
                     <a:lstStyle/>
                     <a:p>
                       <a:r>
@@ -13238,15 +15374,21 @@
                       </a:r>
                     </a:p>
                   </a:txBody>
-                  <a:tcPr marL="73152" marR="73152" marT="36576" marB="36576" anchor="t">
+                  <a:tcPr marL="73152" marR="73152" marT="36576" marB="36576">
                     <a:lnL w="0">
                       <a:noFill/>
                     </a:lnL>
                     <a:lnR w="0">
                       <a:noFill/>
                     </a:lnR>
-                    <a:lnT w="0">
-                      <a:noFill/>
+                    <a:lnT w="9525" cap="flat" cmpd="sng" algn="ctr">
+                      <a:solidFill>
+                        <a:srgbClr val="C9CED6"/>
+                      </a:solidFill>
+                      <a:prstDash val="solid"/>
+                      <a:round/>
+                      <a:headEnd type="none" w="med" len="med"/>
+                      <a:tailEnd type="none" w="med" len="med"/>
                     </a:lnT>
                     <a:lnB w="9525">
                       <a:solidFill>
@@ -13260,7 +15402,7 @@
                 </a:tc>
                 <a:tc>
                   <a:txBody>
-                    <a:bodyPr wrap="square"/>
+                    <a:bodyPr/>
                     <a:lstStyle/>
                     <a:p>
                       <a:r>
@@ -13274,15 +15416,21 @@
                       </a:r>
                     </a:p>
                   </a:txBody>
-                  <a:tcPr marL="73152" marR="73152" marT="36576" marB="36576" anchor="t">
+                  <a:tcPr marL="73152" marR="73152" marT="36576" marB="36576">
                     <a:lnL w="0">
                       <a:noFill/>
                     </a:lnL>
                     <a:lnR w="0">
                       <a:noFill/>
                     </a:lnR>
-                    <a:lnT w="0">
-                      <a:noFill/>
+                    <a:lnT w="9525" cap="flat" cmpd="sng" algn="ctr">
+                      <a:solidFill>
+                        <a:srgbClr val="C9CED6"/>
+                      </a:solidFill>
+                      <a:prstDash val="solid"/>
+                      <a:round/>
+                      <a:headEnd type="none" w="med" len="med"/>
+                      <a:tailEnd type="none" w="med" len="med"/>
                     </a:lnT>
                     <a:lnB w="9525">
                       <a:solidFill>
@@ -13296,7 +15444,7 @@
                 </a:tc>
                 <a:tc>
                   <a:txBody>
-                    <a:bodyPr wrap="square"/>
+                    <a:bodyPr/>
                     <a:lstStyle/>
                     <a:p>
                       <a:r>
@@ -13310,15 +15458,21 @@
                       </a:r>
                     </a:p>
                   </a:txBody>
-                  <a:tcPr marL="73152" marR="73152" marT="36576" marB="36576" anchor="t">
+                  <a:tcPr marL="73152" marR="73152" marT="36576" marB="36576">
                     <a:lnL w="0">
                       <a:noFill/>
                     </a:lnL>
                     <a:lnR w="0">
                       <a:noFill/>
                     </a:lnR>
-                    <a:lnT w="0">
-                      <a:noFill/>
+                    <a:lnT w="9525" cap="flat" cmpd="sng" algn="ctr">
+                      <a:solidFill>
+                        <a:srgbClr val="C9CED6"/>
+                      </a:solidFill>
+                      <a:prstDash val="solid"/>
+                      <a:round/>
+                      <a:headEnd type="none" w="med" len="med"/>
+                      <a:tailEnd type="none" w="med" len="med"/>
                     </a:lnT>
                     <a:lnB w="9525">
                       <a:solidFill>
@@ -13332,29 +15486,27 @@
                 </a:tc>
                 <a:tc>
                   <a:txBody>
-                    <a:bodyPr wrap="square"/>
+                    <a:bodyPr/>
                     <a:lstStyle/>
                     <a:p>
-                      <a:r>
-                        <a:rPr sz="1050">
-                          <a:solidFill>
-                            <a:srgbClr val="1B2430"/>
-                          </a:solidFill>
-                          <a:latin typeface="Segoe UI"/>
-                        </a:rPr>
-                        <a:t/>
-                      </a:r>
+                      <a:endParaRPr/>
                     </a:p>
                   </a:txBody>
-                  <a:tcPr marL="73152" marR="73152" marT="36576" marB="36576" anchor="t">
+                  <a:tcPr marL="73152" marR="73152" marT="36576" marB="36576">
                     <a:lnL w="0">
                       <a:noFill/>
                     </a:lnL>
                     <a:lnR w="0">
                       <a:noFill/>
                     </a:lnR>
-                    <a:lnT w="0">
-                      <a:noFill/>
+                    <a:lnT w="9525" cap="flat" cmpd="sng" algn="ctr">
+                      <a:solidFill>
+                        <a:srgbClr val="C9CED6"/>
+                      </a:solidFill>
+                      <a:prstDash val="solid"/>
+                      <a:round/>
+                      <a:headEnd type="none" w="med" len="med"/>
+                      <a:tailEnd type="none" w="med" len="med"/>
                     </a:lnT>
                     <a:lnB w="9525">
                       <a:solidFill>
@@ -13366,11 +15518,16 @@
                     </a:solidFill>
                   </a:tcPr>
                 </a:tc>
+                <a:extLst>
+                  <a:ext uri="{0D108BD9-81ED-4DB2-BD59-A6C34878D82A}">
+                    <a16:rowId xmlns:a16="http://schemas.microsoft.com/office/drawing/2014/main" val="10004"/>
+                  </a:ext>
+                </a:extLst>
               </a:tr>
               <a:tr h="292608">
                 <a:tc>
                   <a:txBody>
-                    <a:bodyPr wrap="square"/>
+                    <a:bodyPr/>
                     <a:lstStyle/>
                     <a:p>
                       <a:r>
@@ -13384,15 +15541,21 @@
                       </a:r>
                     </a:p>
                   </a:txBody>
-                  <a:tcPr marL="73152" marR="73152" marT="36576" marB="36576" anchor="t">
+                  <a:tcPr marL="73152" marR="73152" marT="36576" marB="36576">
                     <a:lnL w="0">
                       <a:noFill/>
                     </a:lnL>
                     <a:lnR w="0">
                       <a:noFill/>
                     </a:lnR>
-                    <a:lnT w="0">
-                      <a:noFill/>
+                    <a:lnT w="9525" cap="flat" cmpd="sng" algn="ctr">
+                      <a:solidFill>
+                        <a:srgbClr val="C9CED6"/>
+                      </a:solidFill>
+                      <a:prstDash val="solid"/>
+                      <a:round/>
+                      <a:headEnd type="none" w="med" len="med"/>
+                      <a:tailEnd type="none" w="med" len="med"/>
                     </a:lnT>
                     <a:lnB w="9525">
                       <a:solidFill>
@@ -13406,7 +15569,7 @@
                 </a:tc>
                 <a:tc>
                   <a:txBody>
-                    <a:bodyPr wrap="square"/>
+                    <a:bodyPr/>
                     <a:lstStyle/>
                     <a:p>
                       <a:r>
@@ -13420,15 +15583,21 @@
                       </a:r>
                     </a:p>
                   </a:txBody>
-                  <a:tcPr marL="73152" marR="73152" marT="36576" marB="36576" anchor="t">
+                  <a:tcPr marL="73152" marR="73152" marT="36576" marB="36576">
                     <a:lnL w="0">
                       <a:noFill/>
                     </a:lnL>
                     <a:lnR w="0">
                       <a:noFill/>
                     </a:lnR>
-                    <a:lnT w="0">
-                      <a:noFill/>
+                    <a:lnT w="9525" cap="flat" cmpd="sng" algn="ctr">
+                      <a:solidFill>
+                        <a:srgbClr val="C9CED6"/>
+                      </a:solidFill>
+                      <a:prstDash val="solid"/>
+                      <a:round/>
+                      <a:headEnd type="none" w="med" len="med"/>
+                      <a:tailEnd type="none" w="med" len="med"/>
                     </a:lnT>
                     <a:lnB w="9525">
                       <a:solidFill>
@@ -13442,7 +15611,7 @@
                 </a:tc>
                 <a:tc>
                   <a:txBody>
-                    <a:bodyPr wrap="square"/>
+                    <a:bodyPr/>
                     <a:lstStyle/>
                     <a:p>
                       <a:r>
@@ -13456,15 +15625,21 @@
                       </a:r>
                     </a:p>
                   </a:txBody>
-                  <a:tcPr marL="73152" marR="73152" marT="36576" marB="36576" anchor="t">
+                  <a:tcPr marL="73152" marR="73152" marT="36576" marB="36576">
                     <a:lnL w="0">
                       <a:noFill/>
                     </a:lnL>
                     <a:lnR w="0">
                       <a:noFill/>
                     </a:lnR>
-                    <a:lnT w="0">
-                      <a:noFill/>
+                    <a:lnT w="9525" cap="flat" cmpd="sng" algn="ctr">
+                      <a:solidFill>
+                        <a:srgbClr val="C9CED6"/>
+                      </a:solidFill>
+                      <a:prstDash val="solid"/>
+                      <a:round/>
+                      <a:headEnd type="none" w="med" len="med"/>
+                      <a:tailEnd type="none" w="med" len="med"/>
                     </a:lnT>
                     <a:lnB w="9525">
                       <a:solidFill>
@@ -13478,29 +15653,27 @@
                 </a:tc>
                 <a:tc>
                   <a:txBody>
-                    <a:bodyPr wrap="square"/>
+                    <a:bodyPr/>
                     <a:lstStyle/>
                     <a:p>
-                      <a:r>
-                        <a:rPr sz="1050">
-                          <a:solidFill>
-                            <a:srgbClr val="1B2430"/>
-                          </a:solidFill>
-                          <a:latin typeface="Segoe UI"/>
-                        </a:rPr>
-                        <a:t/>
-                      </a:r>
+                      <a:endParaRPr/>
                     </a:p>
                   </a:txBody>
-                  <a:tcPr marL="73152" marR="73152" marT="36576" marB="36576" anchor="t">
+                  <a:tcPr marL="73152" marR="73152" marT="36576" marB="36576">
                     <a:lnL w="0">
                       <a:noFill/>
                     </a:lnL>
                     <a:lnR w="0">
                       <a:noFill/>
                     </a:lnR>
-                    <a:lnT w="0">
-                      <a:noFill/>
+                    <a:lnT w="9525" cap="flat" cmpd="sng" algn="ctr">
+                      <a:solidFill>
+                        <a:srgbClr val="C9CED6"/>
+                      </a:solidFill>
+                      <a:prstDash val="solid"/>
+                      <a:round/>
+                      <a:headEnd type="none" w="med" len="med"/>
+                      <a:tailEnd type="none" w="med" len="med"/>
                     </a:lnT>
                     <a:lnB w="9525">
                       <a:solidFill>
@@ -13512,11 +15685,16 @@
                     </a:solidFill>
                   </a:tcPr>
                 </a:tc>
+                <a:extLst>
+                  <a:ext uri="{0D108BD9-81ED-4DB2-BD59-A6C34878D82A}">
+                    <a16:rowId xmlns:a16="http://schemas.microsoft.com/office/drawing/2014/main" val="10005"/>
+                  </a:ext>
+                </a:extLst>
               </a:tr>
               <a:tr h="292608">
                 <a:tc>
                   <a:txBody>
-                    <a:bodyPr wrap="square"/>
+                    <a:bodyPr/>
                     <a:lstStyle/>
                     <a:p>
                       <a:r>
@@ -13530,15 +15708,21 @@
                       </a:r>
                     </a:p>
                   </a:txBody>
-                  <a:tcPr marL="73152" marR="73152" marT="36576" marB="36576" anchor="t">
+                  <a:tcPr marL="73152" marR="73152" marT="36576" marB="36576">
                     <a:lnL w="0">
                       <a:noFill/>
                     </a:lnL>
                     <a:lnR w="0">
                       <a:noFill/>
                     </a:lnR>
-                    <a:lnT w="0">
-                      <a:noFill/>
+                    <a:lnT w="9525" cap="flat" cmpd="sng" algn="ctr">
+                      <a:solidFill>
+                        <a:srgbClr val="C9CED6"/>
+                      </a:solidFill>
+                      <a:prstDash val="solid"/>
+                      <a:round/>
+                      <a:headEnd type="none" w="med" len="med"/>
+                      <a:tailEnd type="none" w="med" len="med"/>
                     </a:lnT>
                     <a:lnB w="9525">
                       <a:solidFill>
@@ -13552,7 +15736,7 @@
                 </a:tc>
                 <a:tc>
                   <a:txBody>
-                    <a:bodyPr wrap="square"/>
+                    <a:bodyPr/>
                     <a:lstStyle/>
                     <a:p>
                       <a:r>
@@ -13566,15 +15750,21 @@
                       </a:r>
                     </a:p>
                   </a:txBody>
-                  <a:tcPr marL="73152" marR="73152" marT="36576" marB="36576" anchor="t">
+                  <a:tcPr marL="73152" marR="73152" marT="36576" marB="36576">
                     <a:lnL w="0">
                       <a:noFill/>
                     </a:lnL>
                     <a:lnR w="0">
                       <a:noFill/>
                     </a:lnR>
-                    <a:lnT w="0">
-                      <a:noFill/>
+                    <a:lnT w="9525" cap="flat" cmpd="sng" algn="ctr">
+                      <a:solidFill>
+                        <a:srgbClr val="C9CED6"/>
+                      </a:solidFill>
+                      <a:prstDash val="solid"/>
+                      <a:round/>
+                      <a:headEnd type="none" w="med" len="med"/>
+                      <a:tailEnd type="none" w="med" len="med"/>
                     </a:lnT>
                     <a:lnB w="9525">
                       <a:solidFill>
@@ -13588,7 +15778,7 @@
                 </a:tc>
                 <a:tc>
                   <a:txBody>
-                    <a:bodyPr wrap="square"/>
+                    <a:bodyPr/>
                     <a:lstStyle/>
                     <a:p>
                       <a:r>
@@ -13602,15 +15792,21 @@
                       </a:r>
                     </a:p>
                   </a:txBody>
-                  <a:tcPr marL="73152" marR="73152" marT="36576" marB="36576" anchor="t">
+                  <a:tcPr marL="73152" marR="73152" marT="36576" marB="36576">
                     <a:lnL w="0">
                       <a:noFill/>
                     </a:lnL>
                     <a:lnR w="0">
                       <a:noFill/>
                     </a:lnR>
-                    <a:lnT w="0">
-                      <a:noFill/>
+                    <a:lnT w="9525" cap="flat" cmpd="sng" algn="ctr">
+                      <a:solidFill>
+                        <a:srgbClr val="C9CED6"/>
+                      </a:solidFill>
+                      <a:prstDash val="solid"/>
+                      <a:round/>
+                      <a:headEnd type="none" w="med" len="med"/>
+                      <a:tailEnd type="none" w="med" len="med"/>
                     </a:lnT>
                     <a:lnB w="9525">
                       <a:solidFill>
@@ -13624,7 +15820,7 @@
                 </a:tc>
                 <a:tc>
                   <a:txBody>
-                    <a:bodyPr wrap="square"/>
+                    <a:bodyPr/>
                     <a:lstStyle/>
                     <a:p>
                       <a:r>
@@ -13638,15 +15834,21 @@
                       </a:r>
                     </a:p>
                   </a:txBody>
-                  <a:tcPr marL="73152" marR="73152" marT="36576" marB="36576" anchor="t">
+                  <a:tcPr marL="73152" marR="73152" marT="36576" marB="36576">
                     <a:lnL w="0">
                       <a:noFill/>
                     </a:lnL>
                     <a:lnR w="0">
                       <a:noFill/>
                     </a:lnR>
-                    <a:lnT w="0">
-                      <a:noFill/>
+                    <a:lnT w="9525" cap="flat" cmpd="sng" algn="ctr">
+                      <a:solidFill>
+                        <a:srgbClr val="C9CED6"/>
+                      </a:solidFill>
+                      <a:prstDash val="solid"/>
+                      <a:round/>
+                      <a:headEnd type="none" w="med" len="med"/>
+                      <a:tailEnd type="none" w="med" len="med"/>
                     </a:lnT>
                     <a:lnB w="9525">
                       <a:solidFill>
@@ -13658,11 +15860,16 @@
                     </a:solidFill>
                   </a:tcPr>
                 </a:tc>
+                <a:extLst>
+                  <a:ext uri="{0D108BD9-81ED-4DB2-BD59-A6C34878D82A}">
+                    <a16:rowId xmlns:a16="http://schemas.microsoft.com/office/drawing/2014/main" val="10006"/>
+                  </a:ext>
+                </a:extLst>
               </a:tr>
               <a:tr h="292608">
                 <a:tc>
                   <a:txBody>
-                    <a:bodyPr wrap="square"/>
+                    <a:bodyPr/>
                     <a:lstStyle/>
                     <a:p>
                       <a:r>
@@ -13676,15 +15883,21 @@
                       </a:r>
                     </a:p>
                   </a:txBody>
-                  <a:tcPr marL="73152" marR="73152" marT="36576" marB="36576" anchor="t">
+                  <a:tcPr marL="73152" marR="73152" marT="36576" marB="36576">
                     <a:lnL w="0">
                       <a:noFill/>
                     </a:lnL>
                     <a:lnR w="0">
                       <a:noFill/>
                     </a:lnR>
-                    <a:lnT w="0">
-                      <a:noFill/>
+                    <a:lnT w="9525" cap="flat" cmpd="sng" algn="ctr">
+                      <a:solidFill>
+                        <a:srgbClr val="C9CED6"/>
+                      </a:solidFill>
+                      <a:prstDash val="solid"/>
+                      <a:round/>
+                      <a:headEnd type="none" w="med" len="med"/>
+                      <a:tailEnd type="none" w="med" len="med"/>
                     </a:lnT>
                     <a:lnB w="9525">
                       <a:solidFill>
@@ -13698,7 +15911,7 @@
                 </a:tc>
                 <a:tc>
                   <a:txBody>
-                    <a:bodyPr wrap="square"/>
+                    <a:bodyPr/>
                     <a:lstStyle/>
                     <a:p>
                       <a:r>
@@ -13712,15 +15925,21 @@
                       </a:r>
                     </a:p>
                   </a:txBody>
-                  <a:tcPr marL="73152" marR="73152" marT="36576" marB="36576" anchor="t">
+                  <a:tcPr marL="73152" marR="73152" marT="36576" marB="36576">
                     <a:lnL w="0">
                       <a:noFill/>
                     </a:lnL>
                     <a:lnR w="0">
                       <a:noFill/>
                     </a:lnR>
-                    <a:lnT w="0">
-                      <a:noFill/>
+                    <a:lnT w="9525" cap="flat" cmpd="sng" algn="ctr">
+                      <a:solidFill>
+                        <a:srgbClr val="C9CED6"/>
+                      </a:solidFill>
+                      <a:prstDash val="solid"/>
+                      <a:round/>
+                      <a:headEnd type="none" w="med" len="med"/>
+                      <a:tailEnd type="none" w="med" len="med"/>
                     </a:lnT>
                     <a:lnB w="9525">
                       <a:solidFill>
@@ -13734,7 +15953,7 @@
                 </a:tc>
                 <a:tc>
                   <a:txBody>
-                    <a:bodyPr wrap="square"/>
+                    <a:bodyPr/>
                     <a:lstStyle/>
                     <a:p>
                       <a:r>
@@ -13748,15 +15967,21 @@
                       </a:r>
                     </a:p>
                   </a:txBody>
-                  <a:tcPr marL="73152" marR="73152" marT="36576" marB="36576" anchor="t">
+                  <a:tcPr marL="73152" marR="73152" marT="36576" marB="36576">
                     <a:lnL w="0">
                       <a:noFill/>
                     </a:lnL>
                     <a:lnR w="0">
                       <a:noFill/>
                     </a:lnR>
-                    <a:lnT w="0">
-                      <a:noFill/>
+                    <a:lnT w="9525" cap="flat" cmpd="sng" algn="ctr">
+                      <a:solidFill>
+                        <a:srgbClr val="C9CED6"/>
+                      </a:solidFill>
+                      <a:prstDash val="solid"/>
+                      <a:round/>
+                      <a:headEnd type="none" w="med" len="med"/>
+                      <a:tailEnd type="none" w="med" len="med"/>
                     </a:lnT>
                     <a:lnB w="9525">
                       <a:solidFill>
@@ -13770,7 +15995,7 @@
                 </a:tc>
                 <a:tc>
                   <a:txBody>
-                    <a:bodyPr wrap="square"/>
+                    <a:bodyPr/>
                     <a:lstStyle/>
                     <a:p>
                       <a:r>
@@ -13784,15 +16009,21 @@
                       </a:r>
                     </a:p>
                   </a:txBody>
-                  <a:tcPr marL="73152" marR="73152" marT="36576" marB="36576" anchor="t">
+                  <a:tcPr marL="73152" marR="73152" marT="36576" marB="36576">
                     <a:lnL w="0">
                       <a:noFill/>
                     </a:lnL>
                     <a:lnR w="0">
                       <a:noFill/>
                     </a:lnR>
-                    <a:lnT w="0">
-                      <a:noFill/>
+                    <a:lnT w="9525" cap="flat" cmpd="sng" algn="ctr">
+                      <a:solidFill>
+                        <a:srgbClr val="C9CED6"/>
+                      </a:solidFill>
+                      <a:prstDash val="solid"/>
+                      <a:round/>
+                      <a:headEnd type="none" w="med" len="med"/>
+                      <a:tailEnd type="none" w="med" len="med"/>
                     </a:lnT>
                     <a:lnB w="9525">
                       <a:solidFill>
@@ -13804,11 +16035,16 @@
                     </a:solidFill>
                   </a:tcPr>
                 </a:tc>
+                <a:extLst>
+                  <a:ext uri="{0D108BD9-81ED-4DB2-BD59-A6C34878D82A}">
+                    <a16:rowId xmlns:a16="http://schemas.microsoft.com/office/drawing/2014/main" val="10007"/>
+                  </a:ext>
+                </a:extLst>
               </a:tr>
               <a:tr h="292608">
                 <a:tc>
                   <a:txBody>
-                    <a:bodyPr wrap="square"/>
+                    <a:bodyPr/>
                     <a:lstStyle/>
                     <a:p>
                       <a:r>
@@ -13822,15 +16058,21 @@
                       </a:r>
                     </a:p>
                   </a:txBody>
-                  <a:tcPr marL="73152" marR="73152" marT="36576" marB="36576" anchor="t">
+                  <a:tcPr marL="73152" marR="73152" marT="36576" marB="36576">
                     <a:lnL w="0">
                       <a:noFill/>
                     </a:lnL>
                     <a:lnR w="0">
                       <a:noFill/>
                     </a:lnR>
-                    <a:lnT w="0">
-                      <a:noFill/>
+                    <a:lnT w="9525" cap="flat" cmpd="sng" algn="ctr">
+                      <a:solidFill>
+                        <a:srgbClr val="C9CED6"/>
+                      </a:solidFill>
+                      <a:prstDash val="solid"/>
+                      <a:round/>
+                      <a:headEnd type="none" w="med" len="med"/>
+                      <a:tailEnd type="none" w="med" len="med"/>
                     </a:lnT>
                     <a:lnB w="9525">
                       <a:solidFill>
@@ -13844,7 +16086,7 @@
                 </a:tc>
                 <a:tc>
                   <a:txBody>
-                    <a:bodyPr wrap="square"/>
+                    <a:bodyPr/>
                     <a:lstStyle/>
                     <a:p>
                       <a:r>
@@ -13858,15 +16100,21 @@
                       </a:r>
                     </a:p>
                   </a:txBody>
-                  <a:tcPr marL="73152" marR="73152" marT="36576" marB="36576" anchor="t">
+                  <a:tcPr marL="73152" marR="73152" marT="36576" marB="36576">
                     <a:lnL w="0">
                       <a:noFill/>
                     </a:lnL>
                     <a:lnR w="0">
                       <a:noFill/>
                     </a:lnR>
-                    <a:lnT w="0">
-                      <a:noFill/>
+                    <a:lnT w="9525" cap="flat" cmpd="sng" algn="ctr">
+                      <a:solidFill>
+                        <a:srgbClr val="C9CED6"/>
+                      </a:solidFill>
+                      <a:prstDash val="solid"/>
+                      <a:round/>
+                      <a:headEnd type="none" w="med" len="med"/>
+                      <a:tailEnd type="none" w="med" len="med"/>
                     </a:lnT>
                     <a:lnB w="9525">
                       <a:solidFill>
@@ -13880,7 +16128,7 @@
                 </a:tc>
                 <a:tc>
                   <a:txBody>
-                    <a:bodyPr wrap="square"/>
+                    <a:bodyPr/>
                     <a:lstStyle/>
                     <a:p>
                       <a:r>
@@ -13894,15 +16142,21 @@
                       </a:r>
                     </a:p>
                   </a:txBody>
-                  <a:tcPr marL="73152" marR="73152" marT="36576" marB="36576" anchor="t">
+                  <a:tcPr marL="73152" marR="73152" marT="36576" marB="36576">
                     <a:lnL w="0">
                       <a:noFill/>
                     </a:lnL>
                     <a:lnR w="0">
                       <a:noFill/>
                     </a:lnR>
-                    <a:lnT w="0">
-                      <a:noFill/>
+                    <a:lnT w="9525" cap="flat" cmpd="sng" algn="ctr">
+                      <a:solidFill>
+                        <a:srgbClr val="C9CED6"/>
+                      </a:solidFill>
+                      <a:prstDash val="solid"/>
+                      <a:round/>
+                      <a:headEnd type="none" w="med" len="med"/>
+                      <a:tailEnd type="none" w="med" len="med"/>
                     </a:lnT>
                     <a:lnB w="9525">
                       <a:solidFill>
@@ -13916,7 +16170,7 @@
                 </a:tc>
                 <a:tc>
                   <a:txBody>
-                    <a:bodyPr wrap="square"/>
+                    <a:bodyPr/>
                     <a:lstStyle/>
                     <a:p>
                       <a:r>
@@ -13930,15 +16184,21 @@
                       </a:r>
                     </a:p>
                   </a:txBody>
-                  <a:tcPr marL="73152" marR="73152" marT="36576" marB="36576" anchor="t">
+                  <a:tcPr marL="73152" marR="73152" marT="36576" marB="36576">
                     <a:lnL w="0">
                       <a:noFill/>
                     </a:lnL>
                     <a:lnR w="0">
                       <a:noFill/>
                     </a:lnR>
-                    <a:lnT w="0">
-                      <a:noFill/>
+                    <a:lnT w="9525" cap="flat" cmpd="sng" algn="ctr">
+                      <a:solidFill>
+                        <a:srgbClr val="C9CED6"/>
+                      </a:solidFill>
+                      <a:prstDash val="solid"/>
+                      <a:round/>
+                      <a:headEnd type="none" w="med" len="med"/>
+                      <a:tailEnd type="none" w="med" len="med"/>
                     </a:lnT>
                     <a:lnB w="9525">
                       <a:solidFill>
@@ -13950,11 +16210,16 @@
                     </a:solidFill>
                   </a:tcPr>
                 </a:tc>
+                <a:extLst>
+                  <a:ext uri="{0D108BD9-81ED-4DB2-BD59-A6C34878D82A}">
+                    <a16:rowId xmlns:a16="http://schemas.microsoft.com/office/drawing/2014/main" val="10008"/>
+                  </a:ext>
+                </a:extLst>
               </a:tr>
               <a:tr h="292608">
                 <a:tc>
                   <a:txBody>
-                    <a:bodyPr wrap="square"/>
+                    <a:bodyPr/>
                     <a:lstStyle/>
                     <a:p>
                       <a:r>
@@ -13968,15 +16233,21 @@
                       </a:r>
                     </a:p>
                   </a:txBody>
-                  <a:tcPr marL="73152" marR="73152" marT="36576" marB="36576" anchor="t">
+                  <a:tcPr marL="73152" marR="73152" marT="36576" marB="36576">
                     <a:lnL w="0">
                       <a:noFill/>
                     </a:lnL>
                     <a:lnR w="0">
                       <a:noFill/>
                     </a:lnR>
-                    <a:lnT w="0">
-                      <a:noFill/>
+                    <a:lnT w="9525" cap="flat" cmpd="sng" algn="ctr">
+                      <a:solidFill>
+                        <a:srgbClr val="C9CED6"/>
+                      </a:solidFill>
+                      <a:prstDash val="solid"/>
+                      <a:round/>
+                      <a:headEnd type="none" w="med" len="med"/>
+                      <a:tailEnd type="none" w="med" len="med"/>
                     </a:lnT>
                     <a:lnB w="9525">
                       <a:solidFill>
@@ -13990,7 +16261,7 @@
                 </a:tc>
                 <a:tc>
                   <a:txBody>
-                    <a:bodyPr wrap="square"/>
+                    <a:bodyPr/>
                     <a:lstStyle/>
                     <a:p>
                       <a:r>
@@ -14004,15 +16275,21 @@
                       </a:r>
                     </a:p>
                   </a:txBody>
-                  <a:tcPr marL="73152" marR="73152" marT="36576" marB="36576" anchor="t">
+                  <a:tcPr marL="73152" marR="73152" marT="36576" marB="36576">
                     <a:lnL w="0">
                       <a:noFill/>
                     </a:lnL>
                     <a:lnR w="0">
                       <a:noFill/>
                     </a:lnR>
-                    <a:lnT w="0">
-                      <a:noFill/>
+                    <a:lnT w="9525" cap="flat" cmpd="sng" algn="ctr">
+                      <a:solidFill>
+                        <a:srgbClr val="C9CED6"/>
+                      </a:solidFill>
+                      <a:prstDash val="solid"/>
+                      <a:round/>
+                      <a:headEnd type="none" w="med" len="med"/>
+                      <a:tailEnd type="none" w="med" len="med"/>
                     </a:lnT>
                     <a:lnB w="9525">
                       <a:solidFill>
@@ -14026,7 +16303,7 @@
                 </a:tc>
                 <a:tc>
                   <a:txBody>
-                    <a:bodyPr wrap="square"/>
+                    <a:bodyPr/>
                     <a:lstStyle/>
                     <a:p>
                       <a:r>
@@ -14040,15 +16317,21 @@
                       </a:r>
                     </a:p>
                   </a:txBody>
-                  <a:tcPr marL="73152" marR="73152" marT="36576" marB="36576" anchor="t">
+                  <a:tcPr marL="73152" marR="73152" marT="36576" marB="36576">
                     <a:lnL w="0">
                       <a:noFill/>
                     </a:lnL>
                     <a:lnR w="0">
                       <a:noFill/>
                     </a:lnR>
-                    <a:lnT w="0">
-                      <a:noFill/>
+                    <a:lnT w="9525" cap="flat" cmpd="sng" algn="ctr">
+                      <a:solidFill>
+                        <a:srgbClr val="C9CED6"/>
+                      </a:solidFill>
+                      <a:prstDash val="solid"/>
+                      <a:round/>
+                      <a:headEnd type="none" w="med" len="med"/>
+                      <a:tailEnd type="none" w="med" len="med"/>
                     </a:lnT>
                     <a:lnB w="9525">
                       <a:solidFill>
@@ -14062,7 +16345,7 @@
                 </a:tc>
                 <a:tc>
                   <a:txBody>
-                    <a:bodyPr wrap="square"/>
+                    <a:bodyPr/>
                     <a:lstStyle/>
                     <a:p>
                       <a:r>
@@ -14076,15 +16359,21 @@
                       </a:r>
                     </a:p>
                   </a:txBody>
-                  <a:tcPr marL="73152" marR="73152" marT="36576" marB="36576" anchor="t">
+                  <a:tcPr marL="73152" marR="73152" marT="36576" marB="36576">
                     <a:lnL w="0">
                       <a:noFill/>
                     </a:lnL>
                     <a:lnR w="0">
                       <a:noFill/>
                     </a:lnR>
-                    <a:lnT w="0">
-                      <a:noFill/>
+                    <a:lnT w="9525" cap="flat" cmpd="sng" algn="ctr">
+                      <a:solidFill>
+                        <a:srgbClr val="C9CED6"/>
+                      </a:solidFill>
+                      <a:prstDash val="solid"/>
+                      <a:round/>
+                      <a:headEnd type="none" w="med" len="med"/>
+                      <a:tailEnd type="none" w="med" len="med"/>
                     </a:lnT>
                     <a:lnB w="9525">
                       <a:solidFill>
@@ -14096,6 +16385,11 @@
                     </a:solidFill>
                   </a:tcPr>
                 </a:tc>
+                <a:extLst>
+                  <a:ext uri="{0D108BD9-81ED-4DB2-BD59-A6C34878D82A}">
+                    <a16:rowId xmlns:a16="http://schemas.microsoft.com/office/drawing/2014/main" val="10009"/>
+                  </a:ext>
+                </a:extLst>
               </a:tr>
             </a:tbl>
           </a:graphicData>
@@ -14110,7 +16404,7 @@
 </file>
 
 <file path=ppt/slides/slide6.xml><?xml version="1.0" encoding="utf-8"?>
-<p:sld xmlns:a="http://schemas.openxmlformats.org/drawingml/2006/main" xmlns:p="http://schemas.openxmlformats.org/presentationml/2006/main" xmlns:r="http://schemas.openxmlformats.org/officeDocument/2006/relationships">
+<p:sld xmlns:a="http://schemas.openxmlformats.org/drawingml/2006/main" xmlns:r="http://schemas.openxmlformats.org/officeDocument/2006/relationships" xmlns:p="http://schemas.openxmlformats.org/presentationml/2006/main">
   <p:cSld>
     <p:spTree>
       <p:nvGrpSpPr>
@@ -14118,7 +16412,14 @@
         <p:cNvGrpSpPr/>
         <p:nvPr/>
       </p:nvGrpSpPr>
-      <p:grpSpPr/>
+      <p:grpSpPr>
+        <a:xfrm>
+          <a:off x="0" y="0"/>
+          <a:ext cx="0" cy="0"/>
+          <a:chOff x="0" y="0"/>
+          <a:chExt cx="0" cy="0"/>
+        </a:xfrm>
+      </p:grpSpPr>
       <p:sp>
         <p:nvSpPr>
           <p:cNvPr id="2" name="TextBox 1"/>
@@ -14136,7 +16437,7 @@
           <a:noFill/>
         </p:spPr>
         <p:txBody>
-          <a:bodyPr wrap="square" anchor="b" lIns="0" rIns="0" tIns="0" bIns="0"/>
+          <a:bodyPr wrap="square" lIns="0" tIns="0" rIns="0" bIns="0" anchor="b"/>
           <a:lstStyle/>
           <a:p>
             <a:pPr algn="l">
@@ -14215,7 +16516,7 @@
           <a:noFill/>
         </p:spPr>
         <p:txBody>
-          <a:bodyPr wrap="square" anchor="t" lIns="0" rIns="0" tIns="0" bIns="0"/>
+          <a:bodyPr wrap="square" lIns="0" tIns="0" rIns="0" bIns="0" anchor="t"/>
           <a:lstStyle/>
           <a:p>
             <a:pPr algn="l">
@@ -14252,7 +16553,7 @@
           <a:noFill/>
         </p:spPr>
         <p:txBody>
-          <a:bodyPr wrap="square" anchor="t" lIns="0" rIns="0" tIns="0" bIns="0"/>
+          <a:bodyPr wrap="square" lIns="0" tIns="0" rIns="0" bIns="0" anchor="t"/>
           <a:lstStyle/>
           <a:p>
             <a:pPr algn="r">
@@ -14289,7 +16590,7 @@
           <a:noFill/>
         </p:spPr>
         <p:txBody>
-          <a:bodyPr wrap="square" anchor="t" lIns="0" rIns="0" tIns="0" bIns="0"/>
+          <a:bodyPr wrap="square" lIns="0" tIns="0" rIns="0" bIns="0" anchor="t"/>
           <a:lstStyle/>
           <a:p>
             <a:pPr algn="l">
@@ -14331,7 +16632,7 @@
           </a:ln>
         </p:spPr>
         <p:txBody>
-          <a:bodyPr rtlCol="0" anchor="ctr" wrap="square" lIns="109728" rIns="109728"/>
+          <a:bodyPr wrap="square" lIns="109728" rIns="109728" rtlCol="0" anchor="ctr"/>
           <a:lstStyle/>
           <a:p>
             <a:pPr algn="l">
@@ -14389,7 +16690,7 @@
           </a:ln>
         </p:spPr>
         <p:txBody>
-          <a:bodyPr rtlCol="0" anchor="ctr" wrap="square" lIns="109728" rIns="109728"/>
+          <a:bodyPr wrap="square" lIns="109728" rIns="109728" rtlCol="0" anchor="ctr"/>
           <a:lstStyle/>
           <a:p>
             <a:pPr algn="l">
@@ -14447,7 +16748,7 @@
           </a:ln>
         </p:spPr>
         <p:txBody>
-          <a:bodyPr rtlCol="0" anchor="ctr" wrap="square" lIns="109728" rIns="109728"/>
+          <a:bodyPr wrap="square" lIns="109728" rIns="109728" rtlCol="0" anchor="ctr"/>
           <a:lstStyle/>
           <a:p>
             <a:pPr algn="l">
@@ -14500,7 +16801,7 @@
           <a:noFill/>
         </p:spPr>
         <p:txBody>
-          <a:bodyPr wrap="square" anchor="t" lIns="0" rIns="0" tIns="0" bIns="0"/>
+          <a:bodyPr wrap="square" lIns="0" tIns="0" rIns="0" bIns="0" anchor="t"/>
           <a:lstStyle/>
           <a:p>
             <a:pPr algn="l">
@@ -14537,7 +16838,7 @@
           <a:noFill/>
         </p:spPr>
         <p:txBody>
-          <a:bodyPr wrap="square" anchor="t" lIns="0" rIns="0" tIns="0" bIns="0"/>
+          <a:bodyPr wrap="square" lIns="0" tIns="0" rIns="0" bIns="0" anchor="t"/>
           <a:lstStyle/>
           <a:p>
             <a:pPr algn="l">
@@ -14670,7 +16971,7 @@
           <a:noFill/>
         </p:spPr>
         <p:txBody>
-          <a:bodyPr wrap="square" anchor="t" lIns="0" rIns="0" tIns="0" bIns="0"/>
+          <a:bodyPr wrap="square" lIns="0" tIns="0" rIns="0" bIns="0" anchor="t"/>
           <a:lstStyle/>
           <a:p>
             <a:pPr algn="l">
@@ -14803,7 +17104,7 @@
           <a:noFill/>
         </p:spPr>
         <p:txBody>
-          <a:bodyPr wrap="square" anchor="t" lIns="0" rIns="0" tIns="0" bIns="0"/>
+          <a:bodyPr wrap="square" lIns="0" tIns="0" rIns="0" bIns="0" anchor="t"/>
           <a:lstStyle/>
           <a:p>
             <a:pPr algn="l">
@@ -14845,7 +17146,7 @@
           </a:ln>
         </p:spPr>
         <p:txBody>
-          <a:bodyPr rtlCol="0" anchor="ctr" wrap="square" lIns="73152" rIns="73152"/>
+          <a:bodyPr wrap="square" lIns="73152" rIns="73152" rtlCol="0" anchor="ctr"/>
           <a:lstStyle/>
           <a:p>
             <a:pPr algn="ctr">
@@ -14905,7 +17206,7 @@
           </a:ln>
         </p:spPr>
         <p:txBody>
-          <a:bodyPr rtlCol="0" anchor="ctr" wrap="square" lIns="73152" rIns="73152"/>
+          <a:bodyPr wrap="square" lIns="73152" rIns="73152" rtlCol="0" anchor="ctr"/>
           <a:lstStyle/>
           <a:p>
             <a:pPr algn="ctr">
@@ -14988,7 +17289,7 @@
           </a:ln>
         </p:spPr>
         <p:txBody>
-          <a:bodyPr rtlCol="0" anchor="ctr" wrap="square" lIns="73152" rIns="73152"/>
+          <a:bodyPr wrap="square" lIns="73152" rIns="73152" rtlCol="0" anchor="ctr"/>
           <a:lstStyle/>
           <a:p>
             <a:pPr algn="ctr">
@@ -15066,7 +17367,7 @@
           <a:noFill/>
         </p:spPr>
         <p:txBody>
-          <a:bodyPr wrap="square" anchor="t" lIns="0" rIns="0" tIns="0" bIns="0"/>
+          <a:bodyPr wrap="square" lIns="0" tIns="0" rIns="0" bIns="0" anchor="t"/>
           <a:lstStyle/>
           <a:p>
             <a:pPr algn="l">
@@ -15108,7 +17409,7 @@
           </a:ln>
         </p:spPr>
         <p:txBody>
-          <a:bodyPr rtlCol="0" anchor="ctr" wrap="square" lIns="27432" rIns="27432" tIns="27432" bIns="27432"/>
+          <a:bodyPr wrap="square" lIns="27432" tIns="27432" rIns="27432" bIns="27432" rtlCol="0" anchor="ctr"/>
           <a:lstStyle/>
           <a:p>
             <a:pPr algn="ctr">
@@ -15150,7 +17451,7 @@
           </a:ln>
         </p:spPr>
         <p:txBody>
-          <a:bodyPr rtlCol="0" anchor="ctr" wrap="square" lIns="27432" rIns="27432" tIns="27432" bIns="27432"/>
+          <a:bodyPr wrap="square" lIns="27432" tIns="27432" rIns="27432" bIns="27432" rtlCol="0" anchor="ctr"/>
           <a:lstStyle/>
           <a:p>
             <a:pPr algn="ctr">
@@ -15192,7 +17493,7 @@
           </a:ln>
         </p:spPr>
         <p:txBody>
-          <a:bodyPr rtlCol="0" anchor="ctr" wrap="square" lIns="27432" rIns="27432" tIns="27432" bIns="27432"/>
+          <a:bodyPr wrap="square" lIns="27432" tIns="27432" rIns="27432" bIns="27432" rtlCol="0" anchor="ctr"/>
           <a:lstStyle/>
           <a:p>
             <a:pPr algn="ctr">
@@ -15234,7 +17535,7 @@
           </a:ln>
         </p:spPr>
         <p:txBody>
-          <a:bodyPr rtlCol="0" anchor="ctr" wrap="square" lIns="27432" rIns="27432" tIns="27432" bIns="27432"/>
+          <a:bodyPr wrap="square" lIns="27432" tIns="27432" rIns="27432" bIns="27432" rtlCol="0" anchor="ctr"/>
           <a:lstStyle/>
           <a:p>
             <a:pPr algn="ctr">
@@ -15276,7 +17577,7 @@
           </a:ln>
         </p:spPr>
         <p:txBody>
-          <a:bodyPr rtlCol="0" anchor="ctr" wrap="square" lIns="27432" rIns="27432" tIns="27432" bIns="27432"/>
+          <a:bodyPr wrap="square" lIns="27432" tIns="27432" rIns="27432" bIns="27432" rtlCol="0" anchor="ctr"/>
           <a:lstStyle/>
           <a:p>
             <a:pPr algn="ctr">
@@ -15318,7 +17619,7 @@
           </a:ln>
         </p:spPr>
         <p:txBody>
-          <a:bodyPr rtlCol="0" anchor="ctr" wrap="square" lIns="27432" rIns="27432" tIns="27432" bIns="27432"/>
+          <a:bodyPr wrap="square" lIns="27432" tIns="27432" rIns="27432" bIns="27432" rtlCol="0" anchor="ctr"/>
           <a:lstStyle/>
           <a:p>
             <a:pPr algn="ctr">
@@ -15360,7 +17661,7 @@
           </a:ln>
         </p:spPr>
         <p:txBody>
-          <a:bodyPr rtlCol="0" anchor="ctr" wrap="square" lIns="27432" rIns="27432" tIns="27432" bIns="27432"/>
+          <a:bodyPr wrap="square" lIns="27432" tIns="27432" rIns="27432" bIns="27432" rtlCol="0" anchor="ctr"/>
           <a:lstStyle/>
           <a:p>
             <a:pPr algn="ctr">
@@ -15402,7 +17703,7 @@
           </a:ln>
         </p:spPr>
         <p:txBody>
-          <a:bodyPr rtlCol="0" anchor="ctr" wrap="square" lIns="27432" rIns="27432" tIns="27432" bIns="27432"/>
+          <a:bodyPr wrap="square" lIns="27432" tIns="27432" rIns="27432" bIns="27432" rtlCol="0" anchor="ctr"/>
           <a:lstStyle/>
           <a:p>
             <a:pPr algn="ctr">
@@ -15439,7 +17740,7 @@
           <a:noFill/>
         </p:spPr>
         <p:txBody>
-          <a:bodyPr wrap="square" anchor="t" lIns="0" rIns="0" tIns="0" bIns="0"/>
+          <a:bodyPr wrap="square" lIns="0" tIns="0" rIns="0" bIns="0" anchor="t"/>
           <a:lstStyle/>
           <a:p>
             <a:pPr algn="l">
@@ -15552,7 +17853,7 @@
 </file>
 
 <file path=ppt/slides/slide7.xml><?xml version="1.0" encoding="utf-8"?>
-<p:sld xmlns:a="http://schemas.openxmlformats.org/drawingml/2006/main" xmlns:p="http://schemas.openxmlformats.org/presentationml/2006/main" xmlns:r="http://schemas.openxmlformats.org/officeDocument/2006/relationships">
+<p:sld xmlns:a="http://schemas.openxmlformats.org/drawingml/2006/main" xmlns:r="http://schemas.openxmlformats.org/officeDocument/2006/relationships" xmlns:p="http://schemas.openxmlformats.org/presentationml/2006/main">
   <p:cSld>
     <p:spTree>
       <p:nvGrpSpPr>
@@ -15560,7 +17861,14 @@
         <p:cNvGrpSpPr/>
         <p:nvPr/>
       </p:nvGrpSpPr>
-      <p:grpSpPr/>
+      <p:grpSpPr>
+        <a:xfrm>
+          <a:off x="0" y="0"/>
+          <a:ext cx="0" cy="0"/>
+          <a:chOff x="0" y="0"/>
+          <a:chExt cx="0" cy="0"/>
+        </a:xfrm>
+      </p:grpSpPr>
       <p:sp>
         <p:nvSpPr>
           <p:cNvPr id="2" name="TextBox 1"/>
@@ -15578,7 +17886,7 @@
           <a:noFill/>
         </p:spPr>
         <p:txBody>
-          <a:bodyPr wrap="square" anchor="b" lIns="0" rIns="0" tIns="0" bIns="0"/>
+          <a:bodyPr wrap="square" lIns="0" tIns="0" rIns="0" bIns="0" anchor="b"/>
           <a:lstStyle/>
           <a:p>
             <a:pPr algn="l">
@@ -15657,7 +17965,7 @@
           <a:noFill/>
         </p:spPr>
         <p:txBody>
-          <a:bodyPr wrap="square" anchor="t" lIns="0" rIns="0" tIns="0" bIns="0"/>
+          <a:bodyPr wrap="square" lIns="0" tIns="0" rIns="0" bIns="0" anchor="t"/>
           <a:lstStyle/>
           <a:p>
             <a:pPr algn="l">
@@ -15694,7 +18002,7 @@
           <a:noFill/>
         </p:spPr>
         <p:txBody>
-          <a:bodyPr wrap="square" anchor="t" lIns="0" rIns="0" tIns="0" bIns="0"/>
+          <a:bodyPr wrap="square" lIns="0" tIns="0" rIns="0" bIns="0" anchor="t"/>
           <a:lstStyle/>
           <a:p>
             <a:pPr algn="r">
@@ -15736,7 +18044,7 @@
           </a:ln>
         </p:spPr>
         <p:txBody>
-          <a:bodyPr rtlCol="0" anchor="ctr" wrap="square" lIns="73152" rIns="73152"/>
+          <a:bodyPr wrap="square" lIns="73152" rIns="73152" rtlCol="0" anchor="ctr"/>
           <a:lstStyle/>
           <a:p>
             <a:pPr algn="ctr">
@@ -15773,7 +18081,7 @@
           <a:noFill/>
         </p:spPr>
         <p:txBody>
-          <a:bodyPr wrap="square" anchor="t" lIns="0" rIns="0" tIns="0" bIns="0"/>
+          <a:bodyPr wrap="square" lIns="0" tIns="0" rIns="0" bIns="0" anchor="t"/>
           <a:lstStyle/>
           <a:p>
             <a:pPr algn="l">
@@ -15810,7 +18118,7 @@
           <a:noFill/>
         </p:spPr>
         <p:txBody>
-          <a:bodyPr wrap="square" anchor="t" lIns="0" rIns="0" tIns="0" bIns="0"/>
+          <a:bodyPr wrap="square" lIns="0" tIns="0" rIns="0" bIns="0" anchor="t"/>
           <a:lstStyle/>
           <a:p>
             <a:pPr algn="l">
@@ -15847,7 +18155,7 @@
           <a:noFill/>
         </p:spPr>
         <p:txBody>
-          <a:bodyPr wrap="square" anchor="t" lIns="0" rIns="0" tIns="0" bIns="0"/>
+          <a:bodyPr wrap="square" lIns="0" tIns="0" rIns="0" bIns="0" anchor="t"/>
           <a:lstStyle/>
           <a:p>
             <a:pPr algn="l">
@@ -15889,7 +18197,7 @@
           </a:ln>
         </p:spPr>
         <p:txBody>
-          <a:bodyPr rtlCol="0" anchor="ctr" wrap="square" lIns="109728" rIns="109728"/>
+          <a:bodyPr wrap="square" lIns="109728" rIns="109728" rtlCol="0" anchor="ctr"/>
           <a:lstStyle/>
           <a:p>
             <a:pPr algn="l">
@@ -15971,7 +18279,7 @@
           </a:ln>
         </p:spPr>
         <p:txBody>
-          <a:bodyPr rtlCol="0" anchor="ctr" wrap="square" lIns="109728" rIns="109728"/>
+          <a:bodyPr wrap="square" lIns="109728" rIns="109728" rtlCol="0" anchor="ctr"/>
           <a:lstStyle/>
           <a:p>
             <a:pPr algn="l">
@@ -16053,7 +18361,7 @@
           </a:ln>
         </p:spPr>
         <p:txBody>
-          <a:bodyPr rtlCol="0" anchor="ctr" wrap="square" lIns="109728" rIns="109728"/>
+          <a:bodyPr wrap="square" lIns="109728" rIns="109728" rtlCol="0" anchor="ctr"/>
           <a:lstStyle/>
           <a:p>
             <a:pPr algn="l">
@@ -16135,7 +18443,7 @@
           </a:ln>
         </p:spPr>
         <p:txBody>
-          <a:bodyPr rtlCol="0" anchor="ctr" wrap="square" lIns="109728" rIns="109728"/>
+          <a:bodyPr wrap="square" lIns="109728" rIns="109728" rtlCol="0" anchor="ctr"/>
           <a:lstStyle/>
           <a:p>
             <a:pPr algn="l">
@@ -16217,7 +18525,7 @@
           </a:ln>
         </p:spPr>
         <p:txBody>
-          <a:bodyPr rtlCol="0" anchor="ctr" wrap="square" lIns="109728" rIns="109728"/>
+          <a:bodyPr wrap="square" lIns="109728" rIns="109728" rtlCol="0" anchor="ctr"/>
           <a:lstStyle/>
           <a:p>
             <a:pPr algn="l">
@@ -16300,10 +18608,11 @@
           </a:ln>
         </p:spPr>
         <p:txBody>
-          <a:bodyPr rtlCol="0" anchor="ctr" wrap="square" lIns="73152" rIns="73152"/>
+          <a:bodyPr wrap="square" lIns="73152" rIns="73152" rtlCol="0" anchor="ctr"/>
           <a:lstStyle/>
           <a:p>
             <a:pPr algn="ctr"/>
+            <a:endParaRPr/>
           </a:p>
         </p:txBody>
       </p:sp>
@@ -16329,7 +18638,7 @@
           </a:ln>
         </p:spPr>
         <p:txBody>
-          <a:bodyPr rtlCol="0" anchor="ctr" wrap="square" lIns="109728" rIns="109728"/>
+          <a:bodyPr wrap="square" lIns="109728" rIns="109728" rtlCol="0" anchor="ctr"/>
           <a:lstStyle/>
           <a:p>
             <a:pPr algn="l">
@@ -16387,7 +18696,7 @@
           </a:ln>
         </p:spPr>
         <p:txBody>
-          <a:bodyPr rtlCol="0" anchor="ctr" wrap="square" lIns="109728" rIns="109728"/>
+          <a:bodyPr wrap="square" lIns="109728" rIns="109728" rtlCol="0" anchor="ctr"/>
           <a:lstStyle/>
           <a:p>
             <a:pPr algn="l">
@@ -16445,7 +18754,7 @@
           </a:ln>
         </p:spPr>
         <p:txBody>
-          <a:bodyPr rtlCol="0" anchor="ctr" wrap="square" lIns="109728" rIns="109728"/>
+          <a:bodyPr wrap="square" lIns="109728" rIns="109728" rtlCol="0" anchor="ctr"/>
           <a:lstStyle/>
           <a:p>
             <a:pPr algn="l">
@@ -16503,7 +18812,7 @@
           </a:ln>
         </p:spPr>
         <p:txBody>
-          <a:bodyPr rtlCol="0" anchor="ctr" wrap="square" lIns="109728" rIns="109728"/>
+          <a:bodyPr wrap="square" lIns="109728" rIns="109728" rtlCol="0" anchor="ctr"/>
           <a:lstStyle/>
           <a:p>
             <a:pPr algn="l">
@@ -16581,7 +18890,7 @@
           <a:noFill/>
         </p:spPr>
         <p:txBody>
-          <a:bodyPr wrap="square" anchor="t" lIns="0" rIns="0" tIns="0" bIns="0"/>
+          <a:bodyPr wrap="square" lIns="0" tIns="0" rIns="0" bIns="0" anchor="t"/>
           <a:lstStyle/>
           <a:p>
             <a:pPr algn="l">
@@ -16623,7 +18932,7 @@
           </a:ln>
         </p:spPr>
         <p:txBody>
-          <a:bodyPr rtlCol="0" anchor="ctr" wrap="square"/>
+          <a:bodyPr wrap="square" rtlCol="0" anchor="ctr"/>
           <a:lstStyle/>
           <a:p>
             <a:pPr algn="l">
@@ -16681,7 +18990,7 @@
           </a:ln>
         </p:spPr>
         <p:txBody>
-          <a:bodyPr rtlCol="0" anchor="ctr" wrap="square"/>
+          <a:bodyPr wrap="square" rtlCol="0" anchor="ctr"/>
           <a:lstStyle/>
           <a:p>
             <a:pPr algn="l">
@@ -16739,7 +19048,7 @@
           </a:ln>
         </p:spPr>
         <p:txBody>
-          <a:bodyPr rtlCol="0" anchor="ctr" wrap="square"/>
+          <a:bodyPr wrap="square" rtlCol="0" anchor="ctr"/>
           <a:lstStyle/>
           <a:p>
             <a:pPr algn="l">
@@ -16797,7 +19106,7 @@
           </a:ln>
         </p:spPr>
         <p:txBody>
-          <a:bodyPr rtlCol="0" anchor="ctr" wrap="square"/>
+          <a:bodyPr wrap="square" rtlCol="0" anchor="ctr"/>
           <a:lstStyle/>
           <a:p>
             <a:pPr algn="l">
@@ -16855,7 +19164,7 @@
           </a:ln>
         </p:spPr>
         <p:txBody>
-          <a:bodyPr rtlCol="0" anchor="ctr" wrap="square"/>
+          <a:bodyPr wrap="square" rtlCol="0" anchor="ctr"/>
           <a:lstStyle/>
           <a:p>
             <a:pPr algn="l">
@@ -16913,7 +19222,7 @@
           </a:ln>
         </p:spPr>
         <p:txBody>
-          <a:bodyPr rtlCol="0" anchor="ctr" wrap="square"/>
+          <a:bodyPr wrap="square" rtlCol="0" anchor="ctr"/>
           <a:lstStyle/>
           <a:p>
             <a:pPr algn="l">
@@ -16971,7 +19280,7 @@
           </a:ln>
         </p:spPr>
         <p:txBody>
-          <a:bodyPr rtlCol="0" anchor="ctr" wrap="square"/>
+          <a:bodyPr wrap="square" rtlCol="0" anchor="ctr"/>
           <a:lstStyle/>
           <a:p>
             <a:pPr algn="l">
@@ -17016,7 +19325,7 @@
 </file>
 
 <file path=ppt/slides/slide8.xml><?xml version="1.0" encoding="utf-8"?>
-<p:sld xmlns:a="http://schemas.openxmlformats.org/drawingml/2006/main" xmlns:p="http://schemas.openxmlformats.org/presentationml/2006/main" xmlns:r="http://schemas.openxmlformats.org/officeDocument/2006/relationships">
+<p:sld xmlns:a="http://schemas.openxmlformats.org/drawingml/2006/main" xmlns:r="http://schemas.openxmlformats.org/officeDocument/2006/relationships" xmlns:p="http://schemas.openxmlformats.org/presentationml/2006/main">
   <p:cSld>
     <p:spTree>
       <p:nvGrpSpPr>
@@ -17024,7 +19333,14 @@
         <p:cNvGrpSpPr/>
         <p:nvPr/>
       </p:nvGrpSpPr>
-      <p:grpSpPr/>
+      <p:grpSpPr>
+        <a:xfrm>
+          <a:off x="0" y="0"/>
+          <a:ext cx="0" cy="0"/>
+          <a:chOff x="0" y="0"/>
+          <a:chExt cx="0" cy="0"/>
+        </a:xfrm>
+      </p:grpSpPr>
       <p:sp>
         <p:nvSpPr>
           <p:cNvPr id="2" name="TextBox 1"/>
@@ -17042,7 +19358,7 @@
           <a:noFill/>
         </p:spPr>
         <p:txBody>
-          <a:bodyPr wrap="square" anchor="b" lIns="0" rIns="0" tIns="0" bIns="0"/>
+          <a:bodyPr wrap="square" lIns="0" tIns="0" rIns="0" bIns="0" anchor="b"/>
           <a:lstStyle/>
           <a:p>
             <a:pPr algn="l">
@@ -17121,7 +19437,7 @@
           <a:noFill/>
         </p:spPr>
         <p:txBody>
-          <a:bodyPr wrap="square" anchor="t" lIns="0" rIns="0" tIns="0" bIns="0"/>
+          <a:bodyPr wrap="square" lIns="0" tIns="0" rIns="0" bIns="0" anchor="t"/>
           <a:lstStyle/>
           <a:p>
             <a:pPr algn="l">
@@ -17158,7 +19474,7 @@
           <a:noFill/>
         </p:spPr>
         <p:txBody>
-          <a:bodyPr wrap="square" anchor="t" lIns="0" rIns="0" tIns="0" bIns="0"/>
+          <a:bodyPr wrap="square" lIns="0" tIns="0" rIns="0" bIns="0" anchor="t"/>
           <a:lstStyle/>
           <a:p>
             <a:pPr algn="r">
@@ -17195,7 +19511,7 @@
           <a:noFill/>
         </p:spPr>
         <p:txBody>
-          <a:bodyPr wrap="square" anchor="t" lIns="0" rIns="0" tIns="0" bIns="0"/>
+          <a:bodyPr wrap="square" lIns="0" tIns="0" rIns="0" bIns="0" anchor="t"/>
           <a:lstStyle/>
           <a:p>
             <a:pPr algn="l">
@@ -17237,7 +19553,7 @@
           </a:ln>
         </p:spPr>
         <p:txBody>
-          <a:bodyPr rtlCol="0" anchor="t" wrap="square" lIns="109728" rIns="109728"/>
+          <a:bodyPr wrap="square" lIns="109728" rIns="109728" rtlCol="0" anchor="t"/>
           <a:lstStyle/>
           <a:p>
             <a:pPr algn="l">
@@ -17295,7 +19611,7 @@
           </a:ln>
         </p:spPr>
         <p:txBody>
-          <a:bodyPr rtlCol="0" anchor="t" wrap="square" lIns="109728" rIns="109728"/>
+          <a:bodyPr wrap="square" lIns="109728" rIns="109728" rtlCol="0" anchor="t"/>
           <a:lstStyle/>
           <a:p>
             <a:pPr algn="l">
@@ -17378,7 +19694,7 @@
           </a:ln>
         </p:spPr>
         <p:txBody>
-          <a:bodyPr rtlCol="0" anchor="t" wrap="square" lIns="109728" rIns="109728"/>
+          <a:bodyPr wrap="square" lIns="109728" rIns="109728" rtlCol="0" anchor="t"/>
           <a:lstStyle/>
           <a:p>
             <a:pPr algn="l">
@@ -17461,7 +19777,7 @@
           </a:ln>
         </p:spPr>
         <p:txBody>
-          <a:bodyPr rtlCol="0" anchor="t" wrap="square" lIns="109728" rIns="109728"/>
+          <a:bodyPr wrap="square" lIns="109728" rIns="109728" rtlCol="0" anchor="t"/>
           <a:lstStyle/>
           <a:p>
             <a:pPr algn="l">
@@ -17539,7 +19855,7 @@
           <a:noFill/>
         </p:spPr>
         <p:txBody>
-          <a:bodyPr wrap="square" anchor="t" lIns="0" rIns="0" tIns="0" bIns="0"/>
+          <a:bodyPr wrap="square" lIns="0" tIns="0" rIns="0" bIns="0" anchor="t"/>
           <a:lstStyle/>
           <a:p>
             <a:pPr algn="l">
@@ -17581,7 +19897,7 @@
           </a:ln>
         </p:spPr>
         <p:txBody>
-          <a:bodyPr rtlCol="0" anchor="t" wrap="square" lIns="109728" rIns="109728"/>
+          <a:bodyPr wrap="square" lIns="109728" rIns="109728" rtlCol="0" anchor="t"/>
           <a:lstStyle/>
           <a:p>
             <a:pPr algn="l">
@@ -17639,7 +19955,7 @@
           </a:ln>
         </p:spPr>
         <p:txBody>
-          <a:bodyPr rtlCol="0" anchor="t" wrap="square" lIns="109728" rIns="109728"/>
+          <a:bodyPr wrap="square" lIns="109728" rIns="109728" rtlCol="0" anchor="t"/>
           <a:lstStyle/>
           <a:p>
             <a:pPr algn="l">
@@ -17722,7 +20038,7 @@
           </a:ln>
         </p:spPr>
         <p:txBody>
-          <a:bodyPr rtlCol="0" anchor="t" wrap="square" lIns="109728" rIns="109728"/>
+          <a:bodyPr wrap="square" lIns="109728" rIns="109728" rtlCol="0" anchor="t"/>
           <a:lstStyle/>
           <a:p>
             <a:pPr algn="l">
@@ -17805,7 +20121,7 @@
           </a:ln>
         </p:spPr>
         <p:txBody>
-          <a:bodyPr rtlCol="0" anchor="t" wrap="square" lIns="109728" rIns="109728"/>
+          <a:bodyPr wrap="square" lIns="109728" rIns="109728" rtlCol="0" anchor="t"/>
           <a:lstStyle/>
           <a:p>
             <a:pPr algn="l">
@@ -17888,7 +20204,7 @@
           </a:ln>
         </p:spPr>
         <p:txBody>
-          <a:bodyPr rtlCol="0" anchor="t" wrap="square" lIns="109728" rIns="109728"/>
+          <a:bodyPr wrap="square" lIns="109728" rIns="109728" rtlCol="0" anchor="t"/>
           <a:lstStyle/>
           <a:p>
             <a:pPr algn="l">
@@ -17946,7 +20262,7 @@
           </a:ln>
         </p:spPr>
         <p:txBody>
-          <a:bodyPr rtlCol="0" anchor="t" wrap="square" lIns="109728" rIns="109728"/>
+          <a:bodyPr wrap="square" lIns="109728" rIns="109728" rtlCol="0" anchor="t"/>
           <a:lstStyle/>
           <a:p>
             <a:pPr algn="l">
@@ -17991,7 +20307,7 @@
 </file>
 
 <file path=ppt/slides/slide9.xml><?xml version="1.0" encoding="utf-8"?>
-<p:sld xmlns:a="http://schemas.openxmlformats.org/drawingml/2006/main" xmlns:p="http://schemas.openxmlformats.org/presentationml/2006/main" xmlns:r="http://schemas.openxmlformats.org/officeDocument/2006/relationships">
+<p:sld xmlns:a="http://schemas.openxmlformats.org/drawingml/2006/main" xmlns:r="http://schemas.openxmlformats.org/officeDocument/2006/relationships" xmlns:p="http://schemas.openxmlformats.org/presentationml/2006/main">
   <p:cSld>
     <p:spTree>
       <p:nvGrpSpPr>
@@ -17999,7 +20315,14 @@
         <p:cNvGrpSpPr/>
         <p:nvPr/>
       </p:nvGrpSpPr>
-      <p:grpSpPr/>
+      <p:grpSpPr>
+        <a:xfrm>
+          <a:off x="0" y="0"/>
+          <a:ext cx="0" cy="0"/>
+          <a:chOff x="0" y="0"/>
+          <a:chExt cx="0" cy="0"/>
+        </a:xfrm>
+      </p:grpSpPr>
       <p:sp>
         <p:nvSpPr>
           <p:cNvPr id="2" name="TextBox 1"/>
@@ -18017,7 +20340,7 @@
           <a:noFill/>
         </p:spPr>
         <p:txBody>
-          <a:bodyPr wrap="square" anchor="b" lIns="0" rIns="0" tIns="0" bIns="0"/>
+          <a:bodyPr wrap="square" lIns="0" tIns="0" rIns="0" bIns="0" anchor="b"/>
           <a:lstStyle/>
           <a:p>
             <a:pPr algn="l">
@@ -18096,7 +20419,7 @@
           <a:noFill/>
         </p:spPr>
         <p:txBody>
-          <a:bodyPr wrap="square" anchor="t" lIns="0" rIns="0" tIns="0" bIns="0"/>
+          <a:bodyPr wrap="square" lIns="0" tIns="0" rIns="0" bIns="0" anchor="t"/>
           <a:lstStyle/>
           <a:p>
             <a:pPr algn="l">
@@ -18133,7 +20456,7 @@
           <a:noFill/>
         </p:spPr>
         <p:txBody>
-          <a:bodyPr wrap="square" anchor="t" lIns="0" rIns="0" tIns="0" bIns="0"/>
+          <a:bodyPr wrap="square" lIns="0" tIns="0" rIns="0" bIns="0" anchor="t"/>
           <a:lstStyle/>
           <a:p>
             <a:pPr algn="r">
@@ -18170,7 +20493,7 @@
           <a:noFill/>
         </p:spPr>
         <p:txBody>
-          <a:bodyPr wrap="square" anchor="t" lIns="0" rIns="0" tIns="0" bIns="0"/>
+          <a:bodyPr wrap="square" lIns="0" tIns="0" rIns="0" bIns="0" anchor="t"/>
           <a:lstStyle/>
           <a:p>
             <a:pPr algn="l">
@@ -18204,7 +20527,7 @@
         </p:xfrm>
         <a:graphic>
           <a:graphicData uri="http://schemas.openxmlformats.org/drawingml/2006/chart">
-            <c:chart xmlns:c="http://schemas.openxmlformats.org/drawingml/2006/chart" r:id="rId3"/>
+            <c:chart xmlns:c="http://schemas.openxmlformats.org/drawingml/2006/chart" xmlns:r="http://schemas.openxmlformats.org/officeDocument/2006/relationships" r:id="rId3"/>
           </a:graphicData>
         </a:graphic>
       </p:graphicFrame>
@@ -18225,7 +20548,7 @@
           <a:noFill/>
         </p:spPr>
         <p:txBody>
-          <a:bodyPr wrap="square" anchor="t" lIns="0" rIns="0" tIns="0" bIns="0"/>
+          <a:bodyPr wrap="square" lIns="0" tIns="0" rIns="0" bIns="0" anchor="t"/>
           <a:lstStyle/>
           <a:p>
             <a:pPr algn="l">
@@ -18262,7 +20585,7 @@
           <a:noFill/>
         </p:spPr>
         <p:txBody>
-          <a:bodyPr wrap="square" anchor="t" lIns="0" rIns="0" tIns="0" bIns="0"/>
+          <a:bodyPr wrap="square" lIns="0" tIns="0" rIns="0" bIns="0" anchor="t"/>
           <a:lstStyle/>
           <a:p>
             <a:pPr algn="l">
@@ -18301,13 +20624,25 @@
                 <a:tableStyleId>{2D5ABB26-0587-4C30-8999-92F81FD0307C}</a:tableStyleId>
               </a:tblPr>
               <a:tblGrid>
-                <a:gridCol w="2971800"/>
-                <a:gridCol w="1078992"/>
+                <a:gridCol w="2971800">
+                  <a:extLst>
+                    <a:ext uri="{9D8B030D-6E8A-4147-A177-3AD203B41FA5}">
+                      <a16:colId xmlns:a16="http://schemas.microsoft.com/office/drawing/2014/main" val="20000"/>
+                    </a:ext>
+                  </a:extLst>
+                </a:gridCol>
+                <a:gridCol w="1078992">
+                  <a:extLst>
+                    <a:ext uri="{9D8B030D-6E8A-4147-A177-3AD203B41FA5}">
+                      <a16:colId xmlns:a16="http://schemas.microsoft.com/office/drawing/2014/main" val="20001"/>
+                    </a:ext>
+                  </a:extLst>
+                </a:gridCol>
               </a:tblGrid>
               <a:tr h="292608">
                 <a:tc>
                   <a:txBody>
-                    <a:bodyPr wrap="square"/>
+                    <a:bodyPr/>
                     <a:lstStyle/>
                     <a:p>
                       <a:r>
@@ -18343,7 +20678,7 @@
                 </a:tc>
                 <a:tc>
                   <a:txBody>
-                    <a:bodyPr wrap="square"/>
+                    <a:bodyPr/>
                     <a:lstStyle/>
                     <a:p>
                       <a:r>
@@ -18377,11 +20712,16 @@
                     </a:solidFill>
                   </a:tcPr>
                 </a:tc>
+                <a:extLst>
+                  <a:ext uri="{0D108BD9-81ED-4DB2-BD59-A6C34878D82A}">
+                    <a16:rowId xmlns:a16="http://schemas.microsoft.com/office/drawing/2014/main" val="10000"/>
+                  </a:ext>
+                </a:extLst>
               </a:tr>
               <a:tr h="292608">
                 <a:tc>
                   <a:txBody>
-                    <a:bodyPr wrap="square"/>
+                    <a:bodyPr/>
                     <a:lstStyle/>
                     <a:p>
                       <a:r>
@@ -18395,15 +20735,21 @@
                       </a:r>
                     </a:p>
                   </a:txBody>
-                  <a:tcPr marL="73152" marR="73152" marT="36576" marB="36576" anchor="t">
+                  <a:tcPr marL="73152" marR="73152" marT="36576" marB="36576">
                     <a:lnL w="0">
                       <a:noFill/>
                     </a:lnL>
                     <a:lnR w="0">
                       <a:noFill/>
                     </a:lnR>
-                    <a:lnT w="0">
-                      <a:noFill/>
+                    <a:lnT w="12700" cap="flat" cmpd="sng" algn="ctr">
+                      <a:solidFill>
+                        <a:srgbClr val="1B2430"/>
+                      </a:solidFill>
+                      <a:prstDash val="solid"/>
+                      <a:round/>
+                      <a:headEnd type="none" w="med" len="med"/>
+                      <a:tailEnd type="none" w="med" len="med"/>
                     </a:lnT>
                     <a:lnB w="9525">
                       <a:solidFill>
@@ -18417,7 +20763,7 @@
                 </a:tc>
                 <a:tc>
                   <a:txBody>
-                    <a:bodyPr wrap="square"/>
+                    <a:bodyPr/>
                     <a:lstStyle/>
                     <a:p>
                       <a:r>
@@ -18431,15 +20777,21 @@
                       </a:r>
                     </a:p>
                   </a:txBody>
-                  <a:tcPr marL="73152" marR="73152" marT="36576" marB="36576" anchor="t">
+                  <a:tcPr marL="73152" marR="73152" marT="36576" marB="36576">
                     <a:lnL w="0">
                       <a:noFill/>
                     </a:lnL>
                     <a:lnR w="0">
                       <a:noFill/>
                     </a:lnR>
-                    <a:lnT w="0">
-                      <a:noFill/>
+                    <a:lnT w="12700" cap="flat" cmpd="sng" algn="ctr">
+                      <a:solidFill>
+                        <a:srgbClr val="1B2430"/>
+                      </a:solidFill>
+                      <a:prstDash val="solid"/>
+                      <a:round/>
+                      <a:headEnd type="none" w="med" len="med"/>
+                      <a:tailEnd type="none" w="med" len="med"/>
                     </a:lnT>
                     <a:lnB w="9525">
                       <a:solidFill>
@@ -18451,11 +20803,16 @@
                     </a:solidFill>
                   </a:tcPr>
                 </a:tc>
+                <a:extLst>
+                  <a:ext uri="{0D108BD9-81ED-4DB2-BD59-A6C34878D82A}">
+                    <a16:rowId xmlns:a16="http://schemas.microsoft.com/office/drawing/2014/main" val="10001"/>
+                  </a:ext>
+                </a:extLst>
               </a:tr>
               <a:tr h="292608">
                 <a:tc>
                   <a:txBody>
-                    <a:bodyPr wrap="square"/>
+                    <a:bodyPr/>
                     <a:lstStyle/>
                     <a:p>
                       <a:r>
@@ -18469,15 +20826,21 @@
                       </a:r>
                     </a:p>
                   </a:txBody>
-                  <a:tcPr marL="73152" marR="73152" marT="36576" marB="36576" anchor="t">
+                  <a:tcPr marL="73152" marR="73152" marT="36576" marB="36576">
                     <a:lnL w="0">
                       <a:noFill/>
                     </a:lnL>
                     <a:lnR w="0">
                       <a:noFill/>
                     </a:lnR>
-                    <a:lnT w="0">
-                      <a:noFill/>
+                    <a:lnT w="9525" cap="flat" cmpd="sng" algn="ctr">
+                      <a:solidFill>
+                        <a:srgbClr val="C9CED6"/>
+                      </a:solidFill>
+                      <a:prstDash val="solid"/>
+                      <a:round/>
+                      <a:headEnd type="none" w="med" len="med"/>
+                      <a:tailEnd type="none" w="med" len="med"/>
                     </a:lnT>
                     <a:lnB w="9525">
                       <a:solidFill>
@@ -18491,7 +20854,7 @@
                 </a:tc>
                 <a:tc>
                   <a:txBody>
-                    <a:bodyPr wrap="square"/>
+                    <a:bodyPr/>
                     <a:lstStyle/>
                     <a:p>
                       <a:r>
@@ -18505,15 +20868,21 @@
                       </a:r>
                     </a:p>
                   </a:txBody>
-                  <a:tcPr marL="73152" marR="73152" marT="36576" marB="36576" anchor="t">
+                  <a:tcPr marL="73152" marR="73152" marT="36576" marB="36576">
                     <a:lnL w="0">
                       <a:noFill/>
                     </a:lnL>
                     <a:lnR w="0">
                       <a:noFill/>
                     </a:lnR>
-                    <a:lnT w="0">
-                      <a:noFill/>
+                    <a:lnT w="9525" cap="flat" cmpd="sng" algn="ctr">
+                      <a:solidFill>
+                        <a:srgbClr val="C9CED6"/>
+                      </a:solidFill>
+                      <a:prstDash val="solid"/>
+                      <a:round/>
+                      <a:headEnd type="none" w="med" len="med"/>
+                      <a:tailEnd type="none" w="med" len="med"/>
                     </a:lnT>
                     <a:lnB w="9525">
                       <a:solidFill>
@@ -18525,11 +20894,16 @@
                     </a:solidFill>
                   </a:tcPr>
                 </a:tc>
+                <a:extLst>
+                  <a:ext uri="{0D108BD9-81ED-4DB2-BD59-A6C34878D82A}">
+                    <a16:rowId xmlns:a16="http://schemas.microsoft.com/office/drawing/2014/main" val="10002"/>
+                  </a:ext>
+                </a:extLst>
               </a:tr>
               <a:tr h="292608">
                 <a:tc>
                   <a:txBody>
-                    <a:bodyPr wrap="square"/>
+                    <a:bodyPr/>
                     <a:lstStyle/>
                     <a:p>
                       <a:r>
@@ -18543,15 +20917,21 @@
                       </a:r>
                     </a:p>
                   </a:txBody>
-                  <a:tcPr marL="73152" marR="73152" marT="36576" marB="36576" anchor="t">
+                  <a:tcPr marL="73152" marR="73152" marT="36576" marB="36576">
                     <a:lnL w="0">
                       <a:noFill/>
                     </a:lnL>
                     <a:lnR w="0">
                       <a:noFill/>
                     </a:lnR>
-                    <a:lnT w="0">
-                      <a:noFill/>
+                    <a:lnT w="9525" cap="flat" cmpd="sng" algn="ctr">
+                      <a:solidFill>
+                        <a:srgbClr val="C9CED6"/>
+                      </a:solidFill>
+                      <a:prstDash val="solid"/>
+                      <a:round/>
+                      <a:headEnd type="none" w="med" len="med"/>
+                      <a:tailEnd type="none" w="med" len="med"/>
                     </a:lnT>
                     <a:lnB w="9525">
                       <a:solidFill>
@@ -18565,7 +20945,7 @@
                 </a:tc>
                 <a:tc>
                   <a:txBody>
-                    <a:bodyPr wrap="square"/>
+                    <a:bodyPr/>
                     <a:lstStyle/>
                     <a:p>
                       <a:r>
@@ -18579,15 +20959,21 @@
                       </a:r>
                     </a:p>
                   </a:txBody>
-                  <a:tcPr marL="73152" marR="73152" marT="36576" marB="36576" anchor="t">
+                  <a:tcPr marL="73152" marR="73152" marT="36576" marB="36576">
                     <a:lnL w="0">
                       <a:noFill/>
                     </a:lnL>
                     <a:lnR w="0">
                       <a:noFill/>
                     </a:lnR>
-                    <a:lnT w="0">
-                      <a:noFill/>
+                    <a:lnT w="9525" cap="flat" cmpd="sng" algn="ctr">
+                      <a:solidFill>
+                        <a:srgbClr val="C9CED6"/>
+                      </a:solidFill>
+                      <a:prstDash val="solid"/>
+                      <a:round/>
+                      <a:headEnd type="none" w="med" len="med"/>
+                      <a:tailEnd type="none" w="med" len="med"/>
                     </a:lnT>
                     <a:lnB w="9525">
                       <a:solidFill>
@@ -18599,11 +20985,16 @@
                     </a:solidFill>
                   </a:tcPr>
                 </a:tc>
+                <a:extLst>
+                  <a:ext uri="{0D108BD9-81ED-4DB2-BD59-A6C34878D82A}">
+                    <a16:rowId xmlns:a16="http://schemas.microsoft.com/office/drawing/2014/main" val="10003"/>
+                  </a:ext>
+                </a:extLst>
               </a:tr>
               <a:tr h="292608">
                 <a:tc>
                   <a:txBody>
-                    <a:bodyPr wrap="square"/>
+                    <a:bodyPr/>
                     <a:lstStyle/>
                     <a:p>
                       <a:r>
@@ -18617,15 +21008,21 @@
                       </a:r>
                     </a:p>
                   </a:txBody>
-                  <a:tcPr marL="73152" marR="73152" marT="36576" marB="36576" anchor="t">
+                  <a:tcPr marL="73152" marR="73152" marT="36576" marB="36576">
                     <a:lnL w="0">
                       <a:noFill/>
                     </a:lnL>
                     <a:lnR w="0">
                       <a:noFill/>
                     </a:lnR>
-                    <a:lnT w="0">
-                      <a:noFill/>
+                    <a:lnT w="9525" cap="flat" cmpd="sng" algn="ctr">
+                      <a:solidFill>
+                        <a:srgbClr val="C9CED6"/>
+                      </a:solidFill>
+                      <a:prstDash val="solid"/>
+                      <a:round/>
+                      <a:headEnd type="none" w="med" len="med"/>
+                      <a:tailEnd type="none" w="med" len="med"/>
                     </a:lnT>
                     <a:lnB w="9525">
                       <a:solidFill>
@@ -18639,7 +21036,7 @@
                 </a:tc>
                 <a:tc>
                   <a:txBody>
-                    <a:bodyPr wrap="square"/>
+                    <a:bodyPr/>
                     <a:lstStyle/>
                     <a:p>
                       <a:r>
@@ -18653,15 +21050,21 @@
                       </a:r>
                     </a:p>
                   </a:txBody>
-                  <a:tcPr marL="73152" marR="73152" marT="36576" marB="36576" anchor="t">
+                  <a:tcPr marL="73152" marR="73152" marT="36576" marB="36576">
                     <a:lnL w="0">
                       <a:noFill/>
                     </a:lnL>
                     <a:lnR w="0">
                       <a:noFill/>
                     </a:lnR>
-                    <a:lnT w="0">
-                      <a:noFill/>
+                    <a:lnT w="9525" cap="flat" cmpd="sng" algn="ctr">
+                      <a:solidFill>
+                        <a:srgbClr val="C9CED6"/>
+                      </a:solidFill>
+                      <a:prstDash val="solid"/>
+                      <a:round/>
+                      <a:headEnd type="none" w="med" len="med"/>
+                      <a:tailEnd type="none" w="med" len="med"/>
                     </a:lnT>
                     <a:lnB w="9525">
                       <a:solidFill>
@@ -18673,11 +21076,16 @@
                     </a:solidFill>
                   </a:tcPr>
                 </a:tc>
+                <a:extLst>
+                  <a:ext uri="{0D108BD9-81ED-4DB2-BD59-A6C34878D82A}">
+                    <a16:rowId xmlns:a16="http://schemas.microsoft.com/office/drawing/2014/main" val="10004"/>
+                  </a:ext>
+                </a:extLst>
               </a:tr>
               <a:tr h="292608">
                 <a:tc>
                   <a:txBody>
-                    <a:bodyPr wrap="square"/>
+                    <a:bodyPr/>
                     <a:lstStyle/>
                     <a:p>
                       <a:r>
@@ -18691,15 +21099,21 @@
                       </a:r>
                     </a:p>
                   </a:txBody>
-                  <a:tcPr marL="73152" marR="73152" marT="36576" marB="36576" anchor="t">
+                  <a:tcPr marL="73152" marR="73152" marT="36576" marB="36576">
                     <a:lnL w="0">
                       <a:noFill/>
                     </a:lnL>
                     <a:lnR w="0">
                       <a:noFill/>
                     </a:lnR>
-                    <a:lnT w="0">
-                      <a:noFill/>
+                    <a:lnT w="9525" cap="flat" cmpd="sng" algn="ctr">
+                      <a:solidFill>
+                        <a:srgbClr val="C9CED6"/>
+                      </a:solidFill>
+                      <a:prstDash val="solid"/>
+                      <a:round/>
+                      <a:headEnd type="none" w="med" len="med"/>
+                      <a:tailEnd type="none" w="med" len="med"/>
                     </a:lnT>
                     <a:lnB w="9525">
                       <a:solidFill>
@@ -18713,7 +21127,7 @@
                 </a:tc>
                 <a:tc>
                   <a:txBody>
-                    <a:bodyPr wrap="square"/>
+                    <a:bodyPr/>
                     <a:lstStyle/>
                     <a:p>
                       <a:r>
@@ -18727,15 +21141,21 @@
                       </a:r>
                     </a:p>
                   </a:txBody>
-                  <a:tcPr marL="73152" marR="73152" marT="36576" marB="36576" anchor="t">
+                  <a:tcPr marL="73152" marR="73152" marT="36576" marB="36576">
                     <a:lnL w="0">
                       <a:noFill/>
                     </a:lnL>
                     <a:lnR w="0">
                       <a:noFill/>
                     </a:lnR>
-                    <a:lnT w="0">
-                      <a:noFill/>
+                    <a:lnT w="9525" cap="flat" cmpd="sng" algn="ctr">
+                      <a:solidFill>
+                        <a:srgbClr val="C9CED6"/>
+                      </a:solidFill>
+                      <a:prstDash val="solid"/>
+                      <a:round/>
+                      <a:headEnd type="none" w="med" len="med"/>
+                      <a:tailEnd type="none" w="med" len="med"/>
                     </a:lnT>
                     <a:lnB w="9525">
                       <a:solidFill>
@@ -18747,11 +21167,16 @@
                     </a:solidFill>
                   </a:tcPr>
                 </a:tc>
+                <a:extLst>
+                  <a:ext uri="{0D108BD9-81ED-4DB2-BD59-A6C34878D82A}">
+                    <a16:rowId xmlns:a16="http://schemas.microsoft.com/office/drawing/2014/main" val="10005"/>
+                  </a:ext>
+                </a:extLst>
               </a:tr>
               <a:tr h="292608">
                 <a:tc>
                   <a:txBody>
-                    <a:bodyPr wrap="square"/>
+                    <a:bodyPr/>
                     <a:lstStyle/>
                     <a:p>
                       <a:r>
@@ -18765,15 +21190,21 @@
                       </a:r>
                     </a:p>
                   </a:txBody>
-                  <a:tcPr marL="73152" marR="73152" marT="36576" marB="36576" anchor="t">
+                  <a:tcPr marL="73152" marR="73152" marT="36576" marB="36576">
                     <a:lnL w="0">
                       <a:noFill/>
                     </a:lnL>
                     <a:lnR w="0">
                       <a:noFill/>
                     </a:lnR>
-                    <a:lnT w="0">
-                      <a:noFill/>
+                    <a:lnT w="9525" cap="flat" cmpd="sng" algn="ctr">
+                      <a:solidFill>
+                        <a:srgbClr val="C9CED6"/>
+                      </a:solidFill>
+                      <a:prstDash val="solid"/>
+                      <a:round/>
+                      <a:headEnd type="none" w="med" len="med"/>
+                      <a:tailEnd type="none" w="med" len="med"/>
                     </a:lnT>
                     <a:lnB w="9525">
                       <a:solidFill>
@@ -18787,7 +21218,7 @@
                 </a:tc>
                 <a:tc>
                   <a:txBody>
-                    <a:bodyPr wrap="square"/>
+                    <a:bodyPr/>
                     <a:lstStyle/>
                     <a:p>
                       <a:r>
@@ -18801,15 +21232,21 @@
                       </a:r>
                     </a:p>
                   </a:txBody>
-                  <a:tcPr marL="73152" marR="73152" marT="36576" marB="36576" anchor="t">
+                  <a:tcPr marL="73152" marR="73152" marT="36576" marB="36576">
                     <a:lnL w="0">
                       <a:noFill/>
                     </a:lnL>
                     <a:lnR w="0">
                       <a:noFill/>
                     </a:lnR>
-                    <a:lnT w="0">
-                      <a:noFill/>
+                    <a:lnT w="9525" cap="flat" cmpd="sng" algn="ctr">
+                      <a:solidFill>
+                        <a:srgbClr val="C9CED6"/>
+                      </a:solidFill>
+                      <a:prstDash val="solid"/>
+                      <a:round/>
+                      <a:headEnd type="none" w="med" len="med"/>
+                      <a:tailEnd type="none" w="med" len="med"/>
                     </a:lnT>
                     <a:lnB w="9525">
                       <a:solidFill>
@@ -18821,11 +21258,16 @@
                     </a:solidFill>
                   </a:tcPr>
                 </a:tc>
+                <a:extLst>
+                  <a:ext uri="{0D108BD9-81ED-4DB2-BD59-A6C34878D82A}">
+                    <a16:rowId xmlns:a16="http://schemas.microsoft.com/office/drawing/2014/main" val="10006"/>
+                  </a:ext>
+                </a:extLst>
               </a:tr>
               <a:tr h="292608">
                 <a:tc>
                   <a:txBody>
-                    <a:bodyPr wrap="square"/>
+                    <a:bodyPr/>
                     <a:lstStyle/>
                     <a:p>
                       <a:r>
@@ -18839,15 +21281,21 @@
                       </a:r>
                     </a:p>
                   </a:txBody>
-                  <a:tcPr marL="73152" marR="73152" marT="36576" marB="36576" anchor="t">
+                  <a:tcPr marL="73152" marR="73152" marT="36576" marB="36576">
                     <a:lnL w="0">
                       <a:noFill/>
                     </a:lnL>
                     <a:lnR w="0">
                       <a:noFill/>
                     </a:lnR>
-                    <a:lnT w="0">
-                      <a:noFill/>
+                    <a:lnT w="9525" cap="flat" cmpd="sng" algn="ctr">
+                      <a:solidFill>
+                        <a:srgbClr val="C9CED6"/>
+                      </a:solidFill>
+                      <a:prstDash val="solid"/>
+                      <a:round/>
+                      <a:headEnd type="none" w="med" len="med"/>
+                      <a:tailEnd type="none" w="med" len="med"/>
                     </a:lnT>
                     <a:lnB w="9525">
                       <a:solidFill>
@@ -18861,7 +21309,7 @@
                 </a:tc>
                 <a:tc>
                   <a:txBody>
-                    <a:bodyPr wrap="square"/>
+                    <a:bodyPr/>
                     <a:lstStyle/>
                     <a:p>
                       <a:r>
@@ -18875,15 +21323,21 @@
                       </a:r>
                     </a:p>
                   </a:txBody>
-                  <a:tcPr marL="73152" marR="73152" marT="36576" marB="36576" anchor="t">
+                  <a:tcPr marL="73152" marR="73152" marT="36576" marB="36576">
                     <a:lnL w="0">
                       <a:noFill/>
                     </a:lnL>
                     <a:lnR w="0">
                       <a:noFill/>
                     </a:lnR>
-                    <a:lnT w="0">
-                      <a:noFill/>
+                    <a:lnT w="9525" cap="flat" cmpd="sng" algn="ctr">
+                      <a:solidFill>
+                        <a:srgbClr val="C9CED6"/>
+                      </a:solidFill>
+                      <a:prstDash val="solid"/>
+                      <a:round/>
+                      <a:headEnd type="none" w="med" len="med"/>
+                      <a:tailEnd type="none" w="med" len="med"/>
                     </a:lnT>
                     <a:lnB w="9525">
                       <a:solidFill>
@@ -18895,11 +21349,16 @@
                     </a:solidFill>
                   </a:tcPr>
                 </a:tc>
+                <a:extLst>
+                  <a:ext uri="{0D108BD9-81ED-4DB2-BD59-A6C34878D82A}">
+                    <a16:rowId xmlns:a16="http://schemas.microsoft.com/office/drawing/2014/main" val="10007"/>
+                  </a:ext>
+                </a:extLst>
               </a:tr>
               <a:tr h="292608">
                 <a:tc>
                   <a:txBody>
-                    <a:bodyPr wrap="square"/>
+                    <a:bodyPr/>
                     <a:lstStyle/>
                     <a:p>
                       <a:r>
@@ -18913,15 +21372,21 @@
                       </a:r>
                     </a:p>
                   </a:txBody>
-                  <a:tcPr marL="73152" marR="73152" marT="36576" marB="36576" anchor="t">
+                  <a:tcPr marL="73152" marR="73152" marT="36576" marB="36576">
                     <a:lnL w="0">
                       <a:noFill/>
                     </a:lnL>
                     <a:lnR w="0">
                       <a:noFill/>
                     </a:lnR>
-                    <a:lnT w="0">
-                      <a:noFill/>
+                    <a:lnT w="9525" cap="flat" cmpd="sng" algn="ctr">
+                      <a:solidFill>
+                        <a:srgbClr val="C9CED6"/>
+                      </a:solidFill>
+                      <a:prstDash val="solid"/>
+                      <a:round/>
+                      <a:headEnd type="none" w="med" len="med"/>
+                      <a:tailEnd type="none" w="med" len="med"/>
                     </a:lnT>
                     <a:lnB w="9525">
                       <a:solidFill>
@@ -18935,7 +21400,7 @@
                 </a:tc>
                 <a:tc>
                   <a:txBody>
-                    <a:bodyPr wrap="square"/>
+                    <a:bodyPr/>
                     <a:lstStyle/>
                     <a:p>
                       <a:r>
@@ -18949,15 +21414,21 @@
                       </a:r>
                     </a:p>
                   </a:txBody>
-                  <a:tcPr marL="73152" marR="73152" marT="36576" marB="36576" anchor="t">
+                  <a:tcPr marL="73152" marR="73152" marT="36576" marB="36576">
                     <a:lnL w="0">
                       <a:noFill/>
                     </a:lnL>
                     <a:lnR w="0">
                       <a:noFill/>
                     </a:lnR>
-                    <a:lnT w="0">
-                      <a:noFill/>
+                    <a:lnT w="9525" cap="flat" cmpd="sng" algn="ctr">
+                      <a:solidFill>
+                        <a:srgbClr val="C9CED6"/>
+                      </a:solidFill>
+                      <a:prstDash val="solid"/>
+                      <a:round/>
+                      <a:headEnd type="none" w="med" len="med"/>
+                      <a:tailEnd type="none" w="med" len="med"/>
                     </a:lnT>
                     <a:lnB w="9525">
                       <a:solidFill>
@@ -18969,11 +21440,16 @@
                     </a:solidFill>
                   </a:tcPr>
                 </a:tc>
+                <a:extLst>
+                  <a:ext uri="{0D108BD9-81ED-4DB2-BD59-A6C34878D82A}">
+                    <a16:rowId xmlns:a16="http://schemas.microsoft.com/office/drawing/2014/main" val="10008"/>
+                  </a:ext>
+                </a:extLst>
               </a:tr>
               <a:tr h="292608">
                 <a:tc>
                   <a:txBody>
-                    <a:bodyPr wrap="square"/>
+                    <a:bodyPr/>
                     <a:lstStyle/>
                     <a:p>
                       <a:r>
@@ -18987,17 +21463,21 @@
                       </a:r>
                     </a:p>
                   </a:txBody>
-                  <a:tcPr marL="73152" marR="73152" marT="36576" marB="36576" anchor="t">
+                  <a:tcPr marL="73152" marR="73152" marT="36576" marB="36576">
                     <a:lnL w="0">
                       <a:noFill/>
                     </a:lnL>
                     <a:lnR w="0">
                       <a:noFill/>
                     </a:lnR>
-                    <a:lnT w="12700">
+                    <a:lnT w="9525" cap="flat" cmpd="sng" algn="ctr">
                       <a:solidFill>
-                        <a:srgbClr val="1B2430"/>
+                        <a:srgbClr val="C9CED6"/>
                       </a:solidFill>
+                      <a:prstDash val="solid"/>
+                      <a:round/>
+                      <a:headEnd type="none" w="med" len="med"/>
+                      <a:tailEnd type="none" w="med" len="med"/>
                     </a:lnT>
                     <a:lnB w="12700">
                       <a:solidFill>
@@ -19011,7 +21491,7 @@
                 </a:tc>
                 <a:tc>
                   <a:txBody>
-                    <a:bodyPr wrap="square"/>
+                    <a:bodyPr/>
                     <a:lstStyle/>
                     <a:p>
                       <a:r>
@@ -19025,17 +21505,21 @@
                       </a:r>
                     </a:p>
                   </a:txBody>
-                  <a:tcPr marL="73152" marR="73152" marT="36576" marB="36576" anchor="t">
+                  <a:tcPr marL="73152" marR="73152" marT="36576" marB="36576">
                     <a:lnL w="0">
                       <a:noFill/>
                     </a:lnL>
                     <a:lnR w="0">
                       <a:noFill/>
                     </a:lnR>
-                    <a:lnT w="12700">
+                    <a:lnT w="9525" cap="flat" cmpd="sng" algn="ctr">
                       <a:solidFill>
-                        <a:srgbClr val="1B2430"/>
+                        <a:srgbClr val="C9CED6"/>
                       </a:solidFill>
+                      <a:prstDash val="solid"/>
+                      <a:round/>
+                      <a:headEnd type="none" w="med" len="med"/>
+                      <a:tailEnd type="none" w="med" len="med"/>
                     </a:lnT>
                     <a:lnB w="12700">
                       <a:solidFill>
@@ -19047,6 +21531,11 @@
                     </a:solidFill>
                   </a:tcPr>
                 </a:tc>
+                <a:extLst>
+                  <a:ext uri="{0D108BD9-81ED-4DB2-BD59-A6C34878D82A}">
+                    <a16:rowId xmlns:a16="http://schemas.microsoft.com/office/drawing/2014/main" val="10009"/>
+                  </a:ext>
+                </a:extLst>
               </a:tr>
             </a:tbl>
           </a:graphicData>
@@ -19391,44 +21880,44 @@
         <a:sysClr val="window" lastClr="FFFFFF"/>
       </a:lt1>
       <a:dk2>
-        <a:srgbClr val="1F497D"/>
+        <a:srgbClr val="0E2841"/>
       </a:dk2>
       <a:lt2>
-        <a:srgbClr val="EEECE1"/>
+        <a:srgbClr val="E8E8E8"/>
       </a:lt2>
       <a:accent1>
-        <a:srgbClr val="4F81BD"/>
+        <a:srgbClr val="156082"/>
       </a:accent1>
       <a:accent2>
-        <a:srgbClr val="C0504D"/>
+        <a:srgbClr val="E97132"/>
       </a:accent2>
       <a:accent3>
-        <a:srgbClr val="9BBB59"/>
+        <a:srgbClr val="196B24"/>
       </a:accent3>
       <a:accent4>
-        <a:srgbClr val="8064A2"/>
+        <a:srgbClr val="0F9ED5"/>
       </a:accent4>
       <a:accent5>
-        <a:srgbClr val="4BACC6"/>
+        <a:srgbClr val="A02B93"/>
       </a:accent5>
       <a:accent6>
-        <a:srgbClr val="F79646"/>
+        <a:srgbClr val="4EA72E"/>
       </a:accent6>
       <a:hlink>
-        <a:srgbClr val="0000FF"/>
+        <a:srgbClr val="467886"/>
       </a:hlink>
       <a:folHlink>
-        <a:srgbClr val="800080"/>
+        <a:srgbClr val="96607D"/>
       </a:folHlink>
     </a:clrScheme>
     <a:fontScheme name="Office">
       <a:majorFont>
-        <a:latin typeface="Calibri"/>
+        <a:latin typeface="Aptos Display" panose="02110004020202020204"/>
         <a:ea typeface=""/>
         <a:cs typeface=""/>
-        <a:font script="Jpan" typeface="ＭＳ Ｐゴシック"/>
+        <a:font script="Jpan" typeface="游ゴシック Light"/>
         <a:font script="Hang" typeface="맑은 고딕"/>
-        <a:font script="Hans" typeface="宋体"/>
+        <a:font script="Hans" typeface="等线 Light"/>
         <a:font script="Hant" typeface="新細明體"/>
         <a:font script="Arab" typeface="Times New Roman"/>
         <a:font script="Hebr" typeface="Times New Roman"/>
@@ -19456,14 +21945,31 @@
         <a:font script="Viet" typeface="Times New Roman"/>
         <a:font script="Uigh" typeface="Microsoft Uighur"/>
         <a:font script="Geor" typeface="Sylfaen"/>
+        <a:font script="Armn" typeface="Arial"/>
+        <a:font script="Bugi" typeface="Leelawadee UI"/>
+        <a:font script="Bopo" typeface="Microsoft JhengHei"/>
+        <a:font script="Java" typeface="Javanese Text"/>
+        <a:font script="Lisu" typeface="Segoe UI"/>
+        <a:font script="Mymr" typeface="Myanmar Text"/>
+        <a:font script="Nkoo" typeface="Ebrima"/>
+        <a:font script="Olck" typeface="Nirmala UI"/>
+        <a:font script="Osma" typeface="Ebrima"/>
+        <a:font script="Phag" typeface="Phagspa"/>
+        <a:font script="Syrn" typeface="Estrangelo Edessa"/>
+        <a:font script="Syrj" typeface="Estrangelo Edessa"/>
+        <a:font script="Syre" typeface="Estrangelo Edessa"/>
+        <a:font script="Sora" typeface="Nirmala UI"/>
+        <a:font script="Tale" typeface="Microsoft Tai Le"/>
+        <a:font script="Talu" typeface="Microsoft New Tai Lue"/>
+        <a:font script="Tfng" typeface="Ebrima"/>
       </a:majorFont>
       <a:minorFont>
-        <a:latin typeface="Calibri"/>
+        <a:latin typeface="Aptos" panose="02110004020202020204"/>
         <a:ea typeface=""/>
         <a:cs typeface=""/>
-        <a:font script="Jpan" typeface="ＭＳ Ｐゴシック"/>
+        <a:font script="Jpan" typeface="游ゴシック"/>
         <a:font script="Hang" typeface="맑은 고딕"/>
-        <a:font script="Hans" typeface="宋体"/>
+        <a:font script="Hans" typeface="等线"/>
         <a:font script="Hant" typeface="新細明體"/>
         <a:font script="Arab" typeface="Arial"/>
         <a:font script="Hebr" typeface="Arial"/>
@@ -19491,6 +21997,23 @@
         <a:font script="Viet" typeface="Arial"/>
         <a:font script="Uigh" typeface="Microsoft Uighur"/>
         <a:font script="Geor" typeface="Sylfaen"/>
+        <a:font script="Armn" typeface="Arial"/>
+        <a:font script="Bugi" typeface="Leelawadee UI"/>
+        <a:font script="Bopo" typeface="Microsoft JhengHei"/>
+        <a:font script="Java" typeface="Javanese Text"/>
+        <a:font script="Lisu" typeface="Segoe UI"/>
+        <a:font script="Mymr" typeface="Myanmar Text"/>
+        <a:font script="Nkoo" typeface="Ebrima"/>
+        <a:font script="Olck" typeface="Nirmala UI"/>
+        <a:font script="Osma" typeface="Ebrima"/>
+        <a:font script="Phag" typeface="Phagspa"/>
+        <a:font script="Syrn" typeface="Estrangelo Edessa"/>
+        <a:font script="Syrj" typeface="Estrangelo Edessa"/>
+        <a:font script="Syre" typeface="Estrangelo Edessa"/>
+        <a:font script="Sora" typeface="Nirmala UI"/>
+        <a:font script="Tale" typeface="Microsoft Tai Le"/>
+        <a:font script="Talu" typeface="Microsoft New Tai Lue"/>
+        <a:font script="Tfng" typeface="Ebrima"/>
       </a:minorFont>
     </a:fontScheme>
     <a:fmtScheme name="Office">
@@ -19502,180 +22025,136 @@
           <a:gsLst>
             <a:gs pos="0">
               <a:schemeClr val="phClr">
-                <a:tint val="50000"/>
-                <a:satMod val="300000"/>
+                <a:lumMod val="110000"/>
+                <a:satMod val="105000"/>
+                <a:tint val="67000"/>
               </a:schemeClr>
             </a:gs>
-            <a:gs pos="35000">
+            <a:gs pos="50000">
               <a:schemeClr val="phClr">
-                <a:tint val="37000"/>
-                <a:satMod val="300000"/>
+                <a:lumMod val="105000"/>
+                <a:satMod val="103000"/>
+                <a:tint val="73000"/>
               </a:schemeClr>
             </a:gs>
             <a:gs pos="100000">
               <a:schemeClr val="phClr">
-                <a:tint val="15000"/>
-                <a:satMod val="350000"/>
+                <a:lumMod val="105000"/>
+                <a:satMod val="109000"/>
+                <a:tint val="81000"/>
               </a:schemeClr>
             </a:gs>
           </a:gsLst>
-          <a:lin ang="16200000" scaled="1"/>
+          <a:lin ang="5400000" scaled="0"/>
         </a:gradFill>
         <a:gradFill rotWithShape="1">
           <a:gsLst>
             <a:gs pos="0">
               <a:schemeClr val="phClr">
-                <a:tint val="100000"/>
+                <a:satMod val="103000"/>
+                <a:lumMod val="102000"/>
+                <a:tint val="94000"/>
+              </a:schemeClr>
+            </a:gs>
+            <a:gs pos="50000">
+              <a:schemeClr val="phClr">
+                <a:satMod val="110000"/>
+                <a:lumMod val="100000"/>
                 <a:shade val="100000"/>
-                <a:satMod val="130000"/>
               </a:schemeClr>
             </a:gs>
             <a:gs pos="100000">
               <a:schemeClr val="phClr">
-                <a:tint val="50000"/>
-                <a:shade val="100000"/>
-                <a:satMod val="350000"/>
+                <a:lumMod val="99000"/>
+                <a:satMod val="120000"/>
+                <a:shade val="78000"/>
               </a:schemeClr>
             </a:gs>
           </a:gsLst>
-          <a:lin ang="16200000" scaled="0"/>
+          <a:lin ang="5400000" scaled="0"/>
         </a:gradFill>
       </a:fillStyleLst>
       <a:lnStyleLst>
-        <a:ln w="9525" cap="flat" cmpd="sng" algn="ctr">
+        <a:ln w="12700" cap="flat" cmpd="sng" algn="ctr">
           <a:solidFill>
-            <a:schemeClr val="phClr">
-              <a:shade val="95000"/>
-              <a:satMod val="105000"/>
-            </a:schemeClr>
+            <a:schemeClr val="phClr"/>
           </a:solidFill>
           <a:prstDash val="solid"/>
+          <a:miter lim="800000"/>
+        </a:ln>
+        <a:ln w="19050" cap="flat" cmpd="sng" algn="ctr">
+          <a:solidFill>
+            <a:schemeClr val="phClr"/>
+          </a:solidFill>
+          <a:prstDash val="solid"/>
+          <a:miter lim="800000"/>
         </a:ln>
         <a:ln w="25400" cap="flat" cmpd="sng" algn="ctr">
           <a:solidFill>
             <a:schemeClr val="phClr"/>
           </a:solidFill>
           <a:prstDash val="solid"/>
-        </a:ln>
-        <a:ln w="38100" cap="flat" cmpd="sng" algn="ctr">
-          <a:solidFill>
-            <a:schemeClr val="phClr"/>
-          </a:solidFill>
-          <a:prstDash val="solid"/>
+          <a:miter lim="800000"/>
         </a:ln>
       </a:lnStyleLst>
       <a:effectStyleLst>
         <a:effectStyle>
+          <a:effectLst/>
+        </a:effectStyle>
+        <a:effectStyle>
+          <a:effectLst/>
+        </a:effectStyle>
+        <a:effectStyle>
           <a:effectLst>
-            <a:outerShdw blurRad="40000" dist="20000" dir="5400000" rotWithShape="0">
+            <a:outerShdw blurRad="57150" dist="19050" dir="5400000" algn="ctr" rotWithShape="0">
               <a:srgbClr val="000000">
-                <a:alpha val="38000"/>
+                <a:alpha val="63000"/>
               </a:srgbClr>
             </a:outerShdw>
           </a:effectLst>
-        </a:effectStyle>
-        <a:effectStyle>
-          <a:effectLst>
-            <a:outerShdw blurRad="40000" dist="23000" dir="5400000" rotWithShape="0">
-              <a:srgbClr val="000000">
-                <a:alpha val="35000"/>
-              </a:srgbClr>
-            </a:outerShdw>
-          </a:effectLst>
-        </a:effectStyle>
-        <a:effectStyle>
-          <a:effectLst>
-            <a:outerShdw blurRad="40000" dist="23000" dir="5400000" rotWithShape="0">
-              <a:srgbClr val="000000">
-                <a:alpha val="35000"/>
-              </a:srgbClr>
-            </a:outerShdw>
-          </a:effectLst>
-          <a:scene3d>
-            <a:camera prst="orthographicFront">
-              <a:rot lat="0" lon="0" rev="0"/>
-            </a:camera>
-            <a:lightRig rig="threePt" dir="t">
-              <a:rot lat="0" lon="0" rev="1200000"/>
-            </a:lightRig>
-          </a:scene3d>
-          <a:sp3d>
-            <a:bevelT w="63500" h="25400"/>
-          </a:sp3d>
         </a:effectStyle>
       </a:effectStyleLst>
       <a:bgFillStyleLst>
         <a:solidFill>
           <a:schemeClr val="phClr"/>
         </a:solidFill>
+        <a:solidFill>
+          <a:schemeClr val="phClr">
+            <a:tint val="95000"/>
+            <a:satMod val="170000"/>
+          </a:schemeClr>
+        </a:solidFill>
         <a:gradFill rotWithShape="1">
           <a:gsLst>
             <a:gs pos="0">
               <a:schemeClr val="phClr">
-                <a:tint val="40000"/>
-                <a:satMod val="350000"/>
+                <a:tint val="93000"/>
+                <a:satMod val="150000"/>
+                <a:shade val="98000"/>
+                <a:lumMod val="102000"/>
               </a:schemeClr>
             </a:gs>
-            <a:gs pos="40000">
+            <a:gs pos="50000">
               <a:schemeClr val="phClr">
-                <a:tint val="45000"/>
-                <a:shade val="99000"/>
-                <a:satMod val="350000"/>
+                <a:tint val="98000"/>
+                <a:satMod val="130000"/>
+                <a:shade val="90000"/>
+                <a:lumMod val="103000"/>
               </a:schemeClr>
             </a:gs>
             <a:gs pos="100000">
               <a:schemeClr val="phClr">
-                <a:shade val="20000"/>
-                <a:satMod val="255000"/>
+                <a:shade val="63000"/>
+                <a:satMod val="120000"/>
               </a:schemeClr>
             </a:gs>
           </a:gsLst>
-          <a:path path="circle">
-            <a:fillToRect l="50000" t="-80000" r="50000" b="180000"/>
-          </a:path>
-        </a:gradFill>
-        <a:gradFill rotWithShape="1">
-          <a:gsLst>
-            <a:gs pos="0">
-              <a:schemeClr val="phClr">
-                <a:tint val="80000"/>
-                <a:satMod val="300000"/>
-              </a:schemeClr>
-            </a:gs>
-            <a:gs pos="100000">
-              <a:schemeClr val="phClr">
-                <a:shade val="30000"/>
-                <a:satMod val="200000"/>
-              </a:schemeClr>
-            </a:gs>
-          </a:gsLst>
-          <a:path path="circle">
-            <a:fillToRect l="50000" t="50000" r="50000" b="50000"/>
-          </a:path>
+          <a:lin ang="5400000" scaled="0"/>
         </a:gradFill>
       </a:bgFillStyleLst>
     </a:fmtScheme>
   </a:themeElements>
   <a:objectDefaults>
-    <a:spDef>
-      <a:spPr/>
-      <a:bodyPr/>
-      <a:lstStyle/>
-      <a:style>
-        <a:lnRef idx="1">
-          <a:schemeClr val="accent1"/>
-        </a:lnRef>
-        <a:fillRef idx="3">
-          <a:schemeClr val="accent1"/>
-        </a:fillRef>
-        <a:effectRef idx="2">
-          <a:schemeClr val="accent1"/>
-        </a:effectRef>
-        <a:fontRef idx="minor">
-          <a:schemeClr val="lt1"/>
-        </a:fontRef>
-      </a:style>
-    </a:spDef>
     <a:lnDef>
       <a:spPr/>
       <a:bodyPr/>
@@ -19697,5 +22176,10 @@
     </a:lnDef>
   </a:objectDefaults>
   <a:extraClrSchemeLst/>
+  <a:extLst>
+    <a:ext uri="{05A4C25C-085E-4340-85A3-A5531E510DB2}">
+      <thm15:themeFamily xmlns:thm15="http://schemas.microsoft.com/office/thememl/2012/main" name="Office Theme" id="{2E142A2C-CD16-42D6-873A-C26D2A0506FA}" vid="{1BDDFF52-6CD6-40A5-AB3C-68EB2F1E4D0A}"/>
+    </a:ext>
+  </a:extLst>
 </a:theme>
 </file>